--- a/Curso Gas B/12 - UNE 60670 - Recintos de contadores/12 - UNE 60670 - Recintos de contadores - Vídeo 2.pptx
+++ b/Curso Gas B/12 - UNE 60670 - Recintos de contadores/12 - UNE 60670 - Recintos de contadores - Vídeo 2.pptx
@@ -24,6 +24,7 @@
     <p:sldId id="272" r:id="rId24"/>
     <p:sldId id="273" r:id="rId25"/>
     <p:sldId id="274" r:id="rId26"/>
+    <p:sldId id="275" r:id="rId27"/>
   </p:sldIdLst>
   <p:sldSz cx="12191695" cy="6858000" type="screen4x3"/>
   <p:notesSz cx="6858000" cy="9144000"/>
@@ -595,12 +596,12 @@
           <a:lstStyle/>
           <a:p>
             <a:r>
-              <a:t>N1: ¿Por qué hay que convertir el volumen? ¿No basta con lo que mide?</a:t>
-            </a:r>
-          </a:p>
-          <a:p>
-            <a:r>
-              <a:t>N2: No basta, porque el gas ocupa más o menos según su presión y su temperatura. El mismo gas, frío y comprimido, ocupa menos que caliente y suelto. El contador ve un volumen bruto, el de ese momento, y el conversor lo traduce al volumen en condiciones de referencia, unas condiciones estándar iguales para todos, para poder facturar con justicia. Hay dos tipos. El conversor tipo PT corrige por presión y por temperatura. El tipo PTZ hace lo mismo y además tiene en cuenta el factor de compresibilidad, la zeta, que afina todavía más cómo se comprime ese gas concreto. Solo para gas natural, para el ligero. Piensa en el conversor como el traductor que pasa lo que ve el contador a lo que de verdad has consumido.</a:t>
+              <a:t>N1: ¿Para qué sirve eso de los impulsos del contador?</a:t>
+            </a:r>
+          </a:p>
+          <a:p>
+            <a:r>
+              <a:t>N2: Cada contador manda pulsos eléctricos proporcionales al gas que va pasando; son como latidos que la telemedida cuenta a distancia para saber el consumo. Todos los contadores tienen que llevar ese emisor de impulsos. Pero en los de turbina y en los de pistones se exige algo más: un doble emisor de impulsos, o sea, dos señales en lugar de una. ¿Por qué doble? Porque teniendo dos señales las puedes comparar entre sí, y si una no cuadra con la otra, saltan las alarmas de un fallo o de un posible fraude. En los de membrana, los de paredes deformables, basta con un solo emisor. Piensa en el doble emisor como dos testigos que se controlan el uno al otro.</a:t>
             </a:r>
           </a:p>
         </p:txBody>
@@ -670,12 +671,12 @@
           <a:lstStyle/>
           <a:p>
             <a:r>
-              <a:t>N1: ¿Qué le exige la norma a ese conversor?</a:t>
-            </a:r>
-          </a:p>
-          <a:p>
-            <a:r>
-              <a:t>N2: Le exige precisión y memoria. Precisión: tiene que ser de clase C, que es la más fina, con un error máximo de más menos medio por ciento. Muy poco margen, porque de él depende la factura. Además lleva una pantalla de consulta donde, como mínimo, puedes ver el volumen bruto, el volumen convertido, la presión y la temperatura de medición y los factores de corrección. Y memoria: tiene que guardar los datos de al menos treinta y cinco días con discriminación horaria, es decir, hora a hora, y tener una salida serie para conectarse a los equipos remotos. Fíjate que ese treinta y cinco es el mismo número que verás en la telemedida: memoria de treinta y cinco días, un dato que se repite y que cae.</a:t>
+              <a:t>N1: ¿Por qué hay que convertir el volumen? ¿No basta con lo que mide?</a:t>
+            </a:r>
+          </a:p>
+          <a:p>
+            <a:r>
+              <a:t>N2: No basta, porque el gas ocupa más o menos según su presión y su temperatura. El mismo gas, frío y comprimido, ocupa menos que caliente y suelto. El contador ve un volumen bruto, el de ese momento, y el conversor lo traduce al volumen en condiciones de referencia, unas condiciones estándar iguales para todos, para poder facturar con justicia. Hay dos tipos. El conversor tipo PT corrige por presión y por temperatura. El tipo PTZ hace lo mismo y además tiene en cuenta el factor de compresibilidad, la zeta, que afina todavía más cómo se comprime ese gas concreto. Solo para gas natural, para el ligero. Piensa en el conversor como el traductor que pasa lo que ve el contador a lo que de verdad has consumido.</a:t>
             </a:r>
           </a:p>
         </p:txBody>
@@ -745,12 +746,12 @@
           <a:lstStyle/>
           <a:p>
             <a:r>
-              <a:t>N1: ¿Por qué importa dónde marque la aguja del manómetro?</a:t>
-            </a:r>
-          </a:p>
-          <a:p>
-            <a:r>
-              <a:t>N2: Porque un manómetro se lee mejor y mide mejor cuando la aguja trabaja en la parte central de su escala, ni pegada al cero ni pegada al tope. Por eso se recomienda que la zona de trabajo esté entre el treinta y cinco y el setenta y cinco por ciento del fondo de escala. Si eliges un manómetro que siempre marca casi al final, o casi al principio, pierdes sensibilidad. Y un detalle que siempre lleva: una válvula de tres vías, de material metálico que no se oxide, con una toma de un cuarto de pulgada. ¿Para qué? Para poder enchufar ahí un manómetro patrón, uno de referencia, y comprobar que el tuyo no miente, sin tener que parar la instalación. Eso es contrastar.</a:t>
+              <a:t>N1: ¿Qué le exige la norma a ese conversor?</a:t>
+            </a:r>
+          </a:p>
+          <a:p>
+            <a:r>
+              <a:t>N2: Le exige precisión y memoria. Precisión: tiene que ser de clase C, que es la más fina, con un error máximo de más menos medio por ciento. Muy poco margen, porque de él depende la factura. Además lleva una pantalla de consulta donde, como mínimo, puedes ver el volumen bruto, el volumen convertido, la presión y la temperatura de medición y los factores de corrección. Y memoria: tiene que guardar los datos de al menos treinta y cinco días con discriminación horaria, es decir, hora a hora, y tener una salida serie para conectarse a los equipos remotos. Fíjate que ese treinta y cinco es el mismo número que verás en la telemedida: memoria de treinta y cinco días, un dato que se repite y que cae.</a:t>
             </a:r>
           </a:p>
         </p:txBody>
@@ -820,12 +821,12 @@
           <a:lstStyle/>
           <a:p>
             <a:r>
-              <a:t>N1: ¿Cómo elijo el manómetro según la presión que voy a medir?</a:t>
-            </a:r>
-          </a:p>
-          <a:p>
-            <a:r>
-              <a:t>N2: Con una regla muy visual: a más presión, esfera más grande y clase más fina. Ojo con la clase, que es al revés de lo que parece: cuanto más bajo es el número, más preciso es. Así, la clase uno coma seis es menos fina que la uno, y la uno es menos fina que la cero coma seis. Para presiones bajas, esferas pequeñas y clase más holgada; para presiones altas, esferas grandes de ciento cincuenta o ciento sesenta milímetros y clase cero coma seis. Y hay una frontera que tienes que memorizar: seis décimas de bar. Por debajo de esa presión, el manómetro es de tipo cápsula; de esa presión en adelante, es de tubo Bourdon. Cada uno cumple su norma, que debe venir impresa en el aparato. La cifra bisagra: seis décimas de bar.</a:t>
+              <a:t>N1: ¿Por qué importa dónde marque la aguja del manómetro?</a:t>
+            </a:r>
+          </a:p>
+          <a:p>
+            <a:r>
+              <a:t>N2: Porque un manómetro se lee mejor y mide mejor cuando la aguja trabaja en la parte central de su escala, ni pegada al cero ni pegada al tope. Por eso se recomienda que la zona de trabajo esté entre el treinta y cinco y el setenta y cinco por ciento del fondo de escala. Si eliges un manómetro que siempre marca casi al final, o casi al principio, pierdes sensibilidad. Y un detalle que siempre lleva: una válvula de tres vías, de material metálico que no se oxide, con una toma de un cuarto de pulgada. ¿Para qué? Para poder enchufar ahí un manómetro patrón, uno de referencia, y comprobar que el tuyo no miente, sin tener que parar la instalación. Eso es contrastar.</a:t>
             </a:r>
           </a:p>
         </p:txBody>
@@ -895,12 +896,12 @@
           <a:lstStyle/>
           <a:p>
             <a:r>
-              <a:t>N1: ¿El termómetro toca el gas directamente?</a:t>
-            </a:r>
-          </a:p>
-          <a:p>
-            <a:r>
-              <a:t>N2: No, y ese es el detalle bonito. El termómetro se mete dentro de una vaina, que es una funda de acero o de latón, y esa vaina sí está en contacto con el gas. La gracia es que puedes sacar el termómetro de la vaina sin cortar el suministro, para cambiarlo o revisarlo con la instalación en marcha. Y para que el calor pase bien del gas al termómetro, la vaina se rellena y se mantiene con aceite mineral fluido, que transmite mejor la temperatura que el aire. Los números que caen: escala orientativa de menos diez a más sesenta grados, y exactitud de al menos medio grado. Si la vaina se queda sin aceite, el termómetro va retrasado y falsea la temperatura, y con ella toda la conversión de volumen.</a:t>
+              <a:t>N1: ¿Cómo elijo el manómetro según la presión que voy a medir?</a:t>
+            </a:r>
+          </a:p>
+          <a:p>
+            <a:r>
+              <a:t>N2: Con una regla muy visual: a más presión, esfera más grande y clase más fina. Ojo con la clase, que es al revés de lo que parece: cuanto más bajo es el número, más preciso es. Así, la clase uno coma seis es menos fina que la uno, y la uno es menos fina que la cero coma seis. Para presiones bajas, esferas pequeñas y clase más holgada; para presiones altas, esferas grandes de ciento cincuenta o ciento sesenta milímetros y clase cero coma seis. Y hay una frontera que tienes que memorizar: seis décimas de bar. Por debajo de esa presión, el manómetro es de tipo cápsula; de esa presión en adelante, es de tubo Bourdon. Cada uno cumple su norma, que debe venir impresa en el aparato. La cifra bisagra: seis décimas de bar.</a:t>
             </a:r>
           </a:p>
         </p:txBody>
@@ -970,12 +971,12 @@
           <a:lstStyle/>
           <a:p>
             <a:r>
-              <a:t>N1: ¿Qué es la telemedida y para qué la unidad remota?</a:t>
-            </a:r>
-          </a:p>
-          <a:p>
-            <a:r>
-              <a:t>N2: Telemedida es leer el consumo a distancia, sin que nadie tenga que acercarse físicamente al contador. Quien hace ese trabajo es la unidad remota, la UR: recoge los datos del conversor y los envía a la compañía. Para funcionar tiene tres mínimos. Uno, una entrada serie para hablar con el conversor. Dos, una memoria de al menos treinta y cinco días, el mismo número que ya vimos en el conversor, para que si se cae la red de comunicaciones no se pierda el histórico de consumos. Y tres, ser compatible con los sistemas de gestión del distribuidor o del transportista, porque de nada sirve guardar datos si luego no los puedes entregar en un formato que la compañía entienda. La UR es el cartero que lleva la lectura a la oficina.</a:t>
+              <a:t>N1: ¿El termómetro toca el gas directamente?</a:t>
+            </a:r>
+          </a:p>
+          <a:p>
+            <a:r>
+              <a:t>N2: No, y ese es el detalle bonito. El termómetro se mete dentro de una vaina, que es una funda de acero o de latón, y esa vaina sí está en contacto con el gas. La gracia es que puedes sacar el termómetro de la vaina sin cortar el suministro, para cambiarlo o revisarlo con la instalación en marcha. Y para que el calor pase bien del gas al termómetro, la vaina se rellena y se mantiene con aceite mineral fluido, que transmite mejor la temperatura que el aire. Los números que caen: escala orientativa de menos diez a más sesenta grados, y exactitud de al menos medio grado. Si la vaina se queda sin aceite, el termómetro va retrasado y falsea la temperatura, y con ella toda la conversión de volumen.</a:t>
             </a:r>
           </a:p>
         </p:txBody>
@@ -1045,12 +1046,12 @@
           <a:lstStyle/>
           <a:p>
             <a:r>
-              <a:t>N1: En instalaciones de hasta setenta kilovatios, ¿cómo es el esquema?</a:t>
-            </a:r>
-          </a:p>
-          <a:p>
-            <a:r>
-              <a:t>N2: Es el mínimo posible: una llave, el contador y una toma de presión. Tres piezas en línea. La diferencia entre familias está solo en la toma de presión. Para gas natural, de la segunda familia, se usa una toma de débil calibre. Para GLP, de la tercera familia, se usa una toma tipo Peterson. Y hay un detalle que cae siempre: normalmente basta una llave a la entrada, pero si el contador es de más de diez metros cúbicos por hora, es decir, un contador ya grande, entonces hay que poner también una llave a la salida, para poder aislarlo por los dos lados. Así de sencillo es el anexo A: pequeño esquema para pequeñas potencias.</a:t>
+              <a:t>N1: ¿Qué es la telemedida y para qué la unidad remota?</a:t>
+            </a:r>
+          </a:p>
+          <a:p>
+            <a:r>
+              <a:t>N2: Telemedida es leer el consumo a distancia, sin que nadie tenga que acercarse físicamente al contador. Quien hace ese trabajo es la unidad remota, la UR: recoge los datos del conversor y los envía a la compañía. Para funcionar tiene tres mínimos. Uno, una entrada serie para hablar con el conversor. Dos, una memoria de al menos treinta y cinco días, el mismo número que ya vimos en el conversor, para que si se cae la red de comunicaciones no se pierda el histórico de consumos. Y tres, ser compatible con los sistemas de gestión del distribuidor o del transportista, porque de nada sirve guardar datos si luego no los puedes entregar en un formato que la compañía entienda. La UR es el cartero que lleva la lectura a la oficina.</a:t>
             </a:r>
           </a:p>
         </p:txBody>
@@ -1120,12 +1121,12 @@
           <a:lstStyle/>
           <a:p>
             <a:r>
-              <a:t>N1: Y para lo grande de tercera familia, ¿cómo elijo el esquema?</a:t>
-            </a:r>
-          </a:p>
-          <a:p>
-            <a:r>
-              <a:t>N2: Para potencias grandes de tercera familia, o sea GLP, el esquema no lo eliges tú a ojo: lo dice una tabla. Cruzas dos datos, el caudal máximo y el consumo anual, y la tabla te dice si te toca la figura B punto uno o la B punto dos. Los dos esquemas son casi iguales; la diferencia está en el último elemento: la B punto uno lleva una toma de presión de débil calibre, y la B punto dos lleva un disco en ocho, que es una pieza que permite dejar ciega la línea de by-pass cuando no se usa. Dos avisos importantes que caen: en estos esquemas la conversión se hace con un factor fijo, no con conversor electrónico; y por debajo de una décima de bar de presión no se instalan conversores de volumen.</a:t>
+              <a:t>N1: En instalaciones de hasta setenta kilovatios, ¿cómo es el esquema?</a:t>
+            </a:r>
+          </a:p>
+          <a:p>
+            <a:r>
+              <a:t>N2: Es el mínimo posible: una llave, el contador y una toma de presión. Tres piezas en línea. La diferencia entre familias está solo en la toma de presión. Para gas natural, de la segunda familia, se usa una toma de débil calibre. Para GLP, de la tercera familia, se usa una toma tipo Peterson. Y hay un detalle que cae siempre: normalmente basta una llave a la entrada, pero si el contador es de más de diez metros cúbicos por hora, es decir, un contador ya grande, entonces hay que poner también una llave a la salida, para poder aislarlo por los dos lados. Así de sencillo es el anexo A: pequeño esquema para pequeñas potencias.</a:t>
             </a:r>
           </a:p>
         </p:txBody>
@@ -1195,12 +1196,12 @@
           <a:lstStyle/>
           <a:p>
             <a:r>
-              <a:t>N1: En estas instalaciones grandes, ¿qué papeleo se mueve?</a:t>
-            </a:r>
-          </a:p>
-          <a:p>
-            <a:r>
-              <a:t>N2: Más que en una vivienda normal. Una instalación individual de más de setenta kilovatios ya exige proyecto, y con proyecto hace falta también un certificado de dirección de obra firmado por técnico competente, además del certificado de instalación de siempre. Otra idea clave: el equipo de medida no es tuyo, es de la distribuidora, que es quien lo precinta en la puesta en servicio y quien lo somete al control metrológico legal, un control oficial que garantiza que mide bien. Y recuerda las dos sustituciones que vimos: la toma Peterson cuando vas después de un regulador homologado, y la toma de débil calibre cuando la red es de muy baja presión. Sin el visto bueno y el precinto del distribuidor, esa medición no entra en servicio.</a:t>
+              <a:t>N1: Y para lo grande de tercera familia, ¿cómo elijo el esquema?</a:t>
+            </a:r>
+          </a:p>
+          <a:p>
+            <a:r>
+              <a:t>N2: Para potencias grandes de tercera familia, o sea GLP, el esquema no lo eliges tú a ojo: lo dice una tabla. Cruzas dos datos, el caudal máximo y el consumo anual, y la tabla te dice si te toca la figura B punto uno o la B punto dos. Los dos esquemas son casi iguales; la diferencia está en el último elemento: la B punto uno lleva una toma de presión de débil calibre, y la B punto dos lleva un disco en ocho, que es una pieza que permite dejar ciega la línea de by-pass cuando no se usa. Dos avisos importantes que caen: en estos esquemas la conversión se hace con un factor fijo, no con conversor electrónico; y por debajo de una décima de bar de presión no se instalan conversores de volumen.</a:t>
             </a:r>
           </a:p>
         </p:txBody>
@@ -1270,22 +1271,12 @@
           <a:lstStyle/>
           <a:p>
             <a:r>
-              <a:t>N1: Gran final del tema. ¿Cómo enlazo todo lo de este vídeo?</a:t>
-            </a:r>
-          </a:p>
-          <a:p>
-            <a:r>
-              <a:t>N2: Reconstruyamos el hilo, porque encaja perfecto. Cuando la instalación crece, medir deja de ser un contador y pasa a ser un conjunto: contador, conversor, manómetro, termómetro y telemedida, y siempre después del regulador, porque primero se doma la presión y luego se cuenta. El tamaño lo marca la potencia, y ahí está la cifra reina, setenta kilovatios: por debajo, anexo A, un esquema mínimo de llave, contador y toma; por encima, anexo B por tabla o la legislación. Cada acompañante tiene su número: el conversor traduce el volumen bruto al real y es clase C con medio por ciento de error y treinta y cinco días de memoria; el manómetro trabaja en el centro de su escala, entre el treinta y cinco y el setenta y cinco por ciento, con la frontera cápsula o Bourdon en seis décimas de bar; y el termómetro va en su vaina con aceite, de menos diez a más sesenta grados.</a:t>
-            </a:r>
-          </a:p>
-          <a:p>
-            <a:r>
-              <a:t>N1: ¿Y en el examen y en la obra, qué me llevo de todo el tema?</a:t>
-            </a:r>
-          </a:p>
-          <a:p>
-            <a:r>
-              <a:t>N2: En el examen, este vídeo es de cifras: te preguntan el porcentaje de trabajo, la clase del conversor, los días de memoria o la frontera de los seis décimas de bar; contéstalos de memoria y sumas puntos fáciles. En la obra, sabes montar el tren de medida en el orden correcto, distinguir lo que es tuyo de lo que es el equipo precintado de la distribuidora, y no dejarte un by-pass abierto. Y engánchalo con el vídeo anterior: primero aprendiste a construir la casa del contador, el recinto, y ahora sabes qué va dentro cuando la instalación es grande. Con esto cierras el tema doce entero. Hoy, de verdad, eres bastante más gasista que ayer. Enhorabuena, y nos vemos en el siguiente tema.</a:t>
+              <a:t>N1: En estas instalaciones grandes, ¿qué papeleo se mueve?</a:t>
+            </a:r>
+          </a:p>
+          <a:p>
+            <a:r>
+              <a:t>N2: Más que en una vivienda normal. Una instalación individual de más de setenta kilovatios ya exige proyecto, y con proyecto hace falta también un certificado de dirección de obra firmado por técnico competente, además del certificado de instalación de siempre. Otra idea clave: el equipo de medida no es tuyo, es de la distribuidora, que es quien lo precinta en la puesta en servicio y quien lo somete al control metrológico legal, un control oficial que garantiza que mide bien. Y recuerda las dos sustituciones que vimos: la toma Peterson cuando vas después de un regulador homologado, y la toma de débil calibre cuando la red es de muy baja presión. Sin el visto bueno y el precinto del distribuidor, esa medición no entra en servicio.</a:t>
             </a:r>
           </a:p>
         </p:txBody>
@@ -1385,6 +1376,91 @@
 </p:notes>
 </file>
 
+<file path=ppt/notesSlides/notesSlide20.xml><?xml version="1.0" encoding="utf-8"?>
+<p:notes xmlns:a="http://schemas.openxmlformats.org/drawingml/2006/main" xmlns:p="http://schemas.openxmlformats.org/presentationml/2006/main" xmlns:r="http://schemas.openxmlformats.org/officeDocument/2006/relationships">
+  <p:cSld>
+    <p:spTree>
+      <p:nvGrpSpPr>
+        <p:cNvPr id="1" name=""/>
+        <p:cNvGrpSpPr/>
+        <p:nvPr/>
+      </p:nvGrpSpPr>
+      <p:grpSpPr>
+        <a:xfrm>
+          <a:off x="0" y="0"/>
+          <a:ext cx="0" cy="0"/>
+          <a:chOff x="0" y="0"/>
+          <a:chExt cx="0" cy="0"/>
+        </a:xfrm>
+      </p:grpSpPr>
+      <p:sp>
+        <p:nvSpPr>
+          <p:cNvPr id="2" name="Slide Image Placeholder 1"/>
+          <p:cNvSpPr>
+            <a:spLocks noGrp="1"/>
+          </p:cNvSpPr>
+          <p:nvPr>
+            <p:ph type="sldImg" idx="2"/>
+          </p:nvPr>
+        </p:nvSpPr>
+        <p:spPr/>
+      </p:sp>
+      <p:sp>
+        <p:nvSpPr>
+          <p:cNvPr id="3" name="Notes Placeholder 2"/>
+          <p:cNvSpPr>
+            <a:spLocks noGrp="1"/>
+          </p:cNvSpPr>
+          <p:nvPr>
+            <p:ph type="body" idx="3" sz="quarter"/>
+          </p:nvPr>
+        </p:nvSpPr>
+        <p:spPr/>
+        <p:txBody>
+          <a:bodyPr/>
+          <a:lstStyle/>
+          <a:p>
+            <a:r>
+              <a:t>N1: Gran final del tema. ¿Cómo enlazo todo lo de este vídeo?</a:t>
+            </a:r>
+          </a:p>
+          <a:p>
+            <a:r>
+              <a:t>N2: Reconstruyamos el hilo, porque encaja perfecto. Cuando la instalación crece, medir deja de ser un contador y pasa a ser un conjunto: contador, conversor, manómetro, termómetro y telemedida, y siempre después del regulador, porque primero se doma la presión y luego se cuenta. El tamaño lo marca la potencia, y ahí está la cifra reina, setenta kilovatios: por debajo, anexo A, un esquema mínimo de llave, contador y toma; por encima, anexo B por tabla o la legislación. Cada acompañante tiene su número: el conversor traduce el volumen bruto al real y es clase C con medio por ciento de error y treinta y cinco días de memoria; el manómetro trabaja en el centro de su escala, entre el treinta y cinco y el setenta y cinco por ciento, con la frontera cápsula o Bourdon en seis décimas de bar; y el termómetro va en su vaina con aceite, de menos diez a más sesenta grados.</a:t>
+            </a:r>
+          </a:p>
+          <a:p>
+            <a:r>
+              <a:t>N1: ¿Y en el examen y en la obra, qué me llevo de todo el tema?</a:t>
+            </a:r>
+          </a:p>
+          <a:p>
+            <a:r>
+              <a:t>N2: En el examen, este vídeo es de cifras: te preguntan el porcentaje de trabajo, la clase del conversor, los días de memoria o la frontera de los seis décimas de bar; contéstalos de memoria y sumas puntos fáciles. En la obra, sabes montar el tren de medida en el orden correcto, distinguir lo que es tuyo de lo que es el equipo precintado de la distribuidora, y no dejarte un by-pass abierto. Y engánchalo con el vídeo anterior: primero aprendiste a construir la casa del contador, el recinto, y ahora sabes qué va dentro cuando la instalación es grande. Con esto cierras el tema doce entero. Hoy, de verdad, eres bastante más gasista que ayer. Enhorabuena, y nos vemos en el siguiente tema.</a:t>
+            </a:r>
+          </a:p>
+        </p:txBody>
+      </p:sp>
+      <p:sp>
+        <p:nvSpPr>
+          <p:cNvPr id="4" name="Slide Number Placeholder 3"/>
+          <p:cNvSpPr>
+            <a:spLocks noGrp="1"/>
+          </p:cNvSpPr>
+          <p:nvPr>
+            <p:ph type="sldNum" idx="5" sz="quarter"/>
+          </p:nvPr>
+        </p:nvSpPr>
+        <p:spPr/>
+      </p:sp>
+    </p:spTree>
+  </p:cSld>
+  <p:clrMapOvr>
+    <a:masterClrMapping/>
+  </p:clrMapOvr>
+</p:notes>
+</file>
+
 <file path=ppt/notesSlides/notesSlide3.xml><?xml version="1.0" encoding="utf-8"?>
 <p:notes xmlns:a="http://schemas.openxmlformats.org/drawingml/2006/main" xmlns:p="http://schemas.openxmlformats.org/presentationml/2006/main" xmlns:r="http://schemas.openxmlformats.org/officeDocument/2006/relationships">
   <p:cSld>
@@ -1428,16 +1504,7 @@
         <p:txBody>
           <a:bodyPr/>
           <a:lstStyle/>
-          <a:p>
-            <a:r>
-              <a:t>N1: ¿Por qué en una instalación grande no basta un contador?</a:t>
-            </a:r>
-          </a:p>
-          <a:p>
-            <a:r>
-              <a:t>N2: Porque una instalación grande tiene consumos que suben y bajan mucho, y el sistema de medición tiene que cubrir tanto el caudal máximo como el mínimo del conjunto. Por eso al contador le añadimos acompañantes: conversor, manómetro, termómetro y telemedida. Y hay un orden que no se discute: si hay una etapa de regulación, que es donde se ajusta la presión, el sistema de medición va siempre a continuación, después del regulador. La lógica es sencilla: primero domas la presión y la dejas estable, y solo después cuentas el gas, porque medir con la presión saltando de un lado a otro daría lecturas malas. Piensa en la ERM como la sala de máquinas de la medición.</a:t>
-            </a:r>
-          </a:p>
+          <a:p/>
         </p:txBody>
       </p:sp>
       <p:sp>
@@ -1505,12 +1572,12 @@
           <a:lstStyle/>
           <a:p>
             <a:r>
-              <a:t>N1: ¿Cómo sé qué requisitos de medición me aplican?</a:t>
-            </a:r>
-          </a:p>
-          <a:p>
-            <a:r>
-              <a:t>N2: Se decide por la potencia de diseño y por la familia de gas. Si la potencia es de hasta setenta kilovatios, te vas al anexo A, que es el esquema básico. Si pasa de setenta kilovatios y el gas es de la segunda familia, que es el gas natural, te remites a la legislación vigente. Y si pasa de setenta kilovatios pero el gas es de la tercera familia, que es el GLP, el butano y el propano, entonces aplicas el anexo B. La chuleta: setenta kilovatios es la puerta; por debajo, anexo A para todos; por encima, depende de la familia. Y recuerda del vídeo anterior que la segunda familia es el natural y la tercera es el GLP.</a:t>
+              <a:t>N1: ¿Por qué en una instalación grande no basta un contador?</a:t>
+            </a:r>
+          </a:p>
+          <a:p>
+            <a:r>
+              <a:t>N2: Porque una instalación grande tiene consumos que suben y bajan mucho, y el sistema de medición tiene que cubrir tanto el caudal máximo como el mínimo del conjunto. Por eso al contador le añadimos acompañantes: conversor, manómetro, termómetro y telemedida. Y hay un orden que no se discute: si hay una etapa de regulación, que es donde se ajusta la presión, el sistema de medición va siempre a continuación, después del regulador. La lógica es sencilla: primero domas la presión y la dejas estable, y solo después cuentas el gas, porque medir con la presión saltando de un lado a otro daría lecturas malas. Piensa en la ERM como la sala de máquinas de la medición.</a:t>
             </a:r>
           </a:p>
         </p:txBody>
@@ -1580,12 +1647,12 @@
           <a:lstStyle/>
           <a:p>
             <a:r>
-              <a:t>N1: ¿Siempre se aplica este capítulo o hay excepciones?</a:t>
-            </a:r>
-          </a:p>
-          <a:p>
-            <a:r>
-              <a:t>N2: Hay excepciones que conviene tener fichadas. Cuando el conjunto de regulación y medida es de esos tipos normalizados que ves en pantalla, o cumple otra norma específica de conjuntos, entonces manda esa norma y no este capítulo. Y hay dos sustituciones prácticas muy útiles. Una: si el sistema de medición está justo después de un regulador que cumple su norma correspondiente, el manómetro y la válvula de contrastación se pueden sustituir por una toma de presión tipo Peterson, más sencilla. Y dos: si estás conectado directamente a una red de muy baja presión, veinticinco milésimas de bar o menos, también puedes sustituirlos por una toma de presión de débil calibre. La idea: a menor presión y con reguladores homologados, se permite simplificar el tren de medida.</a:t>
+              <a:t>N1: ¿Cómo sé qué requisitos de medición me aplican?</a:t>
+            </a:r>
+          </a:p>
+          <a:p>
+            <a:r>
+              <a:t>N2: Se decide por la potencia de diseño y por la familia de gas. Si la potencia es de hasta setenta kilovatios, te vas al anexo A, que es el esquema básico. Si pasa de setenta kilovatios y el gas es de la segunda familia, que es el gas natural, te remites a la legislación vigente. Y si pasa de setenta kilovatios pero el gas es de la tercera familia, que es el GLP, el butano y el propano, entonces aplicas el anexo B. La chuleta: setenta kilovatios es la puerta; por debajo, anexo A para todos; por encima, depende de la familia. Y recuerda del vídeo anterior que la segunda familia es el natural y la tercera es el GLP.</a:t>
             </a:r>
           </a:p>
         </p:txBody>
@@ -1655,12 +1722,12 @@
           <a:lstStyle/>
           <a:p>
             <a:r>
-              <a:t>N1: ¿Qué es el by-pass y por qué dicen que es peligroso?</a:t>
-            </a:r>
-          </a:p>
-          <a:p>
-            <a:r>
-              <a:t>N2: El by-pass es una tubería de rodeo. Sirve para que el gas siga pasando y el usuario no se quede sin servicio mientras cambias el contador o lo contrastas. Muy cómodo. El problema es que, mientras el gas va por el by-pass, va sin medir. Por eso la norma le pone tres candados: precintable, o sea sellado; bloqueable, para que no se abra por error; y con un disco ciego instalado, que es un tapón físico. Solo se usa en la maniobra puntual y luego se vuelve a dejar cerrado y precintado. Un by-pass olvidado abierto es gas sin contar, un fraude sin querer, y presión sin control aguas abajo. Aparte, la instalación puede llevar una medida secundaria, un sistema que sustituya al principal si este se avería o está en mantenimiento.</a:t>
+              <a:t>N1: ¿Siempre se aplica este capítulo o hay excepciones?</a:t>
+            </a:r>
+          </a:p>
+          <a:p>
+            <a:r>
+              <a:t>N2: Hay excepciones que conviene tener fichadas. Cuando el conjunto de regulación y medida es de esos tipos normalizados que ves en pantalla, o cumple otra norma específica de conjuntos, entonces manda esa norma y no este capítulo. Y hay dos sustituciones prácticas muy útiles. Una: si el sistema de medición está justo después de un regulador que cumple su norma correspondiente, el manómetro y la válvula de contrastación se pueden sustituir por una toma de presión tipo Peterson, más sencilla. Y dos: si estás conectado directamente a una red de muy baja presión, veinticinco milésimas de bar o menos, también puedes sustituirlos por una toma de presión de débil calibre. La idea: a menor presión y con reguladores homologados, se permite simplificar el tren de medida.</a:t>
             </a:r>
           </a:p>
         </p:txBody>
@@ -1730,12 +1797,12 @@
           <a:lstStyle/>
           <a:p>
             <a:r>
-              <a:t>N1: ¿Todos los contadores miden igual?</a:t>
-            </a:r>
-          </a:p>
-          <a:p>
-            <a:r>
-              <a:t>N2: No, hay varias tecnologías y conviene conocerlas. Los de paredes deformables, los de toda la vida en las casas, funcionan como un fuelle de membrana que se llena y se vacía. Los de pistones rotativos son volumétricos: encierran volúmenes de gas y los cuentan. Los de turbina miden por velocidad: el gas hace girar una hélice y de ahí sacan el caudal. Y luego están los ultrasónicos, que miden con sonido. Cada uno tiene su norma de fabricación, que ves en pantalla, y también valen otros tipos siempre que estén metrológicamente aceptados, es decir, reconocidos oficialmente como válidos para medir. La elección depende del régimen de consumo del usuario y del campo de medida que necesites.</a:t>
+              <a:t>N1: ¿Qué es el by-pass y por qué dicen que es peligroso?</a:t>
+            </a:r>
+          </a:p>
+          <a:p>
+            <a:r>
+              <a:t>N2: El by-pass es una tubería de rodeo. Sirve para que el gas siga pasando y el usuario no se quede sin servicio mientras cambias el contador o lo contrastas. Muy cómodo. El problema es que, mientras el gas va por el by-pass, va sin medir. Por eso la norma le pone tres candados: precintable, o sea sellado; bloqueable, para que no se abra por error; y con un disco ciego instalado, que es un tapón físico. Solo se usa en la maniobra puntual y luego se vuelve a dejar cerrado y precintado. Un by-pass olvidado abierto es gas sin contar, un fraude sin querer, y presión sin control aguas abajo. Aparte, la instalación puede llevar una medida secundaria, un sistema que sustituya al principal si este se avería o está en mantenimiento.</a:t>
             </a:r>
           </a:p>
         </p:txBody>
@@ -1805,12 +1872,12 @@
           <a:lstStyle/>
           <a:p>
             <a:r>
-              <a:t>N1: ¿Qué más da que el contador sea un poco grande o un poco pequeño?</a:t>
-            </a:r>
-          </a:p>
-          <a:p>
-            <a:r>
-              <a:t>N2: Da mucho, porque un contador mal dimensionado mide mal y se paga. Si lo pones demasiado grande para el consumo, a caudales bajos mide de menos y llegan reclamaciones de factura. Si lo pones demasiado pequeño, se ahoga: cae la presión y el aparato no arranca bien. Por eso la norma da márgenes de trabajo. En locales de grado de gasificación tres, el contador debe moverse entre el sesenta y el ochenta y cinco por ciento de su caudal máximo. En grados uno y dos, entre el cuarenta y el ochenta y cinco por ciento. Y siempre procurando que trabaje por encima del caudal de transición, el Qt, que es la frontera entre la zona baja y la zona alta de medida, donde el contador es más preciso. La regla: que el contador viva en su zona buena, no en los extremos.</a:t>
+              <a:t>N1: ¿Todos los contadores miden igual?</a:t>
+            </a:r>
+          </a:p>
+          <a:p>
+            <a:r>
+              <a:t>N2: No, hay varias tecnologías y conviene conocerlas. Los de paredes deformables, los de toda la vida en las casas, funcionan como un fuelle de membrana que se llena y se vacía. Los de pistones rotativos son volumétricos: encierran volúmenes de gas y los cuentan. Los de turbina miden por velocidad: el gas hace girar una hélice y de ahí sacan el caudal. Y luego están los ultrasónicos, que miden con sonido. Cada uno tiene su norma de fabricación, que ves en pantalla, y también valen otros tipos siempre que estén metrológicamente aceptados, es decir, reconocidos oficialmente como válidos para medir. La elección depende del régimen de consumo del usuario y del campo de medida que necesites.</a:t>
             </a:r>
           </a:p>
         </p:txBody>
@@ -1880,12 +1947,12 @@
           <a:lstStyle/>
           <a:p>
             <a:r>
-              <a:t>N1: ¿Para qué sirve eso de los impulsos del contador?</a:t>
-            </a:r>
-          </a:p>
-          <a:p>
-            <a:r>
-              <a:t>N2: Cada contador manda pulsos eléctricos proporcionales al gas que va pasando; son como latidos que la telemedida cuenta a distancia para saber el consumo. Todos los contadores tienen que llevar ese emisor de impulsos. Pero en los de turbina y en los de pistones se exige algo más: un doble emisor de impulsos, o sea, dos señales en lugar de una. ¿Por qué doble? Porque teniendo dos señales las puedes comparar entre sí, y si una no cuadra con la otra, saltan las alarmas de un fallo o de un posible fraude. En los de membrana, los de paredes deformables, basta con un solo emisor. Piensa en el doble emisor como dos testigos que se controlan el uno al otro.</a:t>
+              <a:t>N1: ¿Qué más da que el contador sea un poco grande o un poco pequeño?</a:t>
+            </a:r>
+          </a:p>
+          <a:p>
+            <a:r>
+              <a:t>N2: Da mucho, porque un contador mal dimensionado mide mal y se paga. Si lo pones demasiado grande para el consumo, a caudales bajos mide de menos y llegan reclamaciones de factura. Si lo pones demasiado pequeño, se ahoga: cae la presión y el aparato no arranca bien. Por eso la norma da márgenes de trabajo. En locales de grado de gasificación tres, el contador debe moverse entre el sesenta y el ochenta y cinco por ciento de su caudal máximo. En grados uno y dos, entre el cuarenta y el ochenta y cinco por ciento. Y siempre procurando que trabaje por encima del caudal de transición, el Qt, que es la frontera entre la zona baja y la zona alta de medida, donde el contador es más preciso. La regla: que el contador viva en su zona buena, no en los extremos.</a:t>
             </a:r>
           </a:p>
         </p:txBody>
@@ -4960,7 +5027,7 @@
             <a:r>
               <a:rPr sz="1400" b="1" i="0">
                 <a:solidFill>
-                  <a:srgbClr val="CADCFC"/>
+                  <a:srgbClr val="F4A24C"/>
                 </a:solidFill>
                 <a:latin typeface="Montserrat"/>
               </a:rPr>
@@ -4971,13 +5038,57 @@
       </p:sp>
       <p:sp>
         <p:nvSpPr>
-          <p:cNvPr id="4" name="TextBox 3"/>
+          <p:cNvPr id="4" name="Rounded Rectangle 3"/>
+          <p:cNvSpPr/>
+          <p:nvPr/>
+        </p:nvSpPr>
+        <p:spPr>
+          <a:xfrm>
+            <a:off x="868680" y="2057400"/>
+            <a:ext cx="1463040" cy="82296"/>
+          </a:xfrm>
+          <a:prstGeom prst="roundRect">
+            <a:avLst/>
+          </a:prstGeom>
+          <a:solidFill>
+            <a:srgbClr val="E8801A"/>
+          </a:solidFill>
+          <a:ln>
+            <a:noFill/>
+          </a:ln>
+          <a:effectLst/>
+        </p:spPr>
+        <p:style>
+          <a:lnRef idx="1">
+            <a:schemeClr val="accent1"/>
+          </a:lnRef>
+          <a:fillRef idx="3">
+            <a:schemeClr val="accent1"/>
+          </a:fillRef>
+          <a:effectRef idx="2">
+            <a:schemeClr val="accent1"/>
+          </a:effectRef>
+          <a:fontRef idx="minor">
+            <a:schemeClr val="lt1"/>
+          </a:fontRef>
+        </p:style>
+        <p:txBody>
+          <a:bodyPr rtlCol="0" anchor="ctr"/>
+          <a:lstStyle/>
+          <a:p>
+            <a:pPr algn="ctr"/>
+          </a:p>
+        </p:txBody>
+      </p:sp>
+      <p:sp>
+        <p:nvSpPr>
+          <p:cNvPr id="5" name="TextBox 4"/>
           <p:cNvSpPr txBox="1"/>
           <p:nvPr/>
         </p:nvSpPr>
         <p:spPr>
           <a:xfrm>
-            <a:off x="822960" y="2194560"/>
+            <a:off x="822960" y="2286000"/>
             <a:ext cx="10515600" cy="2011680"/>
           </a:xfrm>
           <a:prstGeom prst="rect">
@@ -5016,7 +5127,7 @@
       </p:sp>
       <p:sp>
         <p:nvSpPr>
-          <p:cNvPr id="5" name="TextBox 4"/>
+          <p:cNvPr id="6" name="TextBox 5"/>
           <p:cNvSpPr txBox="1"/>
           <p:nvPr/>
         </p:nvSpPr>
@@ -5140,7 +5251,7 @@
                 </a:solidFill>
                 <a:latin typeface="Montserrat"/>
               </a:rPr>
-              <a:t>010 / 019</a:t>
+              <a:t>010 / 020</a:t>
             </a:r>
           </a:p>
         </p:txBody>
@@ -5188,7 +5299,7 @@
         <p:spPr>
           <a:xfrm>
             <a:off x="822960" y="457200"/>
-            <a:ext cx="8229600" cy="365760"/>
+            <a:ext cx="10058400" cy="365760"/>
           </a:xfrm>
           <a:prstGeom prst="rect">
             <a:avLst/>
@@ -5202,13 +5313,13 @@
           <a:lstStyle/>
           <a:p>
             <a:r>
-              <a:rPr sz="1200" b="1" i="0">
-                <a:solidFill>
-                  <a:srgbClr val="64748B"/>
-                </a:solidFill>
-                <a:latin typeface="Montserrat"/>
-              </a:rPr>
-              <a:t>CONVERSORES DE VOLUMEN</a:t>
+              <a:rPr sz="1300" b="1" i="0">
+                <a:solidFill>
+                  <a:srgbClr val="E8801A"/>
+                </a:solidFill>
+                <a:latin typeface="Montserrat"/>
+              </a:rPr>
+              <a:t>CONTADORES · EMISORES</a:t>
             </a:r>
           </a:p>
         </p:txBody>
@@ -5236,26 +5347,70 @@
           <a:lstStyle/>
           <a:p>
             <a:r>
-              <a:rPr sz="2700" b="1" i="0">
+              <a:rPr sz="2800" b="1" i="0">
                 <a:solidFill>
                   <a:srgbClr val="1E2761"/>
                 </a:solidFill>
                 <a:latin typeface="Montserrat"/>
               </a:rPr>
-              <a:t>Traducir el volumen</a:t>
-            </a:r>
-          </a:p>
-        </p:txBody>
-      </p:sp>
-      <p:sp>
-        <p:nvSpPr>
-          <p:cNvPr id="7" name="TextBox 6"/>
+              <a:t>El doble emisor de impulsos</a:t>
+            </a:r>
+          </a:p>
+        </p:txBody>
+      </p:sp>
+      <p:sp>
+        <p:nvSpPr>
+          <p:cNvPr id="7" name="Rounded Rectangle 6"/>
+          <p:cNvSpPr/>
+          <p:nvPr/>
+        </p:nvSpPr>
+        <p:spPr>
+          <a:xfrm>
+            <a:off x="868680" y="1627632"/>
+            <a:ext cx="2011680" cy="73152"/>
+          </a:xfrm>
+          <a:prstGeom prst="roundRect">
+            <a:avLst/>
+          </a:prstGeom>
+          <a:solidFill>
+            <a:srgbClr val="E8801A"/>
+          </a:solidFill>
+          <a:ln>
+            <a:noFill/>
+          </a:ln>
+          <a:effectLst/>
+        </p:spPr>
+        <p:style>
+          <a:lnRef idx="1">
+            <a:schemeClr val="accent1"/>
+          </a:lnRef>
+          <a:fillRef idx="3">
+            <a:schemeClr val="accent1"/>
+          </a:fillRef>
+          <a:effectRef idx="2">
+            <a:schemeClr val="accent1"/>
+          </a:effectRef>
+          <a:fontRef idx="minor">
+            <a:schemeClr val="lt1"/>
+          </a:fontRef>
+        </p:style>
+        <p:txBody>
+          <a:bodyPr rtlCol="0" anchor="ctr"/>
+          <a:lstStyle/>
+          <a:p>
+            <a:pPr algn="ctr"/>
+          </a:p>
+        </p:txBody>
+      </p:sp>
+      <p:sp>
+        <p:nvSpPr>
+          <p:cNvPr id="8" name="TextBox 7"/>
           <p:cNvSpPr txBox="1"/>
           <p:nvPr/>
         </p:nvSpPr>
         <p:spPr>
           <a:xfrm>
-            <a:off x="822960" y="1920240"/>
+            <a:off x="822960" y="1965960"/>
             <a:ext cx="4983480" cy="4206240"/>
           </a:xfrm>
           <a:prstGeom prst="rect">
@@ -5271,17 +5426,17 @@
           <a:p>
             <a:pPr>
               <a:spcAft>
-                <a:spcPts val="1000"/>
+                <a:spcPts val="1100"/>
               </a:spcAft>
             </a:pPr>
             <a:r>
               <a:rPr sz="1600" b="1" i="0">
                 <a:solidFill>
-                  <a:srgbClr val="2E3A80"/>
-                </a:solidFill>
-                <a:latin typeface="Montserrat"/>
-              </a:rPr>
-              <a:t>•  </a:t>
+                  <a:srgbClr val="E8801A"/>
+                </a:solidFill>
+                <a:latin typeface="Montserrat"/>
+              </a:rPr>
+              <a:t>▸  </a:t>
             </a:r>
             <a:r>
               <a:rPr sz="1600" b="0" i="0">
@@ -5290,23 +5445,23 @@
                 </a:solidFill>
                 <a:latin typeface="Montserrat"/>
               </a:rPr>
-              <a:t>De volumen bruto a condiciones de referencia</a:t>
+              <a:t>Todos con emisor de impulsos</a:t>
             </a:r>
           </a:p>
           <a:p>
             <a:pPr>
               <a:spcAft>
-                <a:spcPts val="1000"/>
+                <a:spcPts val="1100"/>
               </a:spcAft>
             </a:pPr>
             <a:r>
               <a:rPr sz="1600" b="1" i="0">
                 <a:solidFill>
-                  <a:srgbClr val="2E3A80"/>
-                </a:solidFill>
-                <a:latin typeface="Montserrat"/>
-              </a:rPr>
-              <a:t>•  </a:t>
+                  <a:srgbClr val="E8801A"/>
+                </a:solidFill>
+                <a:latin typeface="Montserrat"/>
+              </a:rPr>
+              <a:t>▸  </a:t>
             </a:r>
             <a:r>
               <a:rPr sz="1600" b="0" i="0">
@@ -5315,23 +5470,23 @@
                 </a:solidFill>
                 <a:latin typeface="Montserrat"/>
               </a:rPr>
-              <a:t>Tipo PT: presión y temperatura</a:t>
+              <a:t>Turbina y pistones: doble emisor</a:t>
             </a:r>
           </a:p>
           <a:p>
             <a:pPr>
               <a:spcAft>
-                <a:spcPts val="1000"/>
+                <a:spcPts val="1100"/>
               </a:spcAft>
             </a:pPr>
             <a:r>
               <a:rPr sz="1600" b="1" i="0">
                 <a:solidFill>
-                  <a:srgbClr val="2E3A80"/>
-                </a:solidFill>
-                <a:latin typeface="Montserrat"/>
-              </a:rPr>
-              <a:t>•  </a:t>
+                  <a:srgbClr val="E8801A"/>
+                </a:solidFill>
+                <a:latin typeface="Montserrat"/>
+              </a:rPr>
+              <a:t>▸  </a:t>
             </a:r>
             <a:r>
               <a:rPr sz="1600" b="0" i="0">
@@ -5340,14 +5495,14 @@
                 </a:solidFill>
                 <a:latin typeface="Montserrat"/>
               </a:rPr>
-              <a:t>Tipo PTZ: además el factor Z</a:t>
-            </a:r>
-          </a:p>
-        </p:txBody>
-      </p:sp>
-      <p:sp>
-        <p:nvSpPr>
-          <p:cNvPr id="8" name="imgph" descr="IMGQ:electronic gas volume converter device"/>
+              <a:t>Para cazar fallos y fraude</a:t>
+            </a:r>
+          </a:p>
+        </p:txBody>
+      </p:sp>
+      <p:sp>
+        <p:nvSpPr>
+          <p:cNvPr id="9" name="imgph" descr="IMGQ:gas meter pulse emitter connection"/>
           <p:cNvSpPr/>
           <p:nvPr/>
         </p:nvSpPr>
@@ -5393,7 +5548,7 @@
       </p:sp>
       <p:sp>
         <p:nvSpPr>
-          <p:cNvPr id="9" name="TextBox 8"/>
+          <p:cNvPr id="10" name="TextBox 9"/>
           <p:cNvSpPr txBox="1"/>
           <p:nvPr/>
         </p:nvSpPr>
@@ -5433,7 +5588,7 @@
                 </a:solidFill>
                 <a:latin typeface="Montserrat"/>
               </a:rPr>
-              <a:t>electronic gas volume converter device</a:t>
+              <a:t>gas meter pulse emitter connection</a:t>
             </a:r>
           </a:p>
         </p:txBody>
@@ -5530,7 +5685,7 @@
                 </a:solidFill>
                 <a:latin typeface="Montserrat"/>
               </a:rPr>
-              <a:t>011 / 019</a:t>
+              <a:t>011 / 020</a:t>
             </a:r>
           </a:p>
         </p:txBody>
@@ -5578,7 +5733,7 @@
         <p:spPr>
           <a:xfrm>
             <a:off x="822960" y="457200"/>
-            <a:ext cx="8229600" cy="365760"/>
+            <a:ext cx="10058400" cy="365760"/>
           </a:xfrm>
           <a:prstGeom prst="rect">
             <a:avLst/>
@@ -5592,13 +5747,13 @@
           <a:lstStyle/>
           <a:p>
             <a:r>
-              <a:rPr sz="1200" b="1" i="0">
-                <a:solidFill>
-                  <a:srgbClr val="64748B"/>
-                </a:solidFill>
-                <a:latin typeface="Montserrat"/>
-              </a:rPr>
-              <a:t>CONVERSORES · EXIGENCIAS</a:t>
+              <a:rPr sz="1300" b="1" i="0">
+                <a:solidFill>
+                  <a:srgbClr val="E8801A"/>
+                </a:solidFill>
+                <a:latin typeface="Montserrat"/>
+              </a:rPr>
+              <a:t>CONVERSORES DE VOLUMEN</a:t>
             </a:r>
           </a:p>
         </p:txBody>
@@ -5626,26 +5781,70 @@
           <a:lstStyle/>
           <a:p>
             <a:r>
-              <a:rPr sz="2700" b="1" i="0">
+              <a:rPr sz="2800" b="1" i="0">
                 <a:solidFill>
                   <a:srgbClr val="1E2761"/>
                 </a:solidFill>
                 <a:latin typeface="Montserrat"/>
               </a:rPr>
-              <a:t>Clase C y 35 días</a:t>
-            </a:r>
-          </a:p>
-        </p:txBody>
-      </p:sp>
-      <p:sp>
-        <p:nvSpPr>
-          <p:cNvPr id="7" name="TextBox 6"/>
+              <a:t>Traducir el volumen</a:t>
+            </a:r>
+          </a:p>
+        </p:txBody>
+      </p:sp>
+      <p:sp>
+        <p:nvSpPr>
+          <p:cNvPr id="7" name="Rounded Rectangle 6"/>
+          <p:cNvSpPr/>
+          <p:nvPr/>
+        </p:nvSpPr>
+        <p:spPr>
+          <a:xfrm>
+            <a:off x="868680" y="1627632"/>
+            <a:ext cx="2011680" cy="73152"/>
+          </a:xfrm>
+          <a:prstGeom prst="roundRect">
+            <a:avLst/>
+          </a:prstGeom>
+          <a:solidFill>
+            <a:srgbClr val="E8801A"/>
+          </a:solidFill>
+          <a:ln>
+            <a:noFill/>
+          </a:ln>
+          <a:effectLst/>
+        </p:spPr>
+        <p:style>
+          <a:lnRef idx="1">
+            <a:schemeClr val="accent1"/>
+          </a:lnRef>
+          <a:fillRef idx="3">
+            <a:schemeClr val="accent1"/>
+          </a:fillRef>
+          <a:effectRef idx="2">
+            <a:schemeClr val="accent1"/>
+          </a:effectRef>
+          <a:fontRef idx="minor">
+            <a:schemeClr val="lt1"/>
+          </a:fontRef>
+        </p:style>
+        <p:txBody>
+          <a:bodyPr rtlCol="0" anchor="ctr"/>
+          <a:lstStyle/>
+          <a:p>
+            <a:pPr algn="ctr"/>
+          </a:p>
+        </p:txBody>
+      </p:sp>
+      <p:sp>
+        <p:nvSpPr>
+          <p:cNvPr id="8" name="TextBox 7"/>
           <p:cNvSpPr txBox="1"/>
           <p:nvPr/>
         </p:nvSpPr>
         <p:spPr>
           <a:xfrm>
-            <a:off x="822960" y="1920240"/>
+            <a:off x="822960" y="1965960"/>
             <a:ext cx="4983480" cy="4206240"/>
           </a:xfrm>
           <a:prstGeom prst="rect">
@@ -5661,17 +5860,17 @@
           <a:p>
             <a:pPr>
               <a:spcAft>
-                <a:spcPts val="1000"/>
+                <a:spcPts val="1100"/>
               </a:spcAft>
             </a:pPr>
             <a:r>
               <a:rPr sz="1600" b="1" i="0">
                 <a:solidFill>
-                  <a:srgbClr val="2E3A80"/>
-                </a:solidFill>
-                <a:latin typeface="Montserrat"/>
-              </a:rPr>
-              <a:t>•  </a:t>
+                  <a:srgbClr val="E8801A"/>
+                </a:solidFill>
+                <a:latin typeface="Montserrat"/>
+              </a:rPr>
+              <a:t>▸  </a:t>
             </a:r>
             <a:r>
               <a:rPr sz="1600" b="0" i="0">
@@ -5680,23 +5879,23 @@
                 </a:solidFill>
                 <a:latin typeface="Montserrat"/>
               </a:rPr>
-              <a:t>Clase C, error de ± 0,5 %</a:t>
+              <a:t>De volumen bruto a condiciones de referencia</a:t>
             </a:r>
           </a:p>
           <a:p>
             <a:pPr>
               <a:spcAft>
-                <a:spcPts val="1000"/>
+                <a:spcPts val="1100"/>
               </a:spcAft>
             </a:pPr>
             <a:r>
               <a:rPr sz="1600" b="1" i="0">
                 <a:solidFill>
-                  <a:srgbClr val="2E3A80"/>
-                </a:solidFill>
-                <a:latin typeface="Montserrat"/>
-              </a:rPr>
-              <a:t>•  </a:t>
+                  <a:srgbClr val="E8801A"/>
+                </a:solidFill>
+                <a:latin typeface="Montserrat"/>
+              </a:rPr>
+              <a:t>▸  </a:t>
             </a:r>
             <a:r>
               <a:rPr sz="1600" b="0" i="0">
@@ -5705,23 +5904,23 @@
                 </a:solidFill>
                 <a:latin typeface="Montserrat"/>
               </a:rPr>
-              <a:t>Pantalla con volúmenes y presión</a:t>
+              <a:t>Tipo PT: presión y temperatura</a:t>
             </a:r>
           </a:p>
           <a:p>
             <a:pPr>
               <a:spcAft>
-                <a:spcPts val="1000"/>
+                <a:spcPts val="1100"/>
               </a:spcAft>
             </a:pPr>
             <a:r>
               <a:rPr sz="1600" b="1" i="0">
                 <a:solidFill>
-                  <a:srgbClr val="2E3A80"/>
-                </a:solidFill>
-                <a:latin typeface="Montserrat"/>
-              </a:rPr>
-              <a:t>•  </a:t>
+                  <a:srgbClr val="E8801A"/>
+                </a:solidFill>
+                <a:latin typeface="Montserrat"/>
+              </a:rPr>
+              <a:t>▸  </a:t>
             </a:r>
             <a:r>
               <a:rPr sz="1600" b="0" i="0">
@@ -5730,14 +5929,14 @@
                 </a:solidFill>
                 <a:latin typeface="Montserrat"/>
               </a:rPr>
-              <a:t>Memoria de 35 días y salida serie</a:t>
-            </a:r>
-          </a:p>
-        </p:txBody>
-      </p:sp>
-      <p:sp>
-        <p:nvSpPr>
-          <p:cNvPr id="8" name="imgph" descr="IMGQ:electronic gas flow computer display panel"/>
+              <a:t>Tipo PTZ: además el factor Z</a:t>
+            </a:r>
+          </a:p>
+        </p:txBody>
+      </p:sp>
+      <p:sp>
+        <p:nvSpPr>
+          <p:cNvPr id="9" name="imgph" descr="IMGQ:electronic gas volume converter device"/>
           <p:cNvSpPr/>
           <p:nvPr/>
         </p:nvSpPr>
@@ -5783,7 +5982,7 @@
       </p:sp>
       <p:sp>
         <p:nvSpPr>
-          <p:cNvPr id="9" name="TextBox 8"/>
+          <p:cNvPr id="10" name="TextBox 9"/>
           <p:cNvSpPr txBox="1"/>
           <p:nvPr/>
         </p:nvSpPr>
@@ -5823,7 +6022,7 @@
                 </a:solidFill>
                 <a:latin typeface="Montserrat"/>
               </a:rPr>
-              <a:t>electronic gas flow computer display panel</a:t>
+              <a:t>electronic gas volume converter device</a:t>
             </a:r>
           </a:p>
         </p:txBody>
@@ -5920,7 +6119,7 @@
                 </a:solidFill>
                 <a:latin typeface="Montserrat"/>
               </a:rPr>
-              <a:t>012 / 019</a:t>
+              <a:t>012 / 020</a:t>
             </a:r>
           </a:p>
         </p:txBody>
@@ -5968,7 +6167,7 @@
         <p:spPr>
           <a:xfrm>
             <a:off x="822960" y="457200"/>
-            <a:ext cx="8229600" cy="365760"/>
+            <a:ext cx="10058400" cy="365760"/>
           </a:xfrm>
           <a:prstGeom prst="rect">
             <a:avLst/>
@@ -5982,13 +6181,13 @@
           <a:lstStyle/>
           <a:p>
             <a:r>
-              <a:rPr sz="1200" b="1" i="0">
-                <a:solidFill>
-                  <a:srgbClr val="64748B"/>
-                </a:solidFill>
-                <a:latin typeface="Montserrat"/>
-              </a:rPr>
-              <a:t>MANÓMETROS</a:t>
+              <a:rPr sz="1300" b="1" i="0">
+                <a:solidFill>
+                  <a:srgbClr val="E8801A"/>
+                </a:solidFill>
+                <a:latin typeface="Montserrat"/>
+              </a:rPr>
+              <a:t>CONVERSORES · EXIGENCIAS</a:t>
             </a:r>
           </a:p>
         </p:txBody>
@@ -6016,26 +6215,70 @@
           <a:lstStyle/>
           <a:p>
             <a:r>
-              <a:rPr sz="2700" b="1" i="0">
+              <a:rPr sz="2800" b="1" i="0">
                 <a:solidFill>
                   <a:srgbClr val="1E2761"/>
                 </a:solidFill>
                 <a:latin typeface="Montserrat"/>
               </a:rPr>
-              <a:t>Trabajar en el centro de la escala</a:t>
-            </a:r>
-          </a:p>
-        </p:txBody>
-      </p:sp>
-      <p:sp>
-        <p:nvSpPr>
-          <p:cNvPr id="7" name="TextBox 6"/>
+              <a:t>Clase C y 35 días</a:t>
+            </a:r>
+          </a:p>
+        </p:txBody>
+      </p:sp>
+      <p:sp>
+        <p:nvSpPr>
+          <p:cNvPr id="7" name="Rounded Rectangle 6"/>
+          <p:cNvSpPr/>
+          <p:nvPr/>
+        </p:nvSpPr>
+        <p:spPr>
+          <a:xfrm>
+            <a:off x="868680" y="1627632"/>
+            <a:ext cx="2011680" cy="73152"/>
+          </a:xfrm>
+          <a:prstGeom prst="roundRect">
+            <a:avLst/>
+          </a:prstGeom>
+          <a:solidFill>
+            <a:srgbClr val="E8801A"/>
+          </a:solidFill>
+          <a:ln>
+            <a:noFill/>
+          </a:ln>
+          <a:effectLst/>
+        </p:spPr>
+        <p:style>
+          <a:lnRef idx="1">
+            <a:schemeClr val="accent1"/>
+          </a:lnRef>
+          <a:fillRef idx="3">
+            <a:schemeClr val="accent1"/>
+          </a:fillRef>
+          <a:effectRef idx="2">
+            <a:schemeClr val="accent1"/>
+          </a:effectRef>
+          <a:fontRef idx="minor">
+            <a:schemeClr val="lt1"/>
+          </a:fontRef>
+        </p:style>
+        <p:txBody>
+          <a:bodyPr rtlCol="0" anchor="ctr"/>
+          <a:lstStyle/>
+          <a:p>
+            <a:pPr algn="ctr"/>
+          </a:p>
+        </p:txBody>
+      </p:sp>
+      <p:sp>
+        <p:nvSpPr>
+          <p:cNvPr id="8" name="TextBox 7"/>
           <p:cNvSpPr txBox="1"/>
           <p:nvPr/>
         </p:nvSpPr>
         <p:spPr>
           <a:xfrm>
-            <a:off x="822960" y="1920240"/>
+            <a:off x="822960" y="1965960"/>
             <a:ext cx="4983480" cy="4206240"/>
           </a:xfrm>
           <a:prstGeom prst="rect">
@@ -6051,17 +6294,17 @@
           <a:p>
             <a:pPr>
               <a:spcAft>
-                <a:spcPts val="1000"/>
+                <a:spcPts val="1100"/>
               </a:spcAft>
             </a:pPr>
             <a:r>
               <a:rPr sz="1600" b="1" i="0">
                 <a:solidFill>
-                  <a:srgbClr val="2E3A80"/>
-                </a:solidFill>
-                <a:latin typeface="Montserrat"/>
-              </a:rPr>
-              <a:t>•  </a:t>
+                  <a:srgbClr val="E8801A"/>
+                </a:solidFill>
+                <a:latin typeface="Montserrat"/>
+              </a:rPr>
+              <a:t>▸  </a:t>
             </a:r>
             <a:r>
               <a:rPr sz="1600" b="0" i="0">
@@ -6070,23 +6313,23 @@
                 </a:solidFill>
                 <a:latin typeface="Montserrat"/>
               </a:rPr>
-              <a:t>Zona de trabajo: 35 % a 75 %</a:t>
+              <a:t>Clase C, error de ± 0,5 %</a:t>
             </a:r>
           </a:p>
           <a:p>
             <a:pPr>
               <a:spcAft>
-                <a:spcPts val="1000"/>
+                <a:spcPts val="1100"/>
               </a:spcAft>
             </a:pPr>
             <a:r>
               <a:rPr sz="1600" b="1" i="0">
                 <a:solidFill>
-                  <a:srgbClr val="2E3A80"/>
-                </a:solidFill>
-                <a:latin typeface="Montserrat"/>
-              </a:rPr>
-              <a:t>•  </a:t>
+                  <a:srgbClr val="E8801A"/>
+                </a:solidFill>
+                <a:latin typeface="Montserrat"/>
+              </a:rPr>
+              <a:t>▸  </a:t>
             </a:r>
             <a:r>
               <a:rPr sz="1600" b="0" i="0">
@@ -6095,23 +6338,23 @@
                 </a:solidFill>
                 <a:latin typeface="Montserrat"/>
               </a:rPr>
-              <a:t>Válvula de 3 vías con toma de ¼"</a:t>
+              <a:t>Pantalla con volúmenes y presión</a:t>
             </a:r>
           </a:p>
           <a:p>
             <a:pPr>
               <a:spcAft>
-                <a:spcPts val="1000"/>
+                <a:spcPts val="1100"/>
               </a:spcAft>
             </a:pPr>
             <a:r>
               <a:rPr sz="1600" b="1" i="0">
                 <a:solidFill>
-                  <a:srgbClr val="2E3A80"/>
-                </a:solidFill>
-                <a:latin typeface="Montserrat"/>
-              </a:rPr>
-              <a:t>•  </a:t>
+                  <a:srgbClr val="E8801A"/>
+                </a:solidFill>
+                <a:latin typeface="Montserrat"/>
+              </a:rPr>
+              <a:t>▸  </a:t>
             </a:r>
             <a:r>
               <a:rPr sz="1600" b="0" i="0">
@@ -6120,14 +6363,14 @@
                 </a:solidFill>
                 <a:latin typeface="Montserrat"/>
               </a:rPr>
-              <a:t>Para conectar un manómetro patrón</a:t>
-            </a:r>
-          </a:p>
-        </p:txBody>
-      </p:sp>
-      <p:sp>
-        <p:nvSpPr>
-          <p:cNvPr id="8" name="imgph" descr="IMGQ:pressure gauge manometer on gas pipe"/>
+              <a:t>Memoria de 35 días y salida serie</a:t>
+            </a:r>
+          </a:p>
+        </p:txBody>
+      </p:sp>
+      <p:sp>
+        <p:nvSpPr>
+          <p:cNvPr id="9" name="imgph" descr="IMGQ:electronic gas flow computer display panel"/>
           <p:cNvSpPr/>
           <p:nvPr/>
         </p:nvSpPr>
@@ -6173,7 +6416,7 @@
       </p:sp>
       <p:sp>
         <p:nvSpPr>
-          <p:cNvPr id="9" name="TextBox 8"/>
+          <p:cNvPr id="10" name="TextBox 9"/>
           <p:cNvSpPr txBox="1"/>
           <p:nvPr/>
         </p:nvSpPr>
@@ -6213,7 +6456,7 @@
                 </a:solidFill>
                 <a:latin typeface="Montserrat"/>
               </a:rPr>
-              <a:t>pressure gauge manometer on gas pipe</a:t>
+              <a:t>electronic gas flow computer display panel</a:t>
             </a:r>
           </a:p>
         </p:txBody>
@@ -6310,7 +6553,7 @@
                 </a:solidFill>
                 <a:latin typeface="Montserrat"/>
               </a:rPr>
-              <a:t>013 / 019</a:t>
+              <a:t>013 / 020</a:t>
             </a:r>
           </a:p>
         </p:txBody>
@@ -6358,7 +6601,7 @@
         <p:spPr>
           <a:xfrm>
             <a:off x="822960" y="457200"/>
-            <a:ext cx="8229600" cy="365760"/>
+            <a:ext cx="10058400" cy="365760"/>
           </a:xfrm>
           <a:prstGeom prst="rect">
             <a:avLst/>
@@ -6372,13 +6615,13 @@
           <a:lstStyle/>
           <a:p>
             <a:r>
-              <a:rPr sz="1200" b="1" i="0">
-                <a:solidFill>
-                  <a:srgbClr val="64748B"/>
-                </a:solidFill>
-                <a:latin typeface="Montserrat"/>
-              </a:rPr>
-              <a:t>MANÓMETROS · ESFERA Y CLASE</a:t>
+              <a:rPr sz="1300" b="1" i="0">
+                <a:solidFill>
+                  <a:srgbClr val="E8801A"/>
+                </a:solidFill>
+                <a:latin typeface="Montserrat"/>
+              </a:rPr>
+              <a:t>MANÓMETROS</a:t>
             </a:r>
           </a:p>
         </p:txBody>
@@ -6406,26 +6649,70 @@
           <a:lstStyle/>
           <a:p>
             <a:r>
-              <a:rPr sz="2700" b="1" i="0">
+              <a:rPr sz="2800" b="1" i="0">
                 <a:solidFill>
                   <a:srgbClr val="1E2761"/>
                 </a:solidFill>
                 <a:latin typeface="Montserrat"/>
               </a:rPr>
-              <a:t>Cápsula o Bourdon: la frontera 0,6 bar</a:t>
-            </a:r>
-          </a:p>
-        </p:txBody>
-      </p:sp>
-      <p:sp>
-        <p:nvSpPr>
-          <p:cNvPr id="7" name="TextBox 6"/>
+              <a:t>Trabajar en el centro de la escala</a:t>
+            </a:r>
+          </a:p>
+        </p:txBody>
+      </p:sp>
+      <p:sp>
+        <p:nvSpPr>
+          <p:cNvPr id="7" name="Rounded Rectangle 6"/>
+          <p:cNvSpPr/>
+          <p:nvPr/>
+        </p:nvSpPr>
+        <p:spPr>
+          <a:xfrm>
+            <a:off x="868680" y="1627632"/>
+            <a:ext cx="2011680" cy="73152"/>
+          </a:xfrm>
+          <a:prstGeom prst="roundRect">
+            <a:avLst/>
+          </a:prstGeom>
+          <a:solidFill>
+            <a:srgbClr val="E8801A"/>
+          </a:solidFill>
+          <a:ln>
+            <a:noFill/>
+          </a:ln>
+          <a:effectLst/>
+        </p:spPr>
+        <p:style>
+          <a:lnRef idx="1">
+            <a:schemeClr val="accent1"/>
+          </a:lnRef>
+          <a:fillRef idx="3">
+            <a:schemeClr val="accent1"/>
+          </a:fillRef>
+          <a:effectRef idx="2">
+            <a:schemeClr val="accent1"/>
+          </a:effectRef>
+          <a:fontRef idx="minor">
+            <a:schemeClr val="lt1"/>
+          </a:fontRef>
+        </p:style>
+        <p:txBody>
+          <a:bodyPr rtlCol="0" anchor="ctr"/>
+          <a:lstStyle/>
+          <a:p>
+            <a:pPr algn="ctr"/>
+          </a:p>
+        </p:txBody>
+      </p:sp>
+      <p:sp>
+        <p:nvSpPr>
+          <p:cNvPr id="8" name="TextBox 7"/>
           <p:cNvSpPr txBox="1"/>
           <p:nvPr/>
         </p:nvSpPr>
         <p:spPr>
           <a:xfrm>
-            <a:off x="822960" y="1920240"/>
+            <a:off x="822960" y="1965960"/>
             <a:ext cx="4983480" cy="4206240"/>
           </a:xfrm>
           <a:prstGeom prst="rect">
@@ -6441,17 +6728,17 @@
           <a:p>
             <a:pPr>
               <a:spcAft>
-                <a:spcPts val="1000"/>
+                <a:spcPts val="1100"/>
               </a:spcAft>
             </a:pPr>
             <a:r>
               <a:rPr sz="1600" b="1" i="0">
                 <a:solidFill>
-                  <a:srgbClr val="2E3A80"/>
-                </a:solidFill>
-                <a:latin typeface="Montserrat"/>
-              </a:rPr>
-              <a:t>•  </a:t>
+                  <a:srgbClr val="E8801A"/>
+                </a:solidFill>
+                <a:latin typeface="Montserrat"/>
+              </a:rPr>
+              <a:t>▸  </a:t>
             </a:r>
             <a:r>
               <a:rPr sz="1600" b="0" i="0">
@@ -6460,23 +6747,23 @@
                 </a:solidFill>
                 <a:latin typeface="Montserrat"/>
               </a:rPr>
-              <a:t>A más presión, esfera mayor y clase más fina</a:t>
+              <a:t>Zona de trabajo: 35 % a 75 %</a:t>
             </a:r>
           </a:p>
           <a:p>
             <a:pPr>
               <a:spcAft>
-                <a:spcPts val="1000"/>
+                <a:spcPts val="1100"/>
               </a:spcAft>
             </a:pPr>
             <a:r>
               <a:rPr sz="1600" b="1" i="0">
                 <a:solidFill>
-                  <a:srgbClr val="2E3A80"/>
-                </a:solidFill>
-                <a:latin typeface="Montserrat"/>
-              </a:rPr>
-              <a:t>•  </a:t>
+                  <a:srgbClr val="E8801A"/>
+                </a:solidFill>
+                <a:latin typeface="Montserrat"/>
+              </a:rPr>
+              <a:t>▸  </a:t>
             </a:r>
             <a:r>
               <a:rPr sz="1600" b="0" i="0">
@@ -6485,23 +6772,23 @@
                 </a:solidFill>
                 <a:latin typeface="Montserrat"/>
               </a:rPr>
-              <a:t>Cápsula hasta 0,6 bar</a:t>
+              <a:t>Válvula de 3 vías con toma de ¼"</a:t>
             </a:r>
           </a:p>
           <a:p>
             <a:pPr>
               <a:spcAft>
-                <a:spcPts val="1000"/>
+                <a:spcPts val="1100"/>
               </a:spcAft>
             </a:pPr>
             <a:r>
               <a:rPr sz="1600" b="1" i="0">
                 <a:solidFill>
-                  <a:srgbClr val="2E3A80"/>
-                </a:solidFill>
-                <a:latin typeface="Montserrat"/>
-              </a:rPr>
-              <a:t>•  </a:t>
+                  <a:srgbClr val="E8801A"/>
+                </a:solidFill>
+                <a:latin typeface="Montserrat"/>
+              </a:rPr>
+              <a:t>▸  </a:t>
             </a:r>
             <a:r>
               <a:rPr sz="1600" b="0" i="0">
@@ -6510,14 +6797,14 @@
                 </a:solidFill>
                 <a:latin typeface="Montserrat"/>
               </a:rPr>
-              <a:t>Bourdon de 0,6 bar en adelante</a:t>
-            </a:r>
-          </a:p>
-        </p:txBody>
-      </p:sp>
-      <p:sp>
-        <p:nvSpPr>
-          <p:cNvPr id="8" name="imgph" descr="IMGQ:large pressure gauge dial detail"/>
+              <a:t>Para conectar un manómetro patrón</a:t>
+            </a:r>
+          </a:p>
+        </p:txBody>
+      </p:sp>
+      <p:sp>
+        <p:nvSpPr>
+          <p:cNvPr id="9" name="imgph" descr="IMGQ:pressure gauge manometer on gas pipe"/>
           <p:cNvSpPr/>
           <p:nvPr/>
         </p:nvSpPr>
@@ -6563,7 +6850,7 @@
       </p:sp>
       <p:sp>
         <p:nvSpPr>
-          <p:cNvPr id="9" name="TextBox 8"/>
+          <p:cNvPr id="10" name="TextBox 9"/>
           <p:cNvSpPr txBox="1"/>
           <p:nvPr/>
         </p:nvSpPr>
@@ -6603,7 +6890,7 @@
                 </a:solidFill>
                 <a:latin typeface="Montserrat"/>
               </a:rPr>
-              <a:t>large pressure gauge dial detail</a:t>
+              <a:t>pressure gauge manometer on gas pipe</a:t>
             </a:r>
           </a:p>
         </p:txBody>
@@ -6700,7 +6987,7 @@
                 </a:solidFill>
                 <a:latin typeface="Montserrat"/>
               </a:rPr>
-              <a:t>014 / 019</a:t>
+              <a:t>014 / 020</a:t>
             </a:r>
           </a:p>
         </p:txBody>
@@ -6748,7 +7035,7 @@
         <p:spPr>
           <a:xfrm>
             <a:off x="822960" y="457200"/>
-            <a:ext cx="8229600" cy="365760"/>
+            <a:ext cx="10058400" cy="365760"/>
           </a:xfrm>
           <a:prstGeom prst="rect">
             <a:avLst/>
@@ -6762,13 +7049,13 @@
           <a:lstStyle/>
           <a:p>
             <a:r>
-              <a:rPr sz="1200" b="1" i="0">
-                <a:solidFill>
-                  <a:srgbClr val="64748B"/>
-                </a:solidFill>
-                <a:latin typeface="Montserrat"/>
-              </a:rPr>
-              <a:t>TERMÓMETROS</a:t>
+              <a:rPr sz="1300" b="1" i="0">
+                <a:solidFill>
+                  <a:srgbClr val="E8801A"/>
+                </a:solidFill>
+                <a:latin typeface="Montserrat"/>
+              </a:rPr>
+              <a:t>MANÓMETROS · ESFERA Y CLASE</a:t>
             </a:r>
           </a:p>
         </p:txBody>
@@ -6796,26 +7083,70 @@
           <a:lstStyle/>
           <a:p>
             <a:r>
-              <a:rPr sz="2700" b="1" i="0">
+              <a:rPr sz="2800" b="1" i="0">
                 <a:solidFill>
                   <a:srgbClr val="1E2761"/>
                 </a:solidFill>
                 <a:latin typeface="Montserrat"/>
               </a:rPr>
-              <a:t>En una vaina con aceite</a:t>
-            </a:r>
-          </a:p>
-        </p:txBody>
-      </p:sp>
-      <p:sp>
-        <p:nvSpPr>
-          <p:cNvPr id="7" name="TextBox 6"/>
+              <a:t>Cápsula o Bourdon: la frontera 0,6 bar</a:t>
+            </a:r>
+          </a:p>
+        </p:txBody>
+      </p:sp>
+      <p:sp>
+        <p:nvSpPr>
+          <p:cNvPr id="7" name="Rounded Rectangle 6"/>
+          <p:cNvSpPr/>
+          <p:nvPr/>
+        </p:nvSpPr>
+        <p:spPr>
+          <a:xfrm>
+            <a:off x="868680" y="1627632"/>
+            <a:ext cx="2011680" cy="73152"/>
+          </a:xfrm>
+          <a:prstGeom prst="roundRect">
+            <a:avLst/>
+          </a:prstGeom>
+          <a:solidFill>
+            <a:srgbClr val="E8801A"/>
+          </a:solidFill>
+          <a:ln>
+            <a:noFill/>
+          </a:ln>
+          <a:effectLst/>
+        </p:spPr>
+        <p:style>
+          <a:lnRef idx="1">
+            <a:schemeClr val="accent1"/>
+          </a:lnRef>
+          <a:fillRef idx="3">
+            <a:schemeClr val="accent1"/>
+          </a:fillRef>
+          <a:effectRef idx="2">
+            <a:schemeClr val="accent1"/>
+          </a:effectRef>
+          <a:fontRef idx="minor">
+            <a:schemeClr val="lt1"/>
+          </a:fontRef>
+        </p:style>
+        <p:txBody>
+          <a:bodyPr rtlCol="0" anchor="ctr"/>
+          <a:lstStyle/>
+          <a:p>
+            <a:pPr algn="ctr"/>
+          </a:p>
+        </p:txBody>
+      </p:sp>
+      <p:sp>
+        <p:nvSpPr>
+          <p:cNvPr id="8" name="TextBox 7"/>
           <p:cNvSpPr txBox="1"/>
           <p:nvPr/>
         </p:nvSpPr>
         <p:spPr>
           <a:xfrm>
-            <a:off x="822960" y="1920240"/>
+            <a:off x="822960" y="1965960"/>
             <a:ext cx="4983480" cy="4206240"/>
           </a:xfrm>
           <a:prstGeom prst="rect">
@@ -6831,17 +7162,17 @@
           <a:p>
             <a:pPr>
               <a:spcAft>
-                <a:spcPts val="1000"/>
+                <a:spcPts val="1100"/>
               </a:spcAft>
             </a:pPr>
             <a:r>
               <a:rPr sz="1600" b="1" i="0">
                 <a:solidFill>
-                  <a:srgbClr val="2E3A80"/>
-                </a:solidFill>
-                <a:latin typeface="Montserrat"/>
-              </a:rPr>
-              <a:t>•  </a:t>
+                  <a:srgbClr val="E8801A"/>
+                </a:solidFill>
+                <a:latin typeface="Montserrat"/>
+              </a:rPr>
+              <a:t>▸  </a:t>
             </a:r>
             <a:r>
               <a:rPr sz="1600" b="0" i="0">
@@ -6850,23 +7181,23 @@
                 </a:solidFill>
                 <a:latin typeface="Montserrat"/>
               </a:rPr>
-              <a:t>Escala de -10 °C a +60 °C</a:t>
+              <a:t>A más presión, esfera mayor y clase más fina</a:t>
             </a:r>
           </a:p>
           <a:p>
             <a:pPr>
               <a:spcAft>
-                <a:spcPts val="1000"/>
+                <a:spcPts val="1100"/>
               </a:spcAft>
             </a:pPr>
             <a:r>
               <a:rPr sz="1600" b="1" i="0">
                 <a:solidFill>
-                  <a:srgbClr val="2E3A80"/>
-                </a:solidFill>
-                <a:latin typeface="Montserrat"/>
-              </a:rPr>
-              <a:t>•  </a:t>
+                  <a:srgbClr val="E8801A"/>
+                </a:solidFill>
+                <a:latin typeface="Montserrat"/>
+              </a:rPr>
+              <a:t>▸  </a:t>
             </a:r>
             <a:r>
               <a:rPr sz="1600" b="0" i="0">
@@ -6875,23 +7206,23 @@
                 </a:solidFill>
                 <a:latin typeface="Montserrat"/>
               </a:rPr>
-              <a:t>Exactitud de ± 0,5 °C</a:t>
+              <a:t>Cápsula hasta 0,6 bar</a:t>
             </a:r>
           </a:p>
           <a:p>
             <a:pPr>
               <a:spcAft>
-                <a:spcPts val="1000"/>
+                <a:spcPts val="1100"/>
               </a:spcAft>
             </a:pPr>
             <a:r>
               <a:rPr sz="1600" b="1" i="0">
                 <a:solidFill>
-                  <a:srgbClr val="2E3A80"/>
-                </a:solidFill>
-                <a:latin typeface="Montserrat"/>
-              </a:rPr>
-              <a:t>•  </a:t>
+                  <a:srgbClr val="E8801A"/>
+                </a:solidFill>
+                <a:latin typeface="Montserrat"/>
+              </a:rPr>
+              <a:t>▸  </a:t>
             </a:r>
             <a:r>
               <a:rPr sz="1600" b="0" i="0">
@@ -6900,14 +7231,14 @@
                 </a:solidFill>
                 <a:latin typeface="Montserrat"/>
               </a:rPr>
-              <a:t>Vaina extraíble sin cortar el servicio</a:t>
-            </a:r>
-          </a:p>
-        </p:txBody>
-      </p:sp>
-      <p:sp>
-        <p:nvSpPr>
-          <p:cNvPr id="8" name="imgph" descr="IMGQ:thermometer in pipe thermowell"/>
+              <a:t>Bourdon de 0,6 bar en adelante</a:t>
+            </a:r>
+          </a:p>
+        </p:txBody>
+      </p:sp>
+      <p:sp>
+        <p:nvSpPr>
+          <p:cNvPr id="9" name="imgph" descr="IMGQ:large pressure gauge dial detail"/>
           <p:cNvSpPr/>
           <p:nvPr/>
         </p:nvSpPr>
@@ -6953,7 +7284,7 @@
       </p:sp>
       <p:sp>
         <p:nvSpPr>
-          <p:cNvPr id="9" name="TextBox 8"/>
+          <p:cNvPr id="10" name="TextBox 9"/>
           <p:cNvSpPr txBox="1"/>
           <p:nvPr/>
         </p:nvSpPr>
@@ -6993,7 +7324,7 @@
                 </a:solidFill>
                 <a:latin typeface="Montserrat"/>
               </a:rPr>
-              <a:t>thermometer in pipe thermowell</a:t>
+              <a:t>large pressure gauge dial detail</a:t>
             </a:r>
           </a:p>
         </p:txBody>
@@ -7090,7 +7421,7 @@
                 </a:solidFill>
                 <a:latin typeface="Montserrat"/>
               </a:rPr>
-              <a:t>015 / 019</a:t>
+              <a:t>015 / 020</a:t>
             </a:r>
           </a:p>
         </p:txBody>
@@ -7138,7 +7469,7 @@
         <p:spPr>
           <a:xfrm>
             <a:off x="822960" y="457200"/>
-            <a:ext cx="8229600" cy="365760"/>
+            <a:ext cx="10058400" cy="365760"/>
           </a:xfrm>
           <a:prstGeom prst="rect">
             <a:avLst/>
@@ -7152,13 +7483,13 @@
           <a:lstStyle/>
           <a:p>
             <a:r>
-              <a:rPr sz="1200" b="1" i="0">
-                <a:solidFill>
-                  <a:srgbClr val="64748B"/>
-                </a:solidFill>
-                <a:latin typeface="Montserrat"/>
-              </a:rPr>
-              <a:t>UNIDADES REMOTAS DE TELEMEDIDA</a:t>
+              <a:rPr sz="1300" b="1" i="0">
+                <a:solidFill>
+                  <a:srgbClr val="E8801A"/>
+                </a:solidFill>
+                <a:latin typeface="Montserrat"/>
+              </a:rPr>
+              <a:t>TERMÓMETROS</a:t>
             </a:r>
           </a:p>
         </p:txBody>
@@ -7186,26 +7517,70 @@
           <a:lstStyle/>
           <a:p>
             <a:r>
-              <a:rPr sz="2700" b="1" i="0">
+              <a:rPr sz="2800" b="1" i="0">
                 <a:solidFill>
                   <a:srgbClr val="1E2761"/>
                 </a:solidFill>
                 <a:latin typeface="Montserrat"/>
               </a:rPr>
-              <a:t>Leer el contador desde la oficina</a:t>
-            </a:r>
-          </a:p>
-        </p:txBody>
-      </p:sp>
-      <p:sp>
-        <p:nvSpPr>
-          <p:cNvPr id="7" name="TextBox 6"/>
+              <a:t>En una vaina con aceite</a:t>
+            </a:r>
+          </a:p>
+        </p:txBody>
+      </p:sp>
+      <p:sp>
+        <p:nvSpPr>
+          <p:cNvPr id="7" name="Rounded Rectangle 6"/>
+          <p:cNvSpPr/>
+          <p:nvPr/>
+        </p:nvSpPr>
+        <p:spPr>
+          <a:xfrm>
+            <a:off x="868680" y="1627632"/>
+            <a:ext cx="2011680" cy="73152"/>
+          </a:xfrm>
+          <a:prstGeom prst="roundRect">
+            <a:avLst/>
+          </a:prstGeom>
+          <a:solidFill>
+            <a:srgbClr val="E8801A"/>
+          </a:solidFill>
+          <a:ln>
+            <a:noFill/>
+          </a:ln>
+          <a:effectLst/>
+        </p:spPr>
+        <p:style>
+          <a:lnRef idx="1">
+            <a:schemeClr val="accent1"/>
+          </a:lnRef>
+          <a:fillRef idx="3">
+            <a:schemeClr val="accent1"/>
+          </a:fillRef>
+          <a:effectRef idx="2">
+            <a:schemeClr val="accent1"/>
+          </a:effectRef>
+          <a:fontRef idx="minor">
+            <a:schemeClr val="lt1"/>
+          </a:fontRef>
+        </p:style>
+        <p:txBody>
+          <a:bodyPr rtlCol="0" anchor="ctr"/>
+          <a:lstStyle/>
+          <a:p>
+            <a:pPr algn="ctr"/>
+          </a:p>
+        </p:txBody>
+      </p:sp>
+      <p:sp>
+        <p:nvSpPr>
+          <p:cNvPr id="8" name="TextBox 7"/>
           <p:cNvSpPr txBox="1"/>
           <p:nvPr/>
         </p:nvSpPr>
         <p:spPr>
           <a:xfrm>
-            <a:off x="822960" y="1920240"/>
+            <a:off x="822960" y="1965960"/>
             <a:ext cx="4983480" cy="4206240"/>
           </a:xfrm>
           <a:prstGeom prst="rect">
@@ -7221,17 +7596,17 @@
           <a:p>
             <a:pPr>
               <a:spcAft>
-                <a:spcPts val="1000"/>
+                <a:spcPts val="1100"/>
               </a:spcAft>
             </a:pPr>
             <a:r>
               <a:rPr sz="1600" b="1" i="0">
                 <a:solidFill>
-                  <a:srgbClr val="2E3A80"/>
-                </a:solidFill>
-                <a:latin typeface="Montserrat"/>
-              </a:rPr>
-              <a:t>•  </a:t>
+                  <a:srgbClr val="E8801A"/>
+                </a:solidFill>
+                <a:latin typeface="Montserrat"/>
+              </a:rPr>
+              <a:t>▸  </a:t>
             </a:r>
             <a:r>
               <a:rPr sz="1600" b="0" i="0">
@@ -7240,23 +7615,23 @@
                 </a:solidFill>
                 <a:latin typeface="Montserrat"/>
               </a:rPr>
-              <a:t>Entrada serie para el conversor</a:t>
+              <a:t>Escala de -10 °C a +60 °C</a:t>
             </a:r>
           </a:p>
           <a:p>
             <a:pPr>
               <a:spcAft>
-                <a:spcPts val="1000"/>
+                <a:spcPts val="1100"/>
               </a:spcAft>
             </a:pPr>
             <a:r>
               <a:rPr sz="1600" b="1" i="0">
                 <a:solidFill>
-                  <a:srgbClr val="2E3A80"/>
-                </a:solidFill>
-                <a:latin typeface="Montserrat"/>
-              </a:rPr>
-              <a:t>•  </a:t>
+                  <a:srgbClr val="E8801A"/>
+                </a:solidFill>
+                <a:latin typeface="Montserrat"/>
+              </a:rPr>
+              <a:t>▸  </a:t>
             </a:r>
             <a:r>
               <a:rPr sz="1600" b="0" i="0">
@@ -7265,23 +7640,23 @@
                 </a:solidFill>
                 <a:latin typeface="Montserrat"/>
               </a:rPr>
-              <a:t>Memoria de 35 días o más</a:t>
+              <a:t>Exactitud de ± 0,5 °C</a:t>
             </a:r>
           </a:p>
           <a:p>
             <a:pPr>
               <a:spcAft>
-                <a:spcPts val="1000"/>
+                <a:spcPts val="1100"/>
               </a:spcAft>
             </a:pPr>
             <a:r>
               <a:rPr sz="1600" b="1" i="0">
                 <a:solidFill>
-                  <a:srgbClr val="2E3A80"/>
-                </a:solidFill>
-                <a:latin typeface="Montserrat"/>
-              </a:rPr>
-              <a:t>•  </a:t>
+                  <a:srgbClr val="E8801A"/>
+                </a:solidFill>
+                <a:latin typeface="Montserrat"/>
+              </a:rPr>
+              <a:t>▸  </a:t>
             </a:r>
             <a:r>
               <a:rPr sz="1600" b="0" i="0">
@@ -7290,14 +7665,14 @@
                 </a:solidFill>
                 <a:latin typeface="Montserrat"/>
               </a:rPr>
-              <a:t>Compatible con el sistema del distribuidor</a:t>
-            </a:r>
-          </a:p>
-        </p:txBody>
-      </p:sp>
-      <p:sp>
-        <p:nvSpPr>
-          <p:cNvPr id="8" name="imgph" descr="IMGQ:remote telemetry unit for gas metering"/>
+              <a:t>Vaina extraíble sin cortar el servicio</a:t>
+            </a:r>
+          </a:p>
+        </p:txBody>
+      </p:sp>
+      <p:sp>
+        <p:nvSpPr>
+          <p:cNvPr id="9" name="imgph" descr="IMGQ:thermometer in pipe thermowell"/>
           <p:cNvSpPr/>
           <p:nvPr/>
         </p:nvSpPr>
@@ -7343,7 +7718,7 @@
       </p:sp>
       <p:sp>
         <p:nvSpPr>
-          <p:cNvPr id="9" name="TextBox 8"/>
+          <p:cNvPr id="10" name="TextBox 9"/>
           <p:cNvSpPr txBox="1"/>
           <p:nvPr/>
         </p:nvSpPr>
@@ -7383,7 +7758,7 @@
                 </a:solidFill>
                 <a:latin typeface="Montserrat"/>
               </a:rPr>
-              <a:t>remote telemetry unit for gas metering</a:t>
+              <a:t>thermometer in pipe thermowell</a:t>
             </a:r>
           </a:p>
         </p:txBody>
@@ -7480,7 +7855,7 @@
                 </a:solidFill>
                 <a:latin typeface="Montserrat"/>
               </a:rPr>
-              <a:t>016 / 019</a:t>
+              <a:t>016 / 020</a:t>
             </a:r>
           </a:p>
         </p:txBody>
@@ -7528,7 +7903,7 @@
         <p:spPr>
           <a:xfrm>
             <a:off x="822960" y="457200"/>
-            <a:ext cx="8229600" cy="365760"/>
+            <a:ext cx="10058400" cy="365760"/>
           </a:xfrm>
           <a:prstGeom prst="rect">
             <a:avLst/>
@@ -7542,13 +7917,13 @@
           <a:lstStyle/>
           <a:p>
             <a:r>
-              <a:rPr sz="1200" b="1" i="0">
-                <a:solidFill>
-                  <a:srgbClr val="64748B"/>
-                </a:solidFill>
-                <a:latin typeface="Montserrat"/>
-              </a:rPr>
-              <a:t>ANEXO A · HASTA 70 KW</a:t>
+              <a:rPr sz="1300" b="1" i="0">
+                <a:solidFill>
+                  <a:srgbClr val="E8801A"/>
+                </a:solidFill>
+                <a:latin typeface="Montserrat"/>
+              </a:rPr>
+              <a:t>UNIDADES REMOTAS DE TELEMEDIDA</a:t>
             </a:r>
           </a:p>
         </p:txBody>
@@ -7576,26 +7951,70 @@
           <a:lstStyle/>
           <a:p>
             <a:r>
-              <a:rPr sz="2700" b="1" i="0">
+              <a:rPr sz="2800" b="1" i="0">
                 <a:solidFill>
                   <a:srgbClr val="1E2761"/>
                 </a:solidFill>
                 <a:latin typeface="Montserrat"/>
               </a:rPr>
-              <a:t>Esquema sencillo para lo pequeño</a:t>
-            </a:r>
-          </a:p>
-        </p:txBody>
-      </p:sp>
-      <p:sp>
-        <p:nvSpPr>
-          <p:cNvPr id="7" name="TextBox 6"/>
+              <a:t>Leer el contador desde la oficina</a:t>
+            </a:r>
+          </a:p>
+        </p:txBody>
+      </p:sp>
+      <p:sp>
+        <p:nvSpPr>
+          <p:cNvPr id="7" name="Rounded Rectangle 6"/>
+          <p:cNvSpPr/>
+          <p:nvPr/>
+        </p:nvSpPr>
+        <p:spPr>
+          <a:xfrm>
+            <a:off x="868680" y="1627632"/>
+            <a:ext cx="2011680" cy="73152"/>
+          </a:xfrm>
+          <a:prstGeom prst="roundRect">
+            <a:avLst/>
+          </a:prstGeom>
+          <a:solidFill>
+            <a:srgbClr val="E8801A"/>
+          </a:solidFill>
+          <a:ln>
+            <a:noFill/>
+          </a:ln>
+          <a:effectLst/>
+        </p:spPr>
+        <p:style>
+          <a:lnRef idx="1">
+            <a:schemeClr val="accent1"/>
+          </a:lnRef>
+          <a:fillRef idx="3">
+            <a:schemeClr val="accent1"/>
+          </a:fillRef>
+          <a:effectRef idx="2">
+            <a:schemeClr val="accent1"/>
+          </a:effectRef>
+          <a:fontRef idx="minor">
+            <a:schemeClr val="lt1"/>
+          </a:fontRef>
+        </p:style>
+        <p:txBody>
+          <a:bodyPr rtlCol="0" anchor="ctr"/>
+          <a:lstStyle/>
+          <a:p>
+            <a:pPr algn="ctr"/>
+          </a:p>
+        </p:txBody>
+      </p:sp>
+      <p:sp>
+        <p:nvSpPr>
+          <p:cNvPr id="8" name="TextBox 7"/>
           <p:cNvSpPr txBox="1"/>
           <p:nvPr/>
         </p:nvSpPr>
         <p:spPr>
           <a:xfrm>
-            <a:off x="822960" y="1920240"/>
+            <a:off x="822960" y="1965960"/>
             <a:ext cx="4983480" cy="4206240"/>
           </a:xfrm>
           <a:prstGeom prst="rect">
@@ -7611,17 +8030,17 @@
           <a:p>
             <a:pPr>
               <a:spcAft>
-                <a:spcPts val="1000"/>
+                <a:spcPts val="1100"/>
               </a:spcAft>
             </a:pPr>
             <a:r>
               <a:rPr sz="1600" b="1" i="0">
                 <a:solidFill>
-                  <a:srgbClr val="2E3A80"/>
-                </a:solidFill>
-                <a:latin typeface="Montserrat"/>
-              </a:rPr>
-              <a:t>•  </a:t>
+                  <a:srgbClr val="E8801A"/>
+                </a:solidFill>
+                <a:latin typeface="Montserrat"/>
+              </a:rPr>
+              <a:t>▸  </a:t>
             </a:r>
             <a:r>
               <a:rPr sz="1600" b="0" i="0">
@@ -7630,23 +8049,23 @@
                 </a:solidFill>
                 <a:latin typeface="Montserrat"/>
               </a:rPr>
-              <a:t>Llave más contador más toma de presión</a:t>
+              <a:t>Entrada serie para el conversor</a:t>
             </a:r>
           </a:p>
           <a:p>
             <a:pPr>
               <a:spcAft>
-                <a:spcPts val="1000"/>
+                <a:spcPts val="1100"/>
               </a:spcAft>
             </a:pPr>
             <a:r>
               <a:rPr sz="1600" b="1" i="0">
                 <a:solidFill>
-                  <a:srgbClr val="2E3A80"/>
-                </a:solidFill>
-                <a:latin typeface="Montserrat"/>
-              </a:rPr>
-              <a:t>•  </a:t>
+                  <a:srgbClr val="E8801A"/>
+                </a:solidFill>
+                <a:latin typeface="Montserrat"/>
+              </a:rPr>
+              <a:t>▸  </a:t>
             </a:r>
             <a:r>
               <a:rPr sz="1600" b="0" i="0">
@@ -7655,23 +8074,23 @@
                 </a:solidFill>
                 <a:latin typeface="Montserrat"/>
               </a:rPr>
-              <a:t>GN: toma de débil calibre; GLP: Peterson</a:t>
+              <a:t>Memoria de 35 días o más</a:t>
             </a:r>
           </a:p>
           <a:p>
             <a:pPr>
               <a:spcAft>
-                <a:spcPts val="1000"/>
+                <a:spcPts val="1100"/>
               </a:spcAft>
             </a:pPr>
             <a:r>
               <a:rPr sz="1600" b="1" i="0">
                 <a:solidFill>
-                  <a:srgbClr val="2E3A80"/>
-                </a:solidFill>
-                <a:latin typeface="Montserrat"/>
-              </a:rPr>
-              <a:t>•  </a:t>
+                  <a:srgbClr val="E8801A"/>
+                </a:solidFill>
+                <a:latin typeface="Montserrat"/>
+              </a:rPr>
+              <a:t>▸  </a:t>
             </a:r>
             <a:r>
               <a:rPr sz="1600" b="0" i="0">
@@ -7680,14 +8099,14 @@
                 </a:solidFill>
                 <a:latin typeface="Montserrat"/>
               </a:rPr>
-              <a:t>Más de 10 m³/h: también llave a la salida</a:t>
-            </a:r>
-          </a:p>
-        </p:txBody>
-      </p:sp>
-      <p:sp>
-        <p:nvSpPr>
-          <p:cNvPr id="8" name="imgph" descr="IMGQ:small gas meter with shutoff valve"/>
+              <a:t>Compatible con el sistema del distribuidor</a:t>
+            </a:r>
+          </a:p>
+        </p:txBody>
+      </p:sp>
+      <p:sp>
+        <p:nvSpPr>
+          <p:cNvPr id="9" name="imgph" descr="IMGQ:remote telemetry unit for gas metering"/>
           <p:cNvSpPr/>
           <p:nvPr/>
         </p:nvSpPr>
@@ -7733,7 +8152,7 @@
       </p:sp>
       <p:sp>
         <p:nvSpPr>
-          <p:cNvPr id="9" name="TextBox 8"/>
+          <p:cNvPr id="10" name="TextBox 9"/>
           <p:cNvSpPr txBox="1"/>
           <p:nvPr/>
         </p:nvSpPr>
@@ -7773,7 +8192,7 @@
                 </a:solidFill>
                 <a:latin typeface="Montserrat"/>
               </a:rPr>
-              <a:t>small gas meter with shutoff valve</a:t>
+              <a:t>remote telemetry unit for gas metering</a:t>
             </a:r>
           </a:p>
         </p:txBody>
@@ -7870,7 +8289,7 @@
                 </a:solidFill>
                 <a:latin typeface="Montserrat"/>
               </a:rPr>
-              <a:t>017 / 019</a:t>
+              <a:t>017 / 020</a:t>
             </a:r>
           </a:p>
         </p:txBody>
@@ -7918,7 +8337,7 @@
         <p:spPr>
           <a:xfrm>
             <a:off x="822960" y="457200"/>
-            <a:ext cx="8229600" cy="365760"/>
+            <a:ext cx="10058400" cy="365760"/>
           </a:xfrm>
           <a:prstGeom prst="rect">
             <a:avLst/>
@@ -7932,13 +8351,13 @@
           <a:lstStyle/>
           <a:p>
             <a:r>
-              <a:rPr sz="1200" b="1" i="0">
-                <a:solidFill>
-                  <a:srgbClr val="64748B"/>
-                </a:solidFill>
-                <a:latin typeface="Montserrat"/>
-              </a:rPr>
-              <a:t>ANEXO B · MÁS DE 70 KW</a:t>
+              <a:rPr sz="1300" b="1" i="0">
+                <a:solidFill>
+                  <a:srgbClr val="E8801A"/>
+                </a:solidFill>
+                <a:latin typeface="Montserrat"/>
+              </a:rPr>
+              <a:t>ANEXO A · HASTA 70 KW</a:t>
             </a:r>
           </a:p>
         </p:txBody>
@@ -7966,26 +8385,70 @@
           <a:lstStyle/>
           <a:p>
             <a:r>
-              <a:rPr sz="2700" b="1" i="0">
+              <a:rPr sz="2800" b="1" i="0">
                 <a:solidFill>
                   <a:srgbClr val="1E2761"/>
                 </a:solidFill>
                 <a:latin typeface="Montserrat"/>
               </a:rPr>
-              <a:t>Aquí manda la tabla</a:t>
-            </a:r>
-          </a:p>
-        </p:txBody>
-      </p:sp>
-      <p:sp>
-        <p:nvSpPr>
-          <p:cNvPr id="7" name="TextBox 6"/>
+              <a:t>Esquema sencillo para lo pequeño</a:t>
+            </a:r>
+          </a:p>
+        </p:txBody>
+      </p:sp>
+      <p:sp>
+        <p:nvSpPr>
+          <p:cNvPr id="7" name="Rounded Rectangle 6"/>
+          <p:cNvSpPr/>
+          <p:nvPr/>
+        </p:nvSpPr>
+        <p:spPr>
+          <a:xfrm>
+            <a:off x="868680" y="1627632"/>
+            <a:ext cx="2011680" cy="73152"/>
+          </a:xfrm>
+          <a:prstGeom prst="roundRect">
+            <a:avLst/>
+          </a:prstGeom>
+          <a:solidFill>
+            <a:srgbClr val="E8801A"/>
+          </a:solidFill>
+          <a:ln>
+            <a:noFill/>
+          </a:ln>
+          <a:effectLst/>
+        </p:spPr>
+        <p:style>
+          <a:lnRef idx="1">
+            <a:schemeClr val="accent1"/>
+          </a:lnRef>
+          <a:fillRef idx="3">
+            <a:schemeClr val="accent1"/>
+          </a:fillRef>
+          <a:effectRef idx="2">
+            <a:schemeClr val="accent1"/>
+          </a:effectRef>
+          <a:fontRef idx="minor">
+            <a:schemeClr val="lt1"/>
+          </a:fontRef>
+        </p:style>
+        <p:txBody>
+          <a:bodyPr rtlCol="0" anchor="ctr"/>
+          <a:lstStyle/>
+          <a:p>
+            <a:pPr algn="ctr"/>
+          </a:p>
+        </p:txBody>
+      </p:sp>
+      <p:sp>
+        <p:nvSpPr>
+          <p:cNvPr id="8" name="TextBox 7"/>
           <p:cNvSpPr txBox="1"/>
           <p:nvPr/>
         </p:nvSpPr>
         <p:spPr>
           <a:xfrm>
-            <a:off x="822960" y="1920240"/>
+            <a:off x="822960" y="1965960"/>
             <a:ext cx="4983480" cy="4206240"/>
           </a:xfrm>
           <a:prstGeom prst="rect">
@@ -8001,17 +8464,17 @@
           <a:p>
             <a:pPr>
               <a:spcAft>
-                <a:spcPts val="1000"/>
+                <a:spcPts val="1100"/>
               </a:spcAft>
             </a:pPr>
             <a:r>
               <a:rPr sz="1600" b="1" i="0">
                 <a:solidFill>
-                  <a:srgbClr val="2E3A80"/>
-                </a:solidFill>
-                <a:latin typeface="Montserrat"/>
-              </a:rPr>
-              <a:t>•  </a:t>
+                  <a:srgbClr val="E8801A"/>
+                </a:solidFill>
+                <a:latin typeface="Montserrat"/>
+              </a:rPr>
+              <a:t>▸  </a:t>
             </a:r>
             <a:r>
               <a:rPr sz="1600" b="0" i="0">
@@ -8020,23 +8483,23 @@
                 </a:solidFill>
                 <a:latin typeface="Montserrat"/>
               </a:rPr>
-              <a:t>Figura según caudal y consumo anual</a:t>
+              <a:t>Llave más contador más toma de presión</a:t>
             </a:r>
           </a:p>
           <a:p>
             <a:pPr>
               <a:spcAft>
-                <a:spcPts val="1000"/>
+                <a:spcPts val="1100"/>
               </a:spcAft>
             </a:pPr>
             <a:r>
               <a:rPr sz="1600" b="1" i="0">
                 <a:solidFill>
-                  <a:srgbClr val="2E3A80"/>
-                </a:solidFill>
-                <a:latin typeface="Montserrat"/>
-              </a:rPr>
-              <a:t>•  </a:t>
+                  <a:srgbClr val="E8801A"/>
+                </a:solidFill>
+                <a:latin typeface="Montserrat"/>
+              </a:rPr>
+              <a:t>▸  </a:t>
             </a:r>
             <a:r>
               <a:rPr sz="1600" b="0" i="0">
@@ -8045,23 +8508,23 @@
                 </a:solidFill>
                 <a:latin typeface="Montserrat"/>
               </a:rPr>
-              <a:t>B.1 toma de presión; B.2 disco en ocho</a:t>
+              <a:t>GN: toma de débil calibre; GLP: Peterson</a:t>
             </a:r>
           </a:p>
           <a:p>
             <a:pPr>
               <a:spcAft>
-                <a:spcPts val="1000"/>
+                <a:spcPts val="1100"/>
               </a:spcAft>
             </a:pPr>
             <a:r>
               <a:rPr sz="1600" b="1" i="0">
                 <a:solidFill>
-                  <a:srgbClr val="2E3A80"/>
-                </a:solidFill>
-                <a:latin typeface="Montserrat"/>
-              </a:rPr>
-              <a:t>•  </a:t>
+                  <a:srgbClr val="E8801A"/>
+                </a:solidFill>
+                <a:latin typeface="Montserrat"/>
+              </a:rPr>
+              <a:t>▸  </a:t>
             </a:r>
             <a:r>
               <a:rPr sz="1600" b="0" i="0">
@@ -8070,14 +8533,14 @@
                 </a:solidFill>
                 <a:latin typeface="Montserrat"/>
               </a:rPr>
-              <a:t>Bajo 0,1 bar no se ponen conversores</a:t>
-            </a:r>
-          </a:p>
-        </p:txBody>
-      </p:sp>
-      <p:sp>
-        <p:nvSpPr>
-          <p:cNvPr id="8" name="imgph" descr="IMGQ:industrial gas metering skid pipework"/>
+              <a:t>Más de 10 m³/h: también llave a la salida</a:t>
+            </a:r>
+          </a:p>
+        </p:txBody>
+      </p:sp>
+      <p:sp>
+        <p:nvSpPr>
+          <p:cNvPr id="9" name="imgph" descr="IMGQ:small gas meter with shutoff valve"/>
           <p:cNvSpPr/>
           <p:nvPr/>
         </p:nvSpPr>
@@ -8123,7 +8586,7 @@
       </p:sp>
       <p:sp>
         <p:nvSpPr>
-          <p:cNvPr id="9" name="TextBox 8"/>
+          <p:cNvPr id="10" name="TextBox 9"/>
           <p:cNvSpPr txBox="1"/>
           <p:nvPr/>
         </p:nvSpPr>
@@ -8163,7 +8626,7 @@
                 </a:solidFill>
                 <a:latin typeface="Montserrat"/>
               </a:rPr>
-              <a:t>industrial gas metering skid pipework</a:t>
+              <a:t>small gas meter with shutoff valve</a:t>
             </a:r>
           </a:p>
         </p:txBody>
@@ -8260,7 +8723,7 @@
                 </a:solidFill>
                 <a:latin typeface="Montserrat"/>
               </a:rPr>
-              <a:t>018 / 019</a:t>
+              <a:t>018 / 020</a:t>
             </a:r>
           </a:p>
         </p:txBody>
@@ -8308,7 +8771,7 @@
         <p:spPr>
           <a:xfrm>
             <a:off x="822960" y="457200"/>
-            <a:ext cx="8229600" cy="365760"/>
+            <a:ext cx="10058400" cy="365760"/>
           </a:xfrm>
           <a:prstGeom prst="rect">
             <a:avLst/>
@@ -8322,13 +8785,13 @@
           <a:lstStyle/>
           <a:p>
             <a:r>
-              <a:rPr sz="1200" b="1" i="0">
-                <a:solidFill>
-                  <a:srgbClr val="64748B"/>
-                </a:solidFill>
-                <a:latin typeface="Montserrat"/>
-              </a:rPr>
-              <a:t>PUESTA EN SERVICIO Y PAPELEO</a:t>
+              <a:rPr sz="1300" b="1" i="0">
+                <a:solidFill>
+                  <a:srgbClr val="E8801A"/>
+                </a:solidFill>
+                <a:latin typeface="Montserrat"/>
+              </a:rPr>
+              <a:t>ANEXO B · MÁS DE 70 KW</a:t>
             </a:r>
           </a:p>
         </p:txBody>
@@ -8356,26 +8819,70 @@
           <a:lstStyle/>
           <a:p>
             <a:r>
-              <a:rPr sz="2700" b="1" i="0">
+              <a:rPr sz="2800" b="1" i="0">
                 <a:solidFill>
                   <a:srgbClr val="1E2761"/>
                 </a:solidFill>
                 <a:latin typeface="Montserrat"/>
               </a:rPr>
-              <a:t>Proyecto, precinto y control legal</a:t>
-            </a:r>
-          </a:p>
-        </p:txBody>
-      </p:sp>
-      <p:sp>
-        <p:nvSpPr>
-          <p:cNvPr id="7" name="TextBox 6"/>
+              <a:t>Aquí manda la tabla</a:t>
+            </a:r>
+          </a:p>
+        </p:txBody>
+      </p:sp>
+      <p:sp>
+        <p:nvSpPr>
+          <p:cNvPr id="7" name="Rounded Rectangle 6"/>
+          <p:cNvSpPr/>
+          <p:nvPr/>
+        </p:nvSpPr>
+        <p:spPr>
+          <a:xfrm>
+            <a:off x="868680" y="1627632"/>
+            <a:ext cx="2011680" cy="73152"/>
+          </a:xfrm>
+          <a:prstGeom prst="roundRect">
+            <a:avLst/>
+          </a:prstGeom>
+          <a:solidFill>
+            <a:srgbClr val="E8801A"/>
+          </a:solidFill>
+          <a:ln>
+            <a:noFill/>
+          </a:ln>
+          <a:effectLst/>
+        </p:spPr>
+        <p:style>
+          <a:lnRef idx="1">
+            <a:schemeClr val="accent1"/>
+          </a:lnRef>
+          <a:fillRef idx="3">
+            <a:schemeClr val="accent1"/>
+          </a:fillRef>
+          <a:effectRef idx="2">
+            <a:schemeClr val="accent1"/>
+          </a:effectRef>
+          <a:fontRef idx="minor">
+            <a:schemeClr val="lt1"/>
+          </a:fontRef>
+        </p:style>
+        <p:txBody>
+          <a:bodyPr rtlCol="0" anchor="ctr"/>
+          <a:lstStyle/>
+          <a:p>
+            <a:pPr algn="ctr"/>
+          </a:p>
+        </p:txBody>
+      </p:sp>
+      <p:sp>
+        <p:nvSpPr>
+          <p:cNvPr id="8" name="TextBox 7"/>
           <p:cNvSpPr txBox="1"/>
           <p:nvPr/>
         </p:nvSpPr>
         <p:spPr>
           <a:xfrm>
-            <a:off x="822960" y="1920240"/>
+            <a:off x="822960" y="1965960"/>
             <a:ext cx="4983480" cy="4206240"/>
           </a:xfrm>
           <a:prstGeom prst="rect">
@@ -8391,17 +8898,17 @@
           <a:p>
             <a:pPr>
               <a:spcAft>
-                <a:spcPts val="1000"/>
+                <a:spcPts val="1100"/>
               </a:spcAft>
             </a:pPr>
             <a:r>
               <a:rPr sz="1600" b="1" i="0">
                 <a:solidFill>
-                  <a:srgbClr val="2E3A80"/>
-                </a:solidFill>
-                <a:latin typeface="Montserrat"/>
-              </a:rPr>
-              <a:t>•  </a:t>
+                  <a:srgbClr val="E8801A"/>
+                </a:solidFill>
+                <a:latin typeface="Montserrat"/>
+              </a:rPr>
+              <a:t>▸  </a:t>
             </a:r>
             <a:r>
               <a:rPr sz="1600" b="0" i="0">
@@ -8410,23 +8917,23 @@
                 </a:solidFill>
                 <a:latin typeface="Montserrat"/>
               </a:rPr>
-              <a:t>Más de 70 kW: proyecto y dirección de obra</a:t>
+              <a:t>Figura según caudal y consumo anual</a:t>
             </a:r>
           </a:p>
           <a:p>
             <a:pPr>
               <a:spcAft>
-                <a:spcPts val="1000"/>
+                <a:spcPts val="1100"/>
               </a:spcAft>
             </a:pPr>
             <a:r>
               <a:rPr sz="1600" b="1" i="0">
                 <a:solidFill>
-                  <a:srgbClr val="2E3A80"/>
-                </a:solidFill>
-                <a:latin typeface="Montserrat"/>
-              </a:rPr>
-              <a:t>•  </a:t>
+                  <a:srgbClr val="E8801A"/>
+                </a:solidFill>
+                <a:latin typeface="Montserrat"/>
+              </a:rPr>
+              <a:t>▸  </a:t>
             </a:r>
             <a:r>
               <a:rPr sz="1600" b="0" i="0">
@@ -8435,23 +8942,23 @@
                 </a:solidFill>
                 <a:latin typeface="Montserrat"/>
               </a:rPr>
-              <a:t>El equipo de medida es del distribuidor</a:t>
+              <a:t>B.1 toma de presión; B.2 disco en ocho</a:t>
             </a:r>
           </a:p>
           <a:p>
             <a:pPr>
               <a:spcAft>
-                <a:spcPts val="1000"/>
+                <a:spcPts val="1100"/>
               </a:spcAft>
             </a:pPr>
             <a:r>
               <a:rPr sz="1600" b="1" i="0">
                 <a:solidFill>
-                  <a:srgbClr val="2E3A80"/>
-                </a:solidFill>
-                <a:latin typeface="Montserrat"/>
-              </a:rPr>
-              <a:t>•  </a:t>
+                  <a:srgbClr val="E8801A"/>
+                </a:solidFill>
+                <a:latin typeface="Montserrat"/>
+              </a:rPr>
+              <a:t>▸  </a:t>
             </a:r>
             <a:r>
               <a:rPr sz="1600" b="0" i="0">
@@ -8460,14 +8967,14 @@
                 </a:solidFill>
                 <a:latin typeface="Montserrat"/>
               </a:rPr>
-              <a:t>Precinto y control metrológico legal</a:t>
-            </a:r>
-          </a:p>
-        </p:txBody>
-      </p:sp>
-      <p:sp>
-        <p:nvSpPr>
-          <p:cNvPr id="8" name="imgph" descr="IMGQ:engineer inspecting industrial gas station"/>
+              <a:t>Bajo 0,1 bar no se ponen conversores</a:t>
+            </a:r>
+          </a:p>
+        </p:txBody>
+      </p:sp>
+      <p:sp>
+        <p:nvSpPr>
+          <p:cNvPr id="9" name="imgph" descr="IMGQ:industrial gas metering skid pipework"/>
           <p:cNvSpPr/>
           <p:nvPr/>
         </p:nvSpPr>
@@ -8513,7 +9020,7 @@
       </p:sp>
       <p:sp>
         <p:nvSpPr>
-          <p:cNvPr id="9" name="TextBox 8"/>
+          <p:cNvPr id="10" name="TextBox 9"/>
           <p:cNvSpPr txBox="1"/>
           <p:nvPr/>
         </p:nvSpPr>
@@ -8553,7 +9060,7 @@
                 </a:solidFill>
                 <a:latin typeface="Montserrat"/>
               </a:rPr>
-              <a:t>engineer inspecting industrial gas station</a:t>
+              <a:t>industrial gas metering skid pipework</a:t>
             </a:r>
           </a:p>
         </p:txBody>
@@ -8591,7 +9098,7 @@
             <a:avLst/>
           </a:prstGeom>
           <a:solidFill>
-            <a:srgbClr val="1E2761"/>
+            <a:srgbClr val="FFFFFF"/>
           </a:solidFill>
           <a:ln>
             <a:noFill/>
@@ -8628,8 +9135,8 @@
         </p:nvSpPr>
         <p:spPr>
           <a:xfrm>
-            <a:off x="822960" y="640080"/>
-            <a:ext cx="10515600" cy="457200"/>
+            <a:off x="10607040" y="320040"/>
+            <a:ext cx="1371600" cy="365760"/>
           </a:xfrm>
           <a:prstGeom prst="rect">
             <a:avLst/>
@@ -8642,14 +9149,15 @@
           </a:bodyPr>
           <a:lstStyle/>
           <a:p>
-            <a:r>
-              <a:rPr sz="1400" b="1" i="0">
-                <a:solidFill>
-                  <a:srgbClr val="CADCFC"/>
-                </a:solidFill>
-                <a:latin typeface="Montserrat"/>
-              </a:rPr>
-              <a:t>LO QUE YA DOMINAS</a:t>
+            <a:pPr algn="r"/>
+            <a:r>
+              <a:rPr sz="1000" b="1" i="0">
+                <a:solidFill>
+                  <a:srgbClr val="64748B"/>
+                </a:solidFill>
+                <a:latin typeface="Montserrat"/>
+              </a:rPr>
+              <a:t>019 / 020</a:t>
             </a:r>
           </a:p>
         </p:txBody>
@@ -8662,8 +9170,8 @@
         </p:nvSpPr>
         <p:spPr>
           <a:xfrm>
-            <a:off x="822960" y="1143000"/>
-            <a:ext cx="10515600" cy="1097280"/>
+            <a:off x="457200" y="6419088"/>
+            <a:ext cx="8229600" cy="365760"/>
           </a:xfrm>
           <a:prstGeom prst="rect">
             <a:avLst/>
@@ -8677,13 +9185,13 @@
           <a:lstStyle/>
           <a:p>
             <a:r>
-              <a:rPr sz="3400" b="1" i="0">
-                <a:solidFill>
-                  <a:srgbClr val="FFFFFF"/>
-                </a:solidFill>
-                <a:latin typeface="Montserrat"/>
-              </a:rPr>
-              <a:t>Ya lees un tren de medida completo</a:t>
+              <a:rPr sz="900" b="0" i="0">
+                <a:solidFill>
+                  <a:srgbClr val="64748B"/>
+                </a:solidFill>
+                <a:latin typeface="Montserrat"/>
+              </a:rPr>
+              <a:t>Curso Gas B · Tema 12 · UNE 60670-5</a:t>
             </a:r>
           </a:p>
         </p:txBody>
@@ -8696,8 +9204,8 @@
         </p:nvSpPr>
         <p:spPr>
           <a:xfrm>
-            <a:off x="822960" y="2514600"/>
-            <a:ext cx="10515600" cy="2834640"/>
+            <a:off x="822960" y="457200"/>
+            <a:ext cx="10058400" cy="365760"/>
           </a:xfrm>
           <a:prstGeom prst="rect">
             <a:avLst/>
@@ -8710,123 +9218,68 @@
           </a:bodyPr>
           <a:lstStyle/>
           <a:p>
-            <a:pPr>
-              <a:spcAft>
-                <a:spcPts val="1200"/>
-              </a:spcAft>
-            </a:pPr>
-            <a:r>
-              <a:rPr sz="2000" b="1" i="0">
-                <a:solidFill>
-                  <a:srgbClr val="CADCFC"/>
-                </a:solidFill>
-                <a:latin typeface="Montserrat"/>
-              </a:rPr>
-              <a:t>✓  </a:t>
-            </a:r>
-            <a:r>
-              <a:rPr sz="1900" b="0" i="0">
-                <a:solidFill>
-                  <a:srgbClr val="FFFFFF"/>
-                </a:solidFill>
-                <a:latin typeface="Montserrat"/>
-              </a:rPr>
-              <a:t>70 kW parte el mundo: anexo A o anexo B</a:t>
-            </a:r>
-          </a:p>
-          <a:p>
-            <a:pPr>
-              <a:spcAft>
-                <a:spcPts val="1200"/>
-              </a:spcAft>
-            </a:pPr>
-            <a:r>
-              <a:rPr sz="2000" b="1" i="0">
-                <a:solidFill>
-                  <a:srgbClr val="CADCFC"/>
-                </a:solidFill>
-                <a:latin typeface="Montserrat"/>
-              </a:rPr>
-              <a:t>✓  </a:t>
-            </a:r>
-            <a:r>
-              <a:rPr sz="1900" b="0" i="0">
-                <a:solidFill>
-                  <a:srgbClr val="FFFFFF"/>
-                </a:solidFill>
-                <a:latin typeface="Montserrat"/>
-              </a:rPr>
-              <a:t>Conversor clase C, ± 0,5 %, memoria de 35 días</a:t>
-            </a:r>
-          </a:p>
-          <a:p>
-            <a:pPr>
-              <a:spcAft>
-                <a:spcPts val="1200"/>
-              </a:spcAft>
-            </a:pPr>
-            <a:r>
-              <a:rPr sz="2000" b="1" i="0">
-                <a:solidFill>
-                  <a:srgbClr val="CADCFC"/>
-                </a:solidFill>
-                <a:latin typeface="Montserrat"/>
-              </a:rPr>
-              <a:t>✓  </a:t>
-            </a:r>
-            <a:r>
-              <a:rPr sz="1900" b="0" i="0">
-                <a:solidFill>
-                  <a:srgbClr val="FFFFFF"/>
-                </a:solidFill>
-                <a:latin typeface="Montserrat"/>
-              </a:rPr>
-              <a:t>Manómetro 35-75 %, frontera cápsula/Bourdon 0,6 bar</a:t>
-            </a:r>
-          </a:p>
-          <a:p>
-            <a:pPr>
-              <a:spcAft>
-                <a:spcPts val="1200"/>
-              </a:spcAft>
-            </a:pPr>
-            <a:r>
-              <a:rPr sz="2000" b="1" i="0">
-                <a:solidFill>
-                  <a:srgbClr val="CADCFC"/>
-                </a:solidFill>
-                <a:latin typeface="Montserrat"/>
-              </a:rPr>
-              <a:t>✓  </a:t>
-            </a:r>
-            <a:r>
-              <a:rPr sz="1900" b="0" i="0">
-                <a:solidFill>
-                  <a:srgbClr val="FFFFFF"/>
-                </a:solidFill>
-                <a:latin typeface="Montserrat"/>
-              </a:rPr>
-              <a:t>Anexo A sencillo; anexo B por tabla</a:t>
-            </a:r>
-          </a:p>
-        </p:txBody>
-      </p:sp>
-      <p:sp>
-        <p:nvSpPr>
-          <p:cNvPr id="6" name="Rounded Rectangle 5"/>
+            <a:r>
+              <a:rPr sz="1300" b="1" i="0">
+                <a:solidFill>
+                  <a:srgbClr val="E8801A"/>
+                </a:solidFill>
+                <a:latin typeface="Montserrat"/>
+              </a:rPr>
+              <a:t>PUESTA EN SERVICIO Y PAPELEO</a:t>
+            </a:r>
+          </a:p>
+        </p:txBody>
+      </p:sp>
+      <p:sp>
+        <p:nvSpPr>
+          <p:cNvPr id="6" name="TextBox 5"/>
+          <p:cNvSpPr txBox="1"/>
+          <p:nvPr/>
+        </p:nvSpPr>
+        <p:spPr>
+          <a:xfrm>
+            <a:off x="822960" y="868680"/>
+            <a:ext cx="10515600" cy="914400"/>
+          </a:xfrm>
+          <a:prstGeom prst="rect">
+            <a:avLst/>
+          </a:prstGeom>
+          <a:noFill/>
+        </p:spPr>
+        <p:txBody>
+          <a:bodyPr wrap="square">
+            <a:spAutoFit/>
+          </a:bodyPr>
+          <a:lstStyle/>
+          <a:p>
+            <a:r>
+              <a:rPr sz="2800" b="1" i="0">
+                <a:solidFill>
+                  <a:srgbClr val="1E2761"/>
+                </a:solidFill>
+                <a:latin typeface="Montserrat"/>
+              </a:rPr>
+              <a:t>Proyecto, precinto y control legal</a:t>
+            </a:r>
+          </a:p>
+        </p:txBody>
+      </p:sp>
+      <p:sp>
+        <p:nvSpPr>
+          <p:cNvPr id="7" name="Rounded Rectangle 6"/>
           <p:cNvSpPr/>
           <p:nvPr/>
         </p:nvSpPr>
         <p:spPr>
           <a:xfrm>
-            <a:off x="822960" y="5532120"/>
-            <a:ext cx="10515600" cy="777240"/>
+            <a:off x="868680" y="1627632"/>
+            <a:ext cx="2011680" cy="73152"/>
           </a:xfrm>
           <a:prstGeom prst="roundRect">
             <a:avLst/>
           </a:prstGeom>
           <a:solidFill>
-            <a:srgbClr val="2E3A80"/>
+            <a:srgbClr val="E8801A"/>
           </a:solidFill>
           <a:ln>
             <a:noFill/>
@@ -8857,14 +9310,14 @@
       </p:sp>
       <p:sp>
         <p:nvSpPr>
-          <p:cNvPr id="7" name="TextBox 6"/>
+          <p:cNvPr id="8" name="TextBox 7"/>
           <p:cNvSpPr txBox="1"/>
           <p:nvPr/>
         </p:nvSpPr>
         <p:spPr>
           <a:xfrm>
-            <a:off x="1051560" y="5605272"/>
-            <a:ext cx="10058400" cy="640080"/>
+            <a:off x="822960" y="1965960"/>
+            <a:ext cx="4983480" cy="4206240"/>
           </a:xfrm>
           <a:prstGeom prst="rect">
             <a:avLst/>
@@ -8877,14 +9330,171 @@
           </a:bodyPr>
           <a:lstStyle/>
           <a:p>
-            <a:r>
-              <a:rPr sz="1500" b="1" i="1">
-                <a:solidFill>
-                  <a:srgbClr val="CADCFC"/>
-                </a:solidFill>
-                <a:latin typeface="Montserrat"/>
-              </a:rPr>
-              <a:t>Has cerrado el tema 12: del hueco del contador al tren de medida completo.</a:t>
+            <a:pPr>
+              <a:spcAft>
+                <a:spcPts val="1100"/>
+              </a:spcAft>
+            </a:pPr>
+            <a:r>
+              <a:rPr sz="1600" b="1" i="0">
+                <a:solidFill>
+                  <a:srgbClr val="E8801A"/>
+                </a:solidFill>
+                <a:latin typeface="Montserrat"/>
+              </a:rPr>
+              <a:t>▸  </a:t>
+            </a:r>
+            <a:r>
+              <a:rPr sz="1600" b="0" i="0">
+                <a:solidFill>
+                  <a:srgbClr val="1B2330"/>
+                </a:solidFill>
+                <a:latin typeface="Montserrat"/>
+              </a:rPr>
+              <a:t>Más de 70 kW: proyecto y dirección de obra</a:t>
+            </a:r>
+          </a:p>
+          <a:p>
+            <a:pPr>
+              <a:spcAft>
+                <a:spcPts val="1100"/>
+              </a:spcAft>
+            </a:pPr>
+            <a:r>
+              <a:rPr sz="1600" b="1" i="0">
+                <a:solidFill>
+                  <a:srgbClr val="E8801A"/>
+                </a:solidFill>
+                <a:latin typeface="Montserrat"/>
+              </a:rPr>
+              <a:t>▸  </a:t>
+            </a:r>
+            <a:r>
+              <a:rPr sz="1600" b="0" i="0">
+                <a:solidFill>
+                  <a:srgbClr val="1B2330"/>
+                </a:solidFill>
+                <a:latin typeface="Montserrat"/>
+              </a:rPr>
+              <a:t>El equipo de medida es del distribuidor</a:t>
+            </a:r>
+          </a:p>
+          <a:p>
+            <a:pPr>
+              <a:spcAft>
+                <a:spcPts val="1100"/>
+              </a:spcAft>
+            </a:pPr>
+            <a:r>
+              <a:rPr sz="1600" b="1" i="0">
+                <a:solidFill>
+                  <a:srgbClr val="E8801A"/>
+                </a:solidFill>
+                <a:latin typeface="Montserrat"/>
+              </a:rPr>
+              <a:t>▸  </a:t>
+            </a:r>
+            <a:r>
+              <a:rPr sz="1600" b="0" i="0">
+                <a:solidFill>
+                  <a:srgbClr val="1B2330"/>
+                </a:solidFill>
+                <a:latin typeface="Montserrat"/>
+              </a:rPr>
+              <a:t>Precinto y control metrológico legal</a:t>
+            </a:r>
+          </a:p>
+        </p:txBody>
+      </p:sp>
+      <p:sp>
+        <p:nvSpPr>
+          <p:cNvPr id="9" name="imgph" descr="IMGQ:engineer inspecting industrial gas station"/>
+          <p:cNvSpPr/>
+          <p:nvPr/>
+        </p:nvSpPr>
+        <p:spPr>
+          <a:xfrm>
+            <a:off x="5806440" y="1051560"/>
+            <a:ext cx="5298947" cy="4629150"/>
+          </a:xfrm>
+          <a:prstGeom prst="roundRect">
+            <a:avLst/>
+          </a:prstGeom>
+          <a:solidFill>
+            <a:srgbClr val="F3F6FB"/>
+          </a:solidFill>
+          <a:ln w="12700">
+            <a:solidFill>
+              <a:srgbClr val="C7D2E6"/>
+            </a:solidFill>
+          </a:ln>
+          <a:effectLst/>
+        </p:spPr>
+        <p:style>
+          <a:lnRef idx="1">
+            <a:schemeClr val="accent1"/>
+          </a:lnRef>
+          <a:fillRef idx="3">
+            <a:schemeClr val="accent1"/>
+          </a:fillRef>
+          <a:effectRef idx="2">
+            <a:schemeClr val="accent1"/>
+          </a:effectRef>
+          <a:fontRef idx="minor">
+            <a:schemeClr val="lt1"/>
+          </a:fontRef>
+        </p:style>
+        <p:txBody>
+          <a:bodyPr rtlCol="0" anchor="ctr"/>
+          <a:lstStyle/>
+          <a:p>
+            <a:pPr algn="ctr"/>
+          </a:p>
+        </p:txBody>
+      </p:sp>
+      <p:sp>
+        <p:nvSpPr>
+          <p:cNvPr id="10" name="TextBox 9"/>
+          <p:cNvSpPr txBox="1"/>
+          <p:nvPr/>
+        </p:nvSpPr>
+        <p:spPr>
+          <a:xfrm>
+            <a:off x="6080760" y="2726055"/>
+            <a:ext cx="4750307" cy="1280160"/>
+          </a:xfrm>
+          <a:prstGeom prst="rect">
+            <a:avLst/>
+          </a:prstGeom>
+          <a:noFill/>
+        </p:spPr>
+        <p:txBody>
+          <a:bodyPr wrap="square">
+            <a:spAutoFit/>
+          </a:bodyPr>
+          <a:lstStyle/>
+          <a:p>
+            <a:pPr algn="ctr"/>
+            <a:r>
+              <a:rPr sz="1400" b="1" i="0">
+                <a:solidFill>
+                  <a:srgbClr val="64748B"/>
+                </a:solidFill>
+                <a:latin typeface="Montserrat"/>
+              </a:rPr>
+              <a:t>IMAGEN REALISTA</a:t>
+            </a:r>
+          </a:p>
+          <a:p>
+            <a:pPr algn="ctr"/>
+            <a:r>
+              <a:rPr sz="1100" b="0" i="1">
+                <a:solidFill>
+                  <a:srgbClr val="64748B"/>
+                </a:solidFill>
+                <a:latin typeface="Montserrat"/>
+              </a:rPr>
+              <a:t>engineer inspecting industrial gas station</a:t>
             </a:r>
           </a:p>
         </p:txBody>
@@ -8981,7 +9591,7 @@
                 </a:solidFill>
                 <a:latin typeface="Montserrat"/>
               </a:rPr>
-              <a:t>002 / 019</a:t>
+              <a:t>002 / 020</a:t>
             </a:r>
           </a:p>
         </p:txBody>
@@ -9045,7 +9655,7 @@
             <a:r>
               <a:rPr sz="2700" b="1" i="0">
                 <a:solidFill>
-                  <a:srgbClr val="1E2761"/>
+                  <a:srgbClr val="E8801A"/>
                 </a:solidFill>
                 <a:latin typeface="Montserrat"/>
               </a:rPr>
@@ -9057,6 +9667,50 @@
       <p:sp>
         <p:nvSpPr>
           <p:cNvPr id="6" name="Rounded Rectangle 5"/>
+          <p:cNvSpPr/>
+          <p:nvPr/>
+        </p:nvSpPr>
+        <p:spPr>
+          <a:xfrm>
+            <a:off x="868680" y="1234440"/>
+            <a:ext cx="1463040" cy="73152"/>
+          </a:xfrm>
+          <a:prstGeom prst="roundRect">
+            <a:avLst/>
+          </a:prstGeom>
+          <a:solidFill>
+            <a:srgbClr val="1E2761"/>
+          </a:solidFill>
+          <a:ln>
+            <a:noFill/>
+          </a:ln>
+          <a:effectLst/>
+        </p:spPr>
+        <p:style>
+          <a:lnRef idx="1">
+            <a:schemeClr val="accent1"/>
+          </a:lnRef>
+          <a:fillRef idx="3">
+            <a:schemeClr val="accent1"/>
+          </a:fillRef>
+          <a:effectRef idx="2">
+            <a:schemeClr val="accent1"/>
+          </a:effectRef>
+          <a:fontRef idx="minor">
+            <a:schemeClr val="lt1"/>
+          </a:fontRef>
+        </p:style>
+        <p:txBody>
+          <a:bodyPr rtlCol="0" anchor="ctr"/>
+          <a:lstStyle/>
+          <a:p>
+            <a:pPr algn="ctr"/>
+          </a:p>
+        </p:txBody>
+      </p:sp>
+      <p:sp>
+        <p:nvSpPr>
+          <p:cNvPr id="7" name="Rounded Rectangle 6"/>
           <p:cNvSpPr/>
           <p:nvPr/>
         </p:nvSpPr>
@@ -9102,7 +9756,7 @@
       </p:sp>
       <p:sp>
         <p:nvSpPr>
-          <p:cNvPr id="7" name="TextBox 6"/>
+          <p:cNvPr id="8" name="TextBox 7"/>
           <p:cNvSpPr txBox="1"/>
           <p:nvPr/>
         </p:nvSpPr>
@@ -9137,7 +9791,7 @@
       </p:sp>
       <p:sp>
         <p:nvSpPr>
-          <p:cNvPr id="8" name="TextBox 7"/>
+          <p:cNvPr id="9" name="TextBox 8"/>
           <p:cNvSpPr txBox="1"/>
           <p:nvPr/>
         </p:nvSpPr>
@@ -9172,7 +9826,7 @@
       </p:sp>
       <p:sp>
         <p:nvSpPr>
-          <p:cNvPr id="9" name="Rounded Rectangle 8"/>
+          <p:cNvPr id="10" name="Rounded Rectangle 9"/>
           <p:cNvSpPr/>
           <p:nvPr/>
         </p:nvSpPr>
@@ -9218,7 +9872,7 @@
       </p:sp>
       <p:sp>
         <p:nvSpPr>
-          <p:cNvPr id="10" name="TextBox 9"/>
+          <p:cNvPr id="11" name="TextBox 10"/>
           <p:cNvSpPr txBox="1"/>
           <p:nvPr/>
         </p:nvSpPr>
@@ -9253,7 +9907,7 @@
       </p:sp>
       <p:sp>
         <p:nvSpPr>
-          <p:cNvPr id="11" name="TextBox 10"/>
+          <p:cNvPr id="12" name="TextBox 11"/>
           <p:cNvSpPr txBox="1"/>
           <p:nvPr/>
         </p:nvSpPr>
@@ -9288,7 +9942,7 @@
       </p:sp>
       <p:sp>
         <p:nvSpPr>
-          <p:cNvPr id="12" name="Rounded Rectangle 11"/>
+          <p:cNvPr id="13" name="Rounded Rectangle 12"/>
           <p:cNvSpPr/>
           <p:nvPr/>
         </p:nvSpPr>
@@ -9334,7 +9988,7 @@
       </p:sp>
       <p:sp>
         <p:nvSpPr>
-          <p:cNvPr id="13" name="TextBox 12"/>
+          <p:cNvPr id="14" name="TextBox 13"/>
           <p:cNvSpPr txBox="1"/>
           <p:nvPr/>
         </p:nvSpPr>
@@ -9369,7 +10023,7 @@
       </p:sp>
       <p:sp>
         <p:nvSpPr>
-          <p:cNvPr id="14" name="TextBox 13"/>
+          <p:cNvPr id="15" name="TextBox 14"/>
           <p:cNvSpPr txBox="1"/>
           <p:nvPr/>
         </p:nvSpPr>
@@ -9398,6 +10052,381 @@
                 <a:latin typeface="Montserrat"/>
               </a:rPr>
               <a:t>de memoria con detalle horario</a:t>
+            </a:r>
+          </a:p>
+        </p:txBody>
+      </p:sp>
+    </p:spTree>
+  </p:cSld>
+  <p:clrMapOvr>
+    <a:masterClrMapping/>
+  </p:clrMapOvr>
+</p:sld>
+</file>
+
+<file path=ppt/slides/slide20.xml><?xml version="1.0" encoding="utf-8"?>
+<p:sld xmlns:a="http://schemas.openxmlformats.org/drawingml/2006/main" xmlns:p="http://schemas.openxmlformats.org/presentationml/2006/main" xmlns:r="http://schemas.openxmlformats.org/officeDocument/2006/relationships">
+  <p:cSld>
+    <p:spTree>
+      <p:nvGrpSpPr>
+        <p:cNvPr id="1" name=""/>
+        <p:cNvGrpSpPr/>
+        <p:nvPr/>
+      </p:nvGrpSpPr>
+      <p:grpSpPr/>
+      <p:sp>
+        <p:nvSpPr>
+          <p:cNvPr id="2" name="Rectangle 1"/>
+          <p:cNvSpPr/>
+          <p:nvPr/>
+        </p:nvSpPr>
+        <p:spPr>
+          <a:xfrm>
+            <a:off x="0" y="0"/>
+            <a:ext cx="12191695" cy="6858000"/>
+          </a:xfrm>
+          <a:prstGeom prst="rect">
+            <a:avLst/>
+          </a:prstGeom>
+          <a:solidFill>
+            <a:srgbClr val="1E2761"/>
+          </a:solidFill>
+          <a:ln>
+            <a:noFill/>
+          </a:ln>
+          <a:effectLst/>
+        </p:spPr>
+        <p:style>
+          <a:lnRef idx="1">
+            <a:schemeClr val="accent1"/>
+          </a:lnRef>
+          <a:fillRef idx="3">
+            <a:schemeClr val="accent1"/>
+          </a:fillRef>
+          <a:effectRef idx="2">
+            <a:schemeClr val="accent1"/>
+          </a:effectRef>
+          <a:fontRef idx="minor">
+            <a:schemeClr val="lt1"/>
+          </a:fontRef>
+        </p:style>
+        <p:txBody>
+          <a:bodyPr rtlCol="0" anchor="ctr"/>
+          <a:lstStyle/>
+          <a:p>
+            <a:pPr algn="ctr"/>
+          </a:p>
+        </p:txBody>
+      </p:sp>
+      <p:sp>
+        <p:nvSpPr>
+          <p:cNvPr id="3" name="TextBox 2"/>
+          <p:cNvSpPr txBox="1"/>
+          <p:nvPr/>
+        </p:nvSpPr>
+        <p:spPr>
+          <a:xfrm>
+            <a:off x="822960" y="640080"/>
+            <a:ext cx="10515600" cy="457200"/>
+          </a:xfrm>
+          <a:prstGeom prst="rect">
+            <a:avLst/>
+          </a:prstGeom>
+          <a:noFill/>
+        </p:spPr>
+        <p:txBody>
+          <a:bodyPr wrap="square">
+            <a:spAutoFit/>
+          </a:bodyPr>
+          <a:lstStyle/>
+          <a:p>
+            <a:r>
+              <a:rPr sz="1400" b="1" i="0">
+                <a:solidFill>
+                  <a:srgbClr val="F4A24C"/>
+                </a:solidFill>
+                <a:latin typeface="Montserrat"/>
+              </a:rPr>
+              <a:t>LO QUE YA DOMINAS</a:t>
+            </a:r>
+          </a:p>
+        </p:txBody>
+      </p:sp>
+      <p:sp>
+        <p:nvSpPr>
+          <p:cNvPr id="4" name="Rounded Rectangle 3"/>
+          <p:cNvSpPr/>
+          <p:nvPr/>
+        </p:nvSpPr>
+        <p:spPr>
+          <a:xfrm>
+            <a:off x="868680" y="1051560"/>
+            <a:ext cx="1463040" cy="82296"/>
+          </a:xfrm>
+          <a:prstGeom prst="roundRect">
+            <a:avLst/>
+          </a:prstGeom>
+          <a:solidFill>
+            <a:srgbClr val="E8801A"/>
+          </a:solidFill>
+          <a:ln>
+            <a:noFill/>
+          </a:ln>
+          <a:effectLst/>
+        </p:spPr>
+        <p:style>
+          <a:lnRef idx="1">
+            <a:schemeClr val="accent1"/>
+          </a:lnRef>
+          <a:fillRef idx="3">
+            <a:schemeClr val="accent1"/>
+          </a:fillRef>
+          <a:effectRef idx="2">
+            <a:schemeClr val="accent1"/>
+          </a:effectRef>
+          <a:fontRef idx="minor">
+            <a:schemeClr val="lt1"/>
+          </a:fontRef>
+        </p:style>
+        <p:txBody>
+          <a:bodyPr rtlCol="0" anchor="ctr"/>
+          <a:lstStyle/>
+          <a:p>
+            <a:pPr algn="ctr"/>
+          </a:p>
+        </p:txBody>
+      </p:sp>
+      <p:sp>
+        <p:nvSpPr>
+          <p:cNvPr id="5" name="TextBox 4"/>
+          <p:cNvSpPr txBox="1"/>
+          <p:nvPr/>
+        </p:nvSpPr>
+        <p:spPr>
+          <a:xfrm>
+            <a:off x="822960" y="1234440"/>
+            <a:ext cx="10515600" cy="1097280"/>
+          </a:xfrm>
+          <a:prstGeom prst="rect">
+            <a:avLst/>
+          </a:prstGeom>
+          <a:noFill/>
+        </p:spPr>
+        <p:txBody>
+          <a:bodyPr wrap="square">
+            <a:spAutoFit/>
+          </a:bodyPr>
+          <a:lstStyle/>
+          <a:p>
+            <a:r>
+              <a:rPr sz="3400" b="1" i="0">
+                <a:solidFill>
+                  <a:srgbClr val="FFFFFF"/>
+                </a:solidFill>
+                <a:latin typeface="Montserrat"/>
+              </a:rPr>
+              <a:t>Ya lees un tren de medida completo</a:t>
+            </a:r>
+          </a:p>
+        </p:txBody>
+      </p:sp>
+      <p:sp>
+        <p:nvSpPr>
+          <p:cNvPr id="6" name="TextBox 5"/>
+          <p:cNvSpPr txBox="1"/>
+          <p:nvPr/>
+        </p:nvSpPr>
+        <p:spPr>
+          <a:xfrm>
+            <a:off x="822960" y="2606040"/>
+            <a:ext cx="10515600" cy="2743200"/>
+          </a:xfrm>
+          <a:prstGeom prst="rect">
+            <a:avLst/>
+          </a:prstGeom>
+          <a:noFill/>
+        </p:spPr>
+        <p:txBody>
+          <a:bodyPr wrap="square">
+            <a:spAutoFit/>
+          </a:bodyPr>
+          <a:lstStyle/>
+          <a:p>
+            <a:pPr>
+              <a:spcAft>
+                <a:spcPts val="1200"/>
+              </a:spcAft>
+            </a:pPr>
+            <a:r>
+              <a:rPr sz="2000" b="1" i="0">
+                <a:solidFill>
+                  <a:srgbClr val="F4A24C"/>
+                </a:solidFill>
+                <a:latin typeface="Montserrat"/>
+              </a:rPr>
+              <a:t>✓  </a:t>
+            </a:r>
+            <a:r>
+              <a:rPr sz="1900" b="0" i="0">
+                <a:solidFill>
+                  <a:srgbClr val="FFFFFF"/>
+                </a:solidFill>
+                <a:latin typeface="Montserrat"/>
+              </a:rPr>
+              <a:t>70 kW parte el mundo: anexo A o anexo B</a:t>
+            </a:r>
+          </a:p>
+          <a:p>
+            <a:pPr>
+              <a:spcAft>
+                <a:spcPts val="1200"/>
+              </a:spcAft>
+            </a:pPr>
+            <a:r>
+              <a:rPr sz="2000" b="1" i="0">
+                <a:solidFill>
+                  <a:srgbClr val="F4A24C"/>
+                </a:solidFill>
+                <a:latin typeface="Montserrat"/>
+              </a:rPr>
+              <a:t>✓  </a:t>
+            </a:r>
+            <a:r>
+              <a:rPr sz="1900" b="0" i="0">
+                <a:solidFill>
+                  <a:srgbClr val="FFFFFF"/>
+                </a:solidFill>
+                <a:latin typeface="Montserrat"/>
+              </a:rPr>
+              <a:t>Conversor clase C, ± 0,5 %, memoria de 35 días</a:t>
+            </a:r>
+          </a:p>
+          <a:p>
+            <a:pPr>
+              <a:spcAft>
+                <a:spcPts val="1200"/>
+              </a:spcAft>
+            </a:pPr>
+            <a:r>
+              <a:rPr sz="2000" b="1" i="0">
+                <a:solidFill>
+                  <a:srgbClr val="F4A24C"/>
+                </a:solidFill>
+                <a:latin typeface="Montserrat"/>
+              </a:rPr>
+              <a:t>✓  </a:t>
+            </a:r>
+            <a:r>
+              <a:rPr sz="1900" b="0" i="0">
+                <a:solidFill>
+                  <a:srgbClr val="FFFFFF"/>
+                </a:solidFill>
+                <a:latin typeface="Montserrat"/>
+              </a:rPr>
+              <a:t>Manómetro 35-75 %, frontera cápsula/Bourdon 0,6 bar</a:t>
+            </a:r>
+          </a:p>
+          <a:p>
+            <a:pPr>
+              <a:spcAft>
+                <a:spcPts val="1200"/>
+              </a:spcAft>
+            </a:pPr>
+            <a:r>
+              <a:rPr sz="2000" b="1" i="0">
+                <a:solidFill>
+                  <a:srgbClr val="F4A24C"/>
+                </a:solidFill>
+                <a:latin typeface="Montserrat"/>
+              </a:rPr>
+              <a:t>✓  </a:t>
+            </a:r>
+            <a:r>
+              <a:rPr sz="1900" b="0" i="0">
+                <a:solidFill>
+                  <a:srgbClr val="FFFFFF"/>
+                </a:solidFill>
+                <a:latin typeface="Montserrat"/>
+              </a:rPr>
+              <a:t>Anexo A sencillo; anexo B por tabla</a:t>
+            </a:r>
+          </a:p>
+        </p:txBody>
+      </p:sp>
+      <p:sp>
+        <p:nvSpPr>
+          <p:cNvPr id="7" name="Rounded Rectangle 6"/>
+          <p:cNvSpPr/>
+          <p:nvPr/>
+        </p:nvSpPr>
+        <p:spPr>
+          <a:xfrm>
+            <a:off x="822960" y="5532120"/>
+            <a:ext cx="10515600" cy="822960"/>
+          </a:xfrm>
+          <a:prstGeom prst="roundRect">
+            <a:avLst/>
+          </a:prstGeom>
+          <a:solidFill>
+            <a:srgbClr val="E8801A"/>
+          </a:solidFill>
+          <a:ln>
+            <a:noFill/>
+          </a:ln>
+          <a:effectLst/>
+        </p:spPr>
+        <p:style>
+          <a:lnRef idx="1">
+            <a:schemeClr val="accent1"/>
+          </a:lnRef>
+          <a:fillRef idx="3">
+            <a:schemeClr val="accent1"/>
+          </a:fillRef>
+          <a:effectRef idx="2">
+            <a:schemeClr val="accent1"/>
+          </a:effectRef>
+          <a:fontRef idx="minor">
+            <a:schemeClr val="lt1"/>
+          </a:fontRef>
+        </p:style>
+        <p:txBody>
+          <a:bodyPr rtlCol="0" anchor="ctr"/>
+          <a:lstStyle/>
+          <a:p>
+            <a:pPr algn="ctr"/>
+          </a:p>
+        </p:txBody>
+      </p:sp>
+      <p:sp>
+        <p:nvSpPr>
+          <p:cNvPr id="8" name="TextBox 7"/>
+          <p:cNvSpPr txBox="1"/>
+          <p:nvPr/>
+        </p:nvSpPr>
+        <p:spPr>
+          <a:xfrm>
+            <a:off x="1051560" y="5623560"/>
+            <a:ext cx="10058400" cy="640080"/>
+          </a:xfrm>
+          <a:prstGeom prst="rect">
+            <a:avLst/>
+          </a:prstGeom>
+          <a:noFill/>
+        </p:spPr>
+        <p:txBody>
+          <a:bodyPr wrap="square">
+            <a:spAutoFit/>
+          </a:bodyPr>
+          <a:lstStyle/>
+          <a:p>
+            <a:r>
+              <a:rPr sz="1500" b="1" i="1">
+                <a:solidFill>
+                  <a:srgbClr val="1E2761"/>
+                </a:solidFill>
+                <a:latin typeface="Montserrat"/>
+              </a:rPr>
+              <a:t>Has cerrado el tema 12: del hueco del contador al tren de medida completo.</a:t>
             </a:r>
           </a:p>
         </p:txBody>
@@ -9494,7 +10523,7 @@
                 </a:solidFill>
                 <a:latin typeface="Montserrat"/>
               </a:rPr>
-              <a:t>003 / 019</a:t>
+              <a:t>003 / 020</a:t>
             </a:r>
           </a:p>
         </p:txBody>
@@ -9541,7 +10570,7 @@
         </p:nvSpPr>
         <p:spPr>
           <a:xfrm>
-            <a:off x="822960" y="457200"/>
+            <a:off x="822960" y="502920"/>
             <a:ext cx="8229600" cy="365760"/>
           </a:xfrm>
           <a:prstGeom prst="rect">
@@ -9556,13 +10585,13 @@
           <a:lstStyle/>
           <a:p>
             <a:r>
-              <a:rPr sz="1200" b="1" i="0">
-                <a:solidFill>
-                  <a:srgbClr val="64748B"/>
-                </a:solidFill>
-                <a:latin typeface="Montserrat"/>
-              </a:rPr>
-              <a:t>SISTEMA DE MEDICIÓN EN ERM</a:t>
+              <a:rPr sz="1300" b="1" i="0">
+                <a:solidFill>
+                  <a:srgbClr val="E8801A"/>
+                </a:solidFill>
+                <a:latin typeface="Montserrat"/>
+              </a:rPr>
+              <a:t>PARTES DE ESTE VÍDEO</a:t>
             </a:r>
           </a:p>
         </p:txBody>
@@ -9575,7 +10604,7 @@
         </p:nvSpPr>
         <p:spPr>
           <a:xfrm>
-            <a:off x="822960" y="868680"/>
+            <a:off x="822960" y="914400"/>
             <a:ext cx="10515600" cy="914400"/>
           </a:xfrm>
           <a:prstGeom prst="rect">
@@ -9596,130 +10625,30 @@
                 </a:solidFill>
                 <a:latin typeface="Montserrat"/>
               </a:rPr>
-              <a:t>La sala de máquinas de medir</a:t>
-            </a:r>
-          </a:p>
-        </p:txBody>
-      </p:sp>
-      <p:sp>
-        <p:nvSpPr>
-          <p:cNvPr id="7" name="TextBox 6"/>
-          <p:cNvSpPr txBox="1"/>
-          <p:nvPr/>
-        </p:nvSpPr>
-        <p:spPr>
-          <a:xfrm>
-            <a:off x="822960" y="1920240"/>
-            <a:ext cx="4983480" cy="4206240"/>
-          </a:xfrm>
-          <a:prstGeom prst="rect">
-            <a:avLst/>
-          </a:prstGeom>
-          <a:noFill/>
-        </p:spPr>
-        <p:txBody>
-          <a:bodyPr wrap="square">
-            <a:spAutoFit/>
-          </a:bodyPr>
-          <a:lstStyle/>
-          <a:p>
-            <a:pPr>
-              <a:spcAft>
-                <a:spcPts val="1000"/>
-              </a:spcAft>
-            </a:pPr>
-            <a:r>
-              <a:rPr sz="1600" b="1" i="0">
-                <a:solidFill>
-                  <a:srgbClr val="2E3A80"/>
-                </a:solidFill>
-                <a:latin typeface="Montserrat"/>
-              </a:rPr>
-              <a:t>•  </a:t>
-            </a:r>
-            <a:r>
-              <a:rPr sz="1600" b="0" i="0">
-                <a:solidFill>
-                  <a:srgbClr val="1B2330"/>
-                </a:solidFill>
-                <a:latin typeface="Montserrat"/>
-              </a:rPr>
-              <a:t>Cubre caudales máximos y mínimos</a:t>
-            </a:r>
-          </a:p>
-          <a:p>
-            <a:pPr>
-              <a:spcAft>
-                <a:spcPts val="1000"/>
-              </a:spcAft>
-            </a:pPr>
-            <a:r>
-              <a:rPr sz="1600" b="1" i="0">
-                <a:solidFill>
-                  <a:srgbClr val="2E3A80"/>
-                </a:solidFill>
-                <a:latin typeface="Montserrat"/>
-              </a:rPr>
-              <a:t>•  </a:t>
-            </a:r>
-            <a:r>
-              <a:rPr sz="1600" b="0" i="0">
-                <a:solidFill>
-                  <a:srgbClr val="1B2330"/>
-                </a:solidFill>
-                <a:latin typeface="Montserrat"/>
-              </a:rPr>
-              <a:t>Va después de la etapa de regulación</a:t>
-            </a:r>
-          </a:p>
-          <a:p>
-            <a:pPr>
-              <a:spcAft>
-                <a:spcPts val="1000"/>
-              </a:spcAft>
-            </a:pPr>
-            <a:r>
-              <a:rPr sz="1600" b="1" i="0">
-                <a:solidFill>
-                  <a:srgbClr val="2E3A80"/>
-                </a:solidFill>
-                <a:latin typeface="Montserrat"/>
-              </a:rPr>
-              <a:t>•  </a:t>
-            </a:r>
-            <a:r>
-              <a:rPr sz="1600" b="0" i="0">
-                <a:solidFill>
-                  <a:srgbClr val="1B2330"/>
-                </a:solidFill>
-                <a:latin typeface="Montserrat"/>
-              </a:rPr>
-              <a:t>Contador más sus acompañantes</a:t>
-            </a:r>
-          </a:p>
-        </p:txBody>
-      </p:sp>
-      <p:sp>
-        <p:nvSpPr>
-          <p:cNvPr id="8" name="imgph" descr="IMGQ:industrial gas regulation and metering station"/>
+              <a:t>En este vídeo</a:t>
+            </a:r>
+          </a:p>
+        </p:txBody>
+      </p:sp>
+      <p:sp>
+        <p:nvSpPr>
+          <p:cNvPr id="7" name="Rounded Rectangle 6"/>
           <p:cNvSpPr/>
           <p:nvPr/>
         </p:nvSpPr>
         <p:spPr>
           <a:xfrm>
-            <a:off x="5806440" y="1051560"/>
-            <a:ext cx="5298947" cy="4629150"/>
+            <a:off x="868680" y="1673352"/>
+            <a:ext cx="2011680" cy="73152"/>
           </a:xfrm>
           <a:prstGeom prst="roundRect">
             <a:avLst/>
           </a:prstGeom>
           <a:solidFill>
-            <a:srgbClr val="F3F6FB"/>
+            <a:srgbClr val="E8801A"/>
           </a:solidFill>
-          <a:ln w="12700">
-            <a:solidFill>
-              <a:srgbClr val="C7D2E6"/>
-            </a:solidFill>
+          <a:ln>
+            <a:noFill/>
           </a:ln>
           <a:effectLst/>
         </p:spPr>
@@ -9747,14 +10676,14 @@
       </p:sp>
       <p:sp>
         <p:nvSpPr>
-          <p:cNvPr id="9" name="TextBox 8"/>
+          <p:cNvPr id="8" name="TextBox 7"/>
           <p:cNvSpPr txBox="1"/>
           <p:nvPr/>
         </p:nvSpPr>
         <p:spPr>
           <a:xfrm>
-            <a:off x="6080760" y="2726055"/>
-            <a:ext cx="4750307" cy="1280160"/>
+            <a:off x="822960" y="2103120"/>
+            <a:ext cx="10515600" cy="4023360"/>
           </a:xfrm>
           <a:prstGeom prst="rect">
             <a:avLst/>
@@ -9767,27 +10696,228 @@
           </a:bodyPr>
           <a:lstStyle/>
           <a:p>
-            <a:pPr algn="ctr"/>
-            <a:r>
-              <a:rPr sz="1400" b="1" i="0">
-                <a:solidFill>
-                  <a:srgbClr val="64748B"/>
-                </a:solidFill>
-                <a:latin typeface="Montserrat"/>
-              </a:rPr>
-              <a:t>IMAGEN REALISTA</a:t>
-            </a:r>
-          </a:p>
-          <a:p>
-            <a:pPr algn="ctr"/>
-            <a:r>
-              <a:rPr sz="1100" b="0" i="1">
-                <a:solidFill>
-                  <a:srgbClr val="64748B"/>
-                </a:solidFill>
-                <a:latin typeface="Montserrat"/>
-              </a:rPr>
-              <a:t>industrial gas regulation and metering station</a:t>
+            <a:pPr>
+              <a:spcAft>
+                <a:spcPts val="900"/>
+              </a:spcAft>
+            </a:pPr>
+            <a:r>
+              <a:rPr sz="1800" b="1" i="0">
+                <a:solidFill>
+                  <a:srgbClr val="E8801A"/>
+                </a:solidFill>
+                <a:latin typeface="Montserrat"/>
+              </a:rPr>
+              <a:t>01   </a:t>
+            </a:r>
+            <a:r>
+              <a:rPr sz="1700" b="0" i="0">
+                <a:solidFill>
+                  <a:srgbClr val="1B2330"/>
+                </a:solidFill>
+                <a:latin typeface="Montserrat"/>
+              </a:rPr>
+              <a:t>Sistema de medición en ERM</a:t>
+            </a:r>
+          </a:p>
+          <a:p>
+            <a:pPr>
+              <a:spcAft>
+                <a:spcPts val="900"/>
+              </a:spcAft>
+            </a:pPr>
+            <a:r>
+              <a:rPr sz="1800" b="1" i="0">
+                <a:solidFill>
+                  <a:srgbClr val="E8801A"/>
+                </a:solidFill>
+                <a:latin typeface="Montserrat"/>
+              </a:rPr>
+              <a:t>02   </a:t>
+            </a:r>
+            <a:r>
+              <a:rPr sz="1700" b="0" i="0">
+                <a:solidFill>
+                  <a:srgbClr val="1B2330"/>
+                </a:solidFill>
+                <a:latin typeface="Montserrat"/>
+              </a:rPr>
+              <a:t>Según la potencia</a:t>
+            </a:r>
+          </a:p>
+          <a:p>
+            <a:pPr>
+              <a:spcAft>
+                <a:spcPts val="900"/>
+              </a:spcAft>
+            </a:pPr>
+            <a:r>
+              <a:rPr sz="1800" b="1" i="0">
+                <a:solidFill>
+                  <a:srgbClr val="E8801A"/>
+                </a:solidFill>
+                <a:latin typeface="Montserrat"/>
+              </a:rPr>
+              <a:t>03   </a:t>
+            </a:r>
+            <a:r>
+              <a:rPr sz="1700" b="0" i="0">
+                <a:solidFill>
+                  <a:srgbClr val="1B2330"/>
+                </a:solidFill>
+                <a:latin typeface="Montserrat"/>
+              </a:rPr>
+              <a:t>Excepciones y sustituciones</a:t>
+            </a:r>
+          </a:p>
+          <a:p>
+            <a:pPr>
+              <a:spcAft>
+                <a:spcPts val="900"/>
+              </a:spcAft>
+            </a:pPr>
+            <a:r>
+              <a:rPr sz="1800" b="1" i="0">
+                <a:solidFill>
+                  <a:srgbClr val="E8801A"/>
+                </a:solidFill>
+                <a:latin typeface="Montserrat"/>
+              </a:rPr>
+              <a:t>04   </a:t>
+            </a:r>
+            <a:r>
+              <a:rPr sz="1700" b="0" i="0">
+                <a:solidFill>
+                  <a:srgbClr val="1B2330"/>
+                </a:solidFill>
+                <a:latin typeface="Montserrat"/>
+              </a:rPr>
+              <a:t>By-pass y medida secundaria</a:t>
+            </a:r>
+          </a:p>
+          <a:p>
+            <a:pPr>
+              <a:spcAft>
+                <a:spcPts val="900"/>
+              </a:spcAft>
+            </a:pPr>
+            <a:r>
+              <a:rPr sz="1800" b="1" i="0">
+                <a:solidFill>
+                  <a:srgbClr val="E8801A"/>
+                </a:solidFill>
+                <a:latin typeface="Montserrat"/>
+              </a:rPr>
+              <a:t>05   </a:t>
+            </a:r>
+            <a:r>
+              <a:rPr sz="1700" b="0" i="0">
+                <a:solidFill>
+                  <a:srgbClr val="1B2330"/>
+                </a:solidFill>
+                <a:latin typeface="Montserrat"/>
+              </a:rPr>
+              <a:t>Contadores</a:t>
+            </a:r>
+          </a:p>
+          <a:p>
+            <a:pPr>
+              <a:spcAft>
+                <a:spcPts val="900"/>
+              </a:spcAft>
+            </a:pPr>
+            <a:r>
+              <a:rPr sz="1800" b="1" i="0">
+                <a:solidFill>
+                  <a:srgbClr val="E8801A"/>
+                </a:solidFill>
+                <a:latin typeface="Montserrat"/>
+              </a:rPr>
+              <a:t>06   </a:t>
+            </a:r>
+            <a:r>
+              <a:rPr sz="1700" b="0" i="0">
+                <a:solidFill>
+                  <a:srgbClr val="1B2330"/>
+                </a:solidFill>
+                <a:latin typeface="Montserrat"/>
+              </a:rPr>
+              <a:t>Conversores de volumen</a:t>
+            </a:r>
+          </a:p>
+          <a:p>
+            <a:pPr>
+              <a:spcAft>
+                <a:spcPts val="900"/>
+              </a:spcAft>
+            </a:pPr>
+            <a:r>
+              <a:rPr sz="1800" b="1" i="0">
+                <a:solidFill>
+                  <a:srgbClr val="E8801A"/>
+                </a:solidFill>
+                <a:latin typeface="Montserrat"/>
+              </a:rPr>
+              <a:t>07   </a:t>
+            </a:r>
+            <a:r>
+              <a:rPr sz="1700" b="0" i="0">
+                <a:solidFill>
+                  <a:srgbClr val="1B2330"/>
+                </a:solidFill>
+                <a:latin typeface="Montserrat"/>
+              </a:rPr>
+              <a:t>Conversores</a:t>
+            </a:r>
+          </a:p>
+          <a:p>
+            <a:pPr>
+              <a:spcAft>
+                <a:spcPts val="900"/>
+              </a:spcAft>
+            </a:pPr>
+            <a:r>
+              <a:rPr sz="1800" b="1" i="0">
+                <a:solidFill>
+                  <a:srgbClr val="E8801A"/>
+                </a:solidFill>
+                <a:latin typeface="Montserrat"/>
+              </a:rPr>
+              <a:t>08   </a:t>
+            </a:r>
+            <a:r>
+              <a:rPr sz="1700" b="0" i="0">
+                <a:solidFill>
+                  <a:srgbClr val="1B2330"/>
+                </a:solidFill>
+                <a:latin typeface="Montserrat"/>
+              </a:rPr>
+              <a:t>Manómetros</a:t>
+            </a:r>
+          </a:p>
+          <a:p>
+            <a:pPr>
+              <a:spcAft>
+                <a:spcPts val="900"/>
+              </a:spcAft>
+            </a:pPr>
+            <a:r>
+              <a:rPr sz="1800" b="1" i="0">
+                <a:solidFill>
+                  <a:srgbClr val="E8801A"/>
+                </a:solidFill>
+                <a:latin typeface="Montserrat"/>
+              </a:rPr>
+              <a:t>09   </a:t>
+            </a:r>
+            <a:r>
+              <a:rPr sz="1700" b="0" i="0">
+                <a:solidFill>
+                  <a:srgbClr val="1B2330"/>
+                </a:solidFill>
+                <a:latin typeface="Montserrat"/>
+              </a:rPr>
+              <a:t>Termómetros</a:t>
             </a:r>
           </a:p>
         </p:txBody>
@@ -9884,7 +11014,7 @@
                 </a:solidFill>
                 <a:latin typeface="Montserrat"/>
               </a:rPr>
-              <a:t>004 / 019</a:t>
+              <a:t>004 / 020</a:t>
             </a:r>
           </a:p>
         </p:txBody>
@@ -9932,7 +11062,7 @@
         <p:spPr>
           <a:xfrm>
             <a:off x="822960" y="457200"/>
-            <a:ext cx="8229600" cy="365760"/>
+            <a:ext cx="10058400" cy="365760"/>
           </a:xfrm>
           <a:prstGeom prst="rect">
             <a:avLst/>
@@ -9946,13 +11076,13 @@
           <a:lstStyle/>
           <a:p>
             <a:r>
-              <a:rPr sz="1200" b="1" i="0">
-                <a:solidFill>
-                  <a:srgbClr val="64748B"/>
-                </a:solidFill>
-                <a:latin typeface="Montserrat"/>
-              </a:rPr>
-              <a:t>SEGÚN LA POTENCIA</a:t>
+              <a:rPr sz="1300" b="1" i="0">
+                <a:solidFill>
+                  <a:srgbClr val="E8801A"/>
+                </a:solidFill>
+                <a:latin typeface="Montserrat"/>
+              </a:rPr>
+              <a:t>SISTEMA DE MEDICIÓN EN ERM</a:t>
             </a:r>
           </a:p>
         </p:txBody>
@@ -9980,26 +11110,70 @@
           <a:lstStyle/>
           <a:p>
             <a:r>
-              <a:rPr sz="2700" b="1" i="0">
+              <a:rPr sz="2800" b="1" i="0">
                 <a:solidFill>
                   <a:srgbClr val="1E2761"/>
                 </a:solidFill>
                 <a:latin typeface="Montserrat"/>
               </a:rPr>
-              <a:t>Cada potencia, su anexo</a:t>
-            </a:r>
-          </a:p>
-        </p:txBody>
-      </p:sp>
-      <p:sp>
-        <p:nvSpPr>
-          <p:cNvPr id="7" name="TextBox 6"/>
+              <a:t>La sala de máquinas de medir</a:t>
+            </a:r>
+          </a:p>
+        </p:txBody>
+      </p:sp>
+      <p:sp>
+        <p:nvSpPr>
+          <p:cNvPr id="7" name="Rounded Rectangle 6"/>
+          <p:cNvSpPr/>
+          <p:nvPr/>
+        </p:nvSpPr>
+        <p:spPr>
+          <a:xfrm>
+            <a:off x="868680" y="1627632"/>
+            <a:ext cx="2011680" cy="73152"/>
+          </a:xfrm>
+          <a:prstGeom prst="roundRect">
+            <a:avLst/>
+          </a:prstGeom>
+          <a:solidFill>
+            <a:srgbClr val="E8801A"/>
+          </a:solidFill>
+          <a:ln>
+            <a:noFill/>
+          </a:ln>
+          <a:effectLst/>
+        </p:spPr>
+        <p:style>
+          <a:lnRef idx="1">
+            <a:schemeClr val="accent1"/>
+          </a:lnRef>
+          <a:fillRef idx="3">
+            <a:schemeClr val="accent1"/>
+          </a:fillRef>
+          <a:effectRef idx="2">
+            <a:schemeClr val="accent1"/>
+          </a:effectRef>
+          <a:fontRef idx="minor">
+            <a:schemeClr val="lt1"/>
+          </a:fontRef>
+        </p:style>
+        <p:txBody>
+          <a:bodyPr rtlCol="0" anchor="ctr"/>
+          <a:lstStyle/>
+          <a:p>
+            <a:pPr algn="ctr"/>
+          </a:p>
+        </p:txBody>
+      </p:sp>
+      <p:sp>
+        <p:nvSpPr>
+          <p:cNvPr id="8" name="TextBox 7"/>
           <p:cNvSpPr txBox="1"/>
           <p:nvPr/>
         </p:nvSpPr>
         <p:spPr>
           <a:xfrm>
-            <a:off x="822960" y="1920240"/>
+            <a:off x="822960" y="1965960"/>
             <a:ext cx="4983480" cy="4206240"/>
           </a:xfrm>
           <a:prstGeom prst="rect">
@@ -10015,17 +11189,17 @@
           <a:p>
             <a:pPr>
               <a:spcAft>
-                <a:spcPts val="1000"/>
+                <a:spcPts val="1100"/>
               </a:spcAft>
             </a:pPr>
             <a:r>
               <a:rPr sz="1600" b="1" i="0">
                 <a:solidFill>
-                  <a:srgbClr val="2E3A80"/>
-                </a:solidFill>
-                <a:latin typeface="Montserrat"/>
-              </a:rPr>
-              <a:t>•  </a:t>
+                  <a:srgbClr val="E8801A"/>
+                </a:solidFill>
+                <a:latin typeface="Montserrat"/>
+              </a:rPr>
+              <a:t>▸  </a:t>
             </a:r>
             <a:r>
               <a:rPr sz="1600" b="0" i="0">
@@ -10034,23 +11208,23 @@
                 </a:solidFill>
                 <a:latin typeface="Montserrat"/>
               </a:rPr>
-              <a:t>Hasta 70 kW: anexo A</a:t>
+              <a:t>Cubre caudales máximos y mínimos</a:t>
             </a:r>
           </a:p>
           <a:p>
             <a:pPr>
               <a:spcAft>
-                <a:spcPts val="1000"/>
+                <a:spcPts val="1100"/>
               </a:spcAft>
             </a:pPr>
             <a:r>
               <a:rPr sz="1600" b="1" i="0">
                 <a:solidFill>
-                  <a:srgbClr val="2E3A80"/>
-                </a:solidFill>
-                <a:latin typeface="Montserrat"/>
-              </a:rPr>
-              <a:t>•  </a:t>
+                  <a:srgbClr val="E8801A"/>
+                </a:solidFill>
+                <a:latin typeface="Montserrat"/>
+              </a:rPr>
+              <a:t>▸  </a:t>
             </a:r>
             <a:r>
               <a:rPr sz="1600" b="0" i="0">
@@ -10059,23 +11233,23 @@
                 </a:solidFill>
                 <a:latin typeface="Montserrat"/>
               </a:rPr>
-              <a:t>Más de 70 kW, 2ª familia: legislación</a:t>
+              <a:t>Va después de la etapa de regulación</a:t>
             </a:r>
           </a:p>
           <a:p>
             <a:pPr>
               <a:spcAft>
-                <a:spcPts val="1000"/>
+                <a:spcPts val="1100"/>
               </a:spcAft>
             </a:pPr>
             <a:r>
               <a:rPr sz="1600" b="1" i="0">
                 <a:solidFill>
-                  <a:srgbClr val="2E3A80"/>
-                </a:solidFill>
-                <a:latin typeface="Montserrat"/>
-              </a:rPr>
-              <a:t>•  </a:t>
+                  <a:srgbClr val="E8801A"/>
+                </a:solidFill>
+                <a:latin typeface="Montserrat"/>
+              </a:rPr>
+              <a:t>▸  </a:t>
             </a:r>
             <a:r>
               <a:rPr sz="1600" b="0" i="0">
@@ -10084,14 +11258,14 @@
                 </a:solidFill>
                 <a:latin typeface="Montserrat"/>
               </a:rPr>
-              <a:t>Más de 70 kW, 3ª familia: anexo B</a:t>
-            </a:r>
-          </a:p>
-        </p:txBody>
-      </p:sp>
-      <p:sp>
-        <p:nvSpPr>
-          <p:cNvPr id="8" name="imgph" descr="IMGQ:large industrial gas metering station"/>
+              <a:t>Contador más sus acompañantes</a:t>
+            </a:r>
+          </a:p>
+        </p:txBody>
+      </p:sp>
+      <p:sp>
+        <p:nvSpPr>
+          <p:cNvPr id="9" name="imgph" descr="IMGQ:industrial gas regulation and metering station"/>
           <p:cNvSpPr/>
           <p:nvPr/>
         </p:nvSpPr>
@@ -10137,7 +11311,7 @@
       </p:sp>
       <p:sp>
         <p:nvSpPr>
-          <p:cNvPr id="9" name="TextBox 8"/>
+          <p:cNvPr id="10" name="TextBox 9"/>
           <p:cNvSpPr txBox="1"/>
           <p:nvPr/>
         </p:nvSpPr>
@@ -10177,7 +11351,7 @@
                 </a:solidFill>
                 <a:latin typeface="Montserrat"/>
               </a:rPr>
-              <a:t>large industrial gas metering station</a:t>
+              <a:t>industrial gas regulation and metering station</a:t>
             </a:r>
           </a:p>
         </p:txBody>
@@ -10274,7 +11448,7 @@
                 </a:solidFill>
                 <a:latin typeface="Montserrat"/>
               </a:rPr>
-              <a:t>005 / 019</a:t>
+              <a:t>005 / 020</a:t>
             </a:r>
           </a:p>
         </p:txBody>
@@ -10322,7 +11496,7 @@
         <p:spPr>
           <a:xfrm>
             <a:off x="822960" y="457200"/>
-            <a:ext cx="8229600" cy="365760"/>
+            <a:ext cx="10058400" cy="365760"/>
           </a:xfrm>
           <a:prstGeom prst="rect">
             <a:avLst/>
@@ -10336,13 +11510,13 @@
           <a:lstStyle/>
           <a:p>
             <a:r>
-              <a:rPr sz="1200" b="1" i="0">
-                <a:solidFill>
-                  <a:srgbClr val="64748B"/>
-                </a:solidFill>
-                <a:latin typeface="Montserrat"/>
-              </a:rPr>
-              <a:t>EXCEPCIONES Y SUSTITUCIONES</a:t>
+              <a:rPr sz="1300" b="1" i="0">
+                <a:solidFill>
+                  <a:srgbClr val="E8801A"/>
+                </a:solidFill>
+                <a:latin typeface="Montserrat"/>
+              </a:rPr>
+              <a:t>SEGÚN LA POTENCIA</a:t>
             </a:r>
           </a:p>
         </p:txBody>
@@ -10370,26 +11544,70 @@
           <a:lstStyle/>
           <a:p>
             <a:r>
-              <a:rPr sz="2700" b="1" i="0">
+              <a:rPr sz="2800" b="1" i="0">
                 <a:solidFill>
                   <a:srgbClr val="1E2761"/>
                 </a:solidFill>
                 <a:latin typeface="Montserrat"/>
               </a:rPr>
-              <a:t>Cuando manda otra norma</a:t>
-            </a:r>
-          </a:p>
-        </p:txBody>
-      </p:sp>
-      <p:sp>
-        <p:nvSpPr>
-          <p:cNvPr id="7" name="TextBox 6"/>
+              <a:t>Cada potencia, su anexo</a:t>
+            </a:r>
+          </a:p>
+        </p:txBody>
+      </p:sp>
+      <p:sp>
+        <p:nvSpPr>
+          <p:cNvPr id="7" name="Rounded Rectangle 6"/>
+          <p:cNvSpPr/>
+          <p:nvPr/>
+        </p:nvSpPr>
+        <p:spPr>
+          <a:xfrm>
+            <a:off x="868680" y="1627632"/>
+            <a:ext cx="2011680" cy="73152"/>
+          </a:xfrm>
+          <a:prstGeom prst="roundRect">
+            <a:avLst/>
+          </a:prstGeom>
+          <a:solidFill>
+            <a:srgbClr val="E8801A"/>
+          </a:solidFill>
+          <a:ln>
+            <a:noFill/>
+          </a:ln>
+          <a:effectLst/>
+        </p:spPr>
+        <p:style>
+          <a:lnRef idx="1">
+            <a:schemeClr val="accent1"/>
+          </a:lnRef>
+          <a:fillRef idx="3">
+            <a:schemeClr val="accent1"/>
+          </a:fillRef>
+          <a:effectRef idx="2">
+            <a:schemeClr val="accent1"/>
+          </a:effectRef>
+          <a:fontRef idx="minor">
+            <a:schemeClr val="lt1"/>
+          </a:fontRef>
+        </p:style>
+        <p:txBody>
+          <a:bodyPr rtlCol="0" anchor="ctr"/>
+          <a:lstStyle/>
+          <a:p>
+            <a:pPr algn="ctr"/>
+          </a:p>
+        </p:txBody>
+      </p:sp>
+      <p:sp>
+        <p:nvSpPr>
+          <p:cNvPr id="8" name="TextBox 7"/>
           <p:cNvSpPr txBox="1"/>
           <p:nvPr/>
         </p:nvSpPr>
         <p:spPr>
           <a:xfrm>
-            <a:off x="822960" y="1920240"/>
+            <a:off x="822960" y="1965960"/>
             <a:ext cx="4983480" cy="4206240"/>
           </a:xfrm>
           <a:prstGeom prst="rect">
@@ -10405,17 +11623,17 @@
           <a:p>
             <a:pPr>
               <a:spcAft>
-                <a:spcPts val="1000"/>
+                <a:spcPts val="1100"/>
               </a:spcAft>
             </a:pPr>
             <a:r>
               <a:rPr sz="1600" b="1" i="0">
                 <a:solidFill>
-                  <a:srgbClr val="2E3A80"/>
-                </a:solidFill>
-                <a:latin typeface="Montserrat"/>
-              </a:rPr>
-              <a:t>•  </a:t>
+                  <a:srgbClr val="E8801A"/>
+                </a:solidFill>
+                <a:latin typeface="Montserrat"/>
+              </a:rPr>
+              <a:t>▸  </a:t>
             </a:r>
             <a:r>
               <a:rPr sz="1600" b="0" i="0">
@@ -10424,23 +11642,23 @@
                 </a:solidFill>
                 <a:latin typeface="Montserrat"/>
               </a:rPr>
-              <a:t>Conjuntos A-6, A-10: su propia norma</a:t>
+              <a:t>Hasta 70 kW: anexo A</a:t>
             </a:r>
           </a:p>
           <a:p>
             <a:pPr>
               <a:spcAft>
-                <a:spcPts val="1000"/>
+                <a:spcPts val="1100"/>
               </a:spcAft>
             </a:pPr>
             <a:r>
               <a:rPr sz="1600" b="1" i="0">
                 <a:solidFill>
-                  <a:srgbClr val="2E3A80"/>
-                </a:solidFill>
-                <a:latin typeface="Montserrat"/>
-              </a:rPr>
-              <a:t>•  </a:t>
+                  <a:srgbClr val="E8801A"/>
+                </a:solidFill>
+                <a:latin typeface="Montserrat"/>
+              </a:rPr>
+              <a:t>▸  </a:t>
             </a:r>
             <a:r>
               <a:rPr sz="1600" b="0" i="0">
@@ -10449,23 +11667,23 @@
                 </a:solidFill>
                 <a:latin typeface="Montserrat"/>
               </a:rPr>
-              <a:t>Tras regulador UNE 60402: toma Peterson</a:t>
+              <a:t>Más de 70 kW, 2ª familia: legislación</a:t>
             </a:r>
           </a:p>
           <a:p>
             <a:pPr>
               <a:spcAft>
-                <a:spcPts val="1000"/>
+                <a:spcPts val="1100"/>
               </a:spcAft>
             </a:pPr>
             <a:r>
               <a:rPr sz="1600" b="1" i="0">
                 <a:solidFill>
-                  <a:srgbClr val="2E3A80"/>
-                </a:solidFill>
-                <a:latin typeface="Montserrat"/>
-              </a:rPr>
-              <a:t>•  </a:t>
+                  <a:srgbClr val="E8801A"/>
+                </a:solidFill>
+                <a:latin typeface="Montserrat"/>
+              </a:rPr>
+              <a:t>▸  </a:t>
             </a:r>
             <a:r>
               <a:rPr sz="1600" b="0" i="0">
@@ -10474,14 +11692,14 @@
                 </a:solidFill>
                 <a:latin typeface="Montserrat"/>
               </a:rPr>
-              <a:t>Red de MOP baja: toma de débil calibre</a:t>
-            </a:r>
-          </a:p>
-        </p:txBody>
-      </p:sp>
-      <p:sp>
-        <p:nvSpPr>
-          <p:cNvPr id="8" name="imgph" descr="IMGQ:gas pressure regulator valve close up"/>
+              <a:t>Más de 70 kW, 3ª familia: anexo B</a:t>
+            </a:r>
+          </a:p>
+        </p:txBody>
+      </p:sp>
+      <p:sp>
+        <p:nvSpPr>
+          <p:cNvPr id="9" name="imgph" descr="IMGQ:large industrial gas metering station"/>
           <p:cNvSpPr/>
           <p:nvPr/>
         </p:nvSpPr>
@@ -10527,7 +11745,7 @@
       </p:sp>
       <p:sp>
         <p:nvSpPr>
-          <p:cNvPr id="9" name="TextBox 8"/>
+          <p:cNvPr id="10" name="TextBox 9"/>
           <p:cNvSpPr txBox="1"/>
           <p:nvPr/>
         </p:nvSpPr>
@@ -10567,7 +11785,7 @@
                 </a:solidFill>
                 <a:latin typeface="Montserrat"/>
               </a:rPr>
-              <a:t>gas pressure regulator valve close up</a:t>
+              <a:t>large industrial gas metering station</a:t>
             </a:r>
           </a:p>
         </p:txBody>
@@ -10664,7 +11882,7 @@
                 </a:solidFill>
                 <a:latin typeface="Montserrat"/>
               </a:rPr>
-              <a:t>006 / 019</a:t>
+              <a:t>006 / 020</a:t>
             </a:r>
           </a:p>
         </p:txBody>
@@ -10712,7 +11930,7 @@
         <p:spPr>
           <a:xfrm>
             <a:off x="822960" y="457200"/>
-            <a:ext cx="8229600" cy="365760"/>
+            <a:ext cx="10058400" cy="365760"/>
           </a:xfrm>
           <a:prstGeom prst="rect">
             <a:avLst/>
@@ -10726,13 +11944,13 @@
           <a:lstStyle/>
           <a:p>
             <a:r>
-              <a:rPr sz="1200" b="1" i="0">
-                <a:solidFill>
-                  <a:srgbClr val="64748B"/>
-                </a:solidFill>
-                <a:latin typeface="Montserrat"/>
-              </a:rPr>
-              <a:t>BY-PASS Y MEDIDA SECUNDARIA</a:t>
+              <a:rPr sz="1300" b="1" i="0">
+                <a:solidFill>
+                  <a:srgbClr val="E8801A"/>
+                </a:solidFill>
+                <a:latin typeface="Montserrat"/>
+              </a:rPr>
+              <a:t>EXCEPCIONES Y SUSTITUCIONES</a:t>
             </a:r>
           </a:p>
         </p:txBody>
@@ -10760,26 +11978,70 @@
           <a:lstStyle/>
           <a:p>
             <a:r>
-              <a:rPr sz="2700" b="1" i="0">
+              <a:rPr sz="2800" b="1" i="0">
                 <a:solidFill>
                   <a:srgbClr val="1E2761"/>
                 </a:solidFill>
                 <a:latin typeface="Montserrat"/>
               </a:rPr>
-              <a:t>Cómodo y peligroso a la vez</a:t>
-            </a:r>
-          </a:p>
-        </p:txBody>
-      </p:sp>
-      <p:sp>
-        <p:nvSpPr>
-          <p:cNvPr id="7" name="TextBox 6"/>
+              <a:t>Cuando manda otra norma</a:t>
+            </a:r>
+          </a:p>
+        </p:txBody>
+      </p:sp>
+      <p:sp>
+        <p:nvSpPr>
+          <p:cNvPr id="7" name="Rounded Rectangle 6"/>
+          <p:cNvSpPr/>
+          <p:nvPr/>
+        </p:nvSpPr>
+        <p:spPr>
+          <a:xfrm>
+            <a:off x="868680" y="1627632"/>
+            <a:ext cx="2011680" cy="73152"/>
+          </a:xfrm>
+          <a:prstGeom prst="roundRect">
+            <a:avLst/>
+          </a:prstGeom>
+          <a:solidFill>
+            <a:srgbClr val="E8801A"/>
+          </a:solidFill>
+          <a:ln>
+            <a:noFill/>
+          </a:ln>
+          <a:effectLst/>
+        </p:spPr>
+        <p:style>
+          <a:lnRef idx="1">
+            <a:schemeClr val="accent1"/>
+          </a:lnRef>
+          <a:fillRef idx="3">
+            <a:schemeClr val="accent1"/>
+          </a:fillRef>
+          <a:effectRef idx="2">
+            <a:schemeClr val="accent1"/>
+          </a:effectRef>
+          <a:fontRef idx="minor">
+            <a:schemeClr val="lt1"/>
+          </a:fontRef>
+        </p:style>
+        <p:txBody>
+          <a:bodyPr rtlCol="0" anchor="ctr"/>
+          <a:lstStyle/>
+          <a:p>
+            <a:pPr algn="ctr"/>
+          </a:p>
+        </p:txBody>
+      </p:sp>
+      <p:sp>
+        <p:nvSpPr>
+          <p:cNvPr id="8" name="TextBox 7"/>
           <p:cNvSpPr txBox="1"/>
           <p:nvPr/>
         </p:nvSpPr>
         <p:spPr>
           <a:xfrm>
-            <a:off x="822960" y="1920240"/>
+            <a:off x="822960" y="1965960"/>
             <a:ext cx="4983480" cy="4206240"/>
           </a:xfrm>
           <a:prstGeom prst="rect">
@@ -10795,17 +12057,17 @@
           <a:p>
             <a:pPr>
               <a:spcAft>
-                <a:spcPts val="1000"/>
+                <a:spcPts val="1100"/>
               </a:spcAft>
             </a:pPr>
             <a:r>
               <a:rPr sz="1600" b="1" i="0">
                 <a:solidFill>
-                  <a:srgbClr val="2E3A80"/>
-                </a:solidFill>
-                <a:latin typeface="Montserrat"/>
-              </a:rPr>
-              <a:t>•  </a:t>
+                  <a:srgbClr val="E8801A"/>
+                </a:solidFill>
+                <a:latin typeface="Montserrat"/>
+              </a:rPr>
+              <a:t>▸  </a:t>
             </a:r>
             <a:r>
               <a:rPr sz="1600" b="0" i="0">
@@ -10814,23 +12076,23 @@
                 </a:solidFill>
                 <a:latin typeface="Montserrat"/>
               </a:rPr>
-              <a:t>By-pass: deja pasar todo el gas</a:t>
+              <a:t>Conjuntos A-6, A-10: su propia norma</a:t>
             </a:r>
           </a:p>
           <a:p>
             <a:pPr>
               <a:spcAft>
-                <a:spcPts val="1000"/>
+                <a:spcPts val="1100"/>
               </a:spcAft>
             </a:pPr>
             <a:r>
               <a:rPr sz="1600" b="1" i="0">
                 <a:solidFill>
-                  <a:srgbClr val="2E3A80"/>
-                </a:solidFill>
-                <a:latin typeface="Montserrat"/>
-              </a:rPr>
-              <a:t>•  </a:t>
+                  <a:srgbClr val="E8801A"/>
+                </a:solidFill>
+                <a:latin typeface="Montserrat"/>
+              </a:rPr>
+              <a:t>▸  </a:t>
             </a:r>
             <a:r>
               <a:rPr sz="1600" b="0" i="0">
@@ -10839,23 +12101,23 @@
                 </a:solidFill>
                 <a:latin typeface="Montserrat"/>
               </a:rPr>
-              <a:t>Precintable, bloqueable y con disco ciego</a:t>
+              <a:t>Tras regulador UNE 60402: toma Peterson</a:t>
             </a:r>
           </a:p>
           <a:p>
             <a:pPr>
               <a:spcAft>
-                <a:spcPts val="1000"/>
+                <a:spcPts val="1100"/>
               </a:spcAft>
             </a:pPr>
             <a:r>
               <a:rPr sz="1600" b="1" i="0">
                 <a:solidFill>
-                  <a:srgbClr val="2E3A80"/>
-                </a:solidFill>
-                <a:latin typeface="Montserrat"/>
-              </a:rPr>
-              <a:t>•  </a:t>
+                  <a:srgbClr val="E8801A"/>
+                </a:solidFill>
+                <a:latin typeface="Montserrat"/>
+              </a:rPr>
+              <a:t>▸  </a:t>
             </a:r>
             <a:r>
               <a:rPr sz="1600" b="0" i="0">
@@ -10864,14 +12126,14 @@
                 </a:solidFill>
                 <a:latin typeface="Montserrat"/>
               </a:rPr>
-              <a:t>Medida secundaria por si falla la principal</a:t>
-            </a:r>
-          </a:p>
-        </p:txBody>
-      </p:sp>
-      <p:sp>
-        <p:nvSpPr>
-          <p:cNvPr id="8" name="imgph" descr="IMGQ:gas pipe bypass valves industrial"/>
+              <a:t>Red de MOP baja: toma de débil calibre</a:t>
+            </a:r>
+          </a:p>
+        </p:txBody>
+      </p:sp>
+      <p:sp>
+        <p:nvSpPr>
+          <p:cNvPr id="9" name="imgph" descr="IMGQ:gas pressure regulator valve close up"/>
           <p:cNvSpPr/>
           <p:nvPr/>
         </p:nvSpPr>
@@ -10917,7 +12179,7 @@
       </p:sp>
       <p:sp>
         <p:nvSpPr>
-          <p:cNvPr id="9" name="TextBox 8"/>
+          <p:cNvPr id="10" name="TextBox 9"/>
           <p:cNvSpPr txBox="1"/>
           <p:nvPr/>
         </p:nvSpPr>
@@ -10957,7 +12219,7 @@
                 </a:solidFill>
                 <a:latin typeface="Montserrat"/>
               </a:rPr>
-              <a:t>gas pipe bypass valves industrial</a:t>
+              <a:t>gas pressure regulator valve close up</a:t>
             </a:r>
           </a:p>
         </p:txBody>
@@ -11054,7 +12316,7 @@
                 </a:solidFill>
                 <a:latin typeface="Montserrat"/>
               </a:rPr>
-              <a:t>007 / 019</a:t>
+              <a:t>007 / 020</a:t>
             </a:r>
           </a:p>
         </p:txBody>
@@ -11102,7 +12364,7 @@
         <p:spPr>
           <a:xfrm>
             <a:off x="822960" y="457200"/>
-            <a:ext cx="8229600" cy="365760"/>
+            <a:ext cx="10058400" cy="365760"/>
           </a:xfrm>
           <a:prstGeom prst="rect">
             <a:avLst/>
@@ -11116,13 +12378,13 @@
           <a:lstStyle/>
           <a:p>
             <a:r>
-              <a:rPr sz="1200" b="1" i="0">
-                <a:solidFill>
-                  <a:srgbClr val="64748B"/>
-                </a:solidFill>
-                <a:latin typeface="Montserrat"/>
-              </a:rPr>
-              <a:t>CONTADORES · TIPOS</a:t>
+              <a:rPr sz="1300" b="1" i="0">
+                <a:solidFill>
+                  <a:srgbClr val="E8801A"/>
+                </a:solidFill>
+                <a:latin typeface="Montserrat"/>
+              </a:rPr>
+              <a:t>BY-PASS Y MEDIDA SECUNDARIA</a:t>
             </a:r>
           </a:p>
         </p:txBody>
@@ -11150,26 +12412,70 @@
           <a:lstStyle/>
           <a:p>
             <a:r>
-              <a:rPr sz="2700" b="1" i="0">
+              <a:rPr sz="2800" b="1" i="0">
                 <a:solidFill>
                   <a:srgbClr val="1E2761"/>
                 </a:solidFill>
                 <a:latin typeface="Montserrat"/>
               </a:rPr>
-              <a:t>Cuatro maneras de contar</a:t>
-            </a:r>
-          </a:p>
-        </p:txBody>
-      </p:sp>
-      <p:sp>
-        <p:nvSpPr>
-          <p:cNvPr id="7" name="TextBox 6"/>
+              <a:t>Cómodo y peligroso a la vez</a:t>
+            </a:r>
+          </a:p>
+        </p:txBody>
+      </p:sp>
+      <p:sp>
+        <p:nvSpPr>
+          <p:cNvPr id="7" name="Rounded Rectangle 6"/>
+          <p:cNvSpPr/>
+          <p:nvPr/>
+        </p:nvSpPr>
+        <p:spPr>
+          <a:xfrm>
+            <a:off x="868680" y="1627632"/>
+            <a:ext cx="2011680" cy="73152"/>
+          </a:xfrm>
+          <a:prstGeom prst="roundRect">
+            <a:avLst/>
+          </a:prstGeom>
+          <a:solidFill>
+            <a:srgbClr val="E8801A"/>
+          </a:solidFill>
+          <a:ln>
+            <a:noFill/>
+          </a:ln>
+          <a:effectLst/>
+        </p:spPr>
+        <p:style>
+          <a:lnRef idx="1">
+            <a:schemeClr val="accent1"/>
+          </a:lnRef>
+          <a:fillRef idx="3">
+            <a:schemeClr val="accent1"/>
+          </a:fillRef>
+          <a:effectRef idx="2">
+            <a:schemeClr val="accent1"/>
+          </a:effectRef>
+          <a:fontRef idx="minor">
+            <a:schemeClr val="lt1"/>
+          </a:fontRef>
+        </p:style>
+        <p:txBody>
+          <a:bodyPr rtlCol="0" anchor="ctr"/>
+          <a:lstStyle/>
+          <a:p>
+            <a:pPr algn="ctr"/>
+          </a:p>
+        </p:txBody>
+      </p:sp>
+      <p:sp>
+        <p:nvSpPr>
+          <p:cNvPr id="8" name="TextBox 7"/>
           <p:cNvSpPr txBox="1"/>
           <p:nvPr/>
         </p:nvSpPr>
         <p:spPr>
           <a:xfrm>
-            <a:off x="822960" y="1920240"/>
+            <a:off x="822960" y="1965960"/>
             <a:ext cx="4983480" cy="4206240"/>
           </a:xfrm>
           <a:prstGeom prst="rect">
@@ -11185,17 +12491,17 @@
           <a:p>
             <a:pPr>
               <a:spcAft>
-                <a:spcPts val="1000"/>
+                <a:spcPts val="1100"/>
               </a:spcAft>
             </a:pPr>
             <a:r>
               <a:rPr sz="1600" b="1" i="0">
                 <a:solidFill>
-                  <a:srgbClr val="2E3A80"/>
-                </a:solidFill>
-                <a:latin typeface="Montserrat"/>
-              </a:rPr>
-              <a:t>•  </a:t>
+                  <a:srgbClr val="E8801A"/>
+                </a:solidFill>
+                <a:latin typeface="Montserrat"/>
+              </a:rPr>
+              <a:t>▸  </a:t>
             </a:r>
             <a:r>
               <a:rPr sz="1600" b="0" i="0">
@@ -11204,23 +12510,23 @@
                 </a:solidFill>
                 <a:latin typeface="Montserrat"/>
               </a:rPr>
-              <a:t>Paredes deformables (membrana)</a:t>
+              <a:t>By-pass: deja pasar todo el gas</a:t>
             </a:r>
           </a:p>
           <a:p>
             <a:pPr>
               <a:spcAft>
-                <a:spcPts val="1000"/>
+                <a:spcPts val="1100"/>
               </a:spcAft>
             </a:pPr>
             <a:r>
               <a:rPr sz="1600" b="1" i="0">
                 <a:solidFill>
-                  <a:srgbClr val="2E3A80"/>
-                </a:solidFill>
-                <a:latin typeface="Montserrat"/>
-              </a:rPr>
-              <a:t>•  </a:t>
+                  <a:srgbClr val="E8801A"/>
+                </a:solidFill>
+                <a:latin typeface="Montserrat"/>
+              </a:rPr>
+              <a:t>▸  </a:t>
             </a:r>
             <a:r>
               <a:rPr sz="1600" b="0" i="0">
@@ -11229,23 +12535,23 @@
                 </a:solidFill>
                 <a:latin typeface="Montserrat"/>
               </a:rPr>
-              <a:t>Pistones rotativos (volumétricos)</a:t>
+              <a:t>Precintable, bloqueable y con disco ciego</a:t>
             </a:r>
           </a:p>
           <a:p>
             <a:pPr>
               <a:spcAft>
-                <a:spcPts val="1000"/>
+                <a:spcPts val="1100"/>
               </a:spcAft>
             </a:pPr>
             <a:r>
               <a:rPr sz="1600" b="1" i="0">
                 <a:solidFill>
-                  <a:srgbClr val="2E3A80"/>
-                </a:solidFill>
-                <a:latin typeface="Montserrat"/>
-              </a:rPr>
-              <a:t>•  </a:t>
+                  <a:srgbClr val="E8801A"/>
+                </a:solidFill>
+                <a:latin typeface="Montserrat"/>
+              </a:rPr>
+              <a:t>▸  </a:t>
             </a:r>
             <a:r>
               <a:rPr sz="1600" b="0" i="0">
@@ -11254,14 +12560,14 @@
                 </a:solidFill>
                 <a:latin typeface="Montserrat"/>
               </a:rPr>
-              <a:t>Turbina y ultrasónicos</a:t>
-            </a:r>
-          </a:p>
-        </p:txBody>
-      </p:sp>
-      <p:sp>
-        <p:nvSpPr>
-          <p:cNvPr id="8" name="imgph" descr="IMGQ:industrial gas turbine meter"/>
+              <a:t>Medida secundaria por si falla la principal</a:t>
+            </a:r>
+          </a:p>
+        </p:txBody>
+      </p:sp>
+      <p:sp>
+        <p:nvSpPr>
+          <p:cNvPr id="9" name="imgph" descr="IMGQ:gas pipe bypass valves industrial"/>
           <p:cNvSpPr/>
           <p:nvPr/>
         </p:nvSpPr>
@@ -11307,7 +12613,7 @@
       </p:sp>
       <p:sp>
         <p:nvSpPr>
-          <p:cNvPr id="9" name="TextBox 8"/>
+          <p:cNvPr id="10" name="TextBox 9"/>
           <p:cNvSpPr txBox="1"/>
           <p:nvPr/>
         </p:nvSpPr>
@@ -11347,7 +12653,7 @@
                 </a:solidFill>
                 <a:latin typeface="Montserrat"/>
               </a:rPr>
-              <a:t>industrial gas turbine meter</a:t>
+              <a:t>gas pipe bypass valves industrial</a:t>
             </a:r>
           </a:p>
         </p:txBody>
@@ -11444,7 +12750,7 @@
                 </a:solidFill>
                 <a:latin typeface="Montserrat"/>
               </a:rPr>
-              <a:t>008 / 019</a:t>
+              <a:t>008 / 020</a:t>
             </a:r>
           </a:p>
         </p:txBody>
@@ -11492,7 +12798,7 @@
         <p:spPr>
           <a:xfrm>
             <a:off x="822960" y="457200"/>
-            <a:ext cx="8229600" cy="365760"/>
+            <a:ext cx="10058400" cy="365760"/>
           </a:xfrm>
           <a:prstGeom prst="rect">
             <a:avLst/>
@@ -11506,13 +12812,13 @@
           <a:lstStyle/>
           <a:p>
             <a:r>
-              <a:rPr sz="1200" b="1" i="0">
-                <a:solidFill>
-                  <a:srgbClr val="64748B"/>
-                </a:solidFill>
-                <a:latin typeface="Montserrat"/>
-              </a:rPr>
-              <a:t>CONTADORES · DIMENSIONAMIENTO</a:t>
+              <a:rPr sz="1300" b="1" i="0">
+                <a:solidFill>
+                  <a:srgbClr val="E8801A"/>
+                </a:solidFill>
+                <a:latin typeface="Montserrat"/>
+              </a:rPr>
+              <a:t>CONTADORES · TIPOS</a:t>
             </a:r>
           </a:p>
         </p:txBody>
@@ -11540,26 +12846,70 @@
           <a:lstStyle/>
           <a:p>
             <a:r>
-              <a:rPr sz="2700" b="1" i="0">
+              <a:rPr sz="2800" b="1" i="0">
                 <a:solidFill>
                   <a:srgbClr val="1E2761"/>
                 </a:solidFill>
                 <a:latin typeface="Montserrat"/>
               </a:rPr>
-              <a:t>Ni sobrado ni pillado</a:t>
-            </a:r>
-          </a:p>
-        </p:txBody>
-      </p:sp>
-      <p:sp>
-        <p:nvSpPr>
-          <p:cNvPr id="7" name="TextBox 6"/>
+              <a:t>Cuatro maneras de contar</a:t>
+            </a:r>
+          </a:p>
+        </p:txBody>
+      </p:sp>
+      <p:sp>
+        <p:nvSpPr>
+          <p:cNvPr id="7" name="Rounded Rectangle 6"/>
+          <p:cNvSpPr/>
+          <p:nvPr/>
+        </p:nvSpPr>
+        <p:spPr>
+          <a:xfrm>
+            <a:off x="868680" y="1627632"/>
+            <a:ext cx="2011680" cy="73152"/>
+          </a:xfrm>
+          <a:prstGeom prst="roundRect">
+            <a:avLst/>
+          </a:prstGeom>
+          <a:solidFill>
+            <a:srgbClr val="E8801A"/>
+          </a:solidFill>
+          <a:ln>
+            <a:noFill/>
+          </a:ln>
+          <a:effectLst/>
+        </p:spPr>
+        <p:style>
+          <a:lnRef idx="1">
+            <a:schemeClr val="accent1"/>
+          </a:lnRef>
+          <a:fillRef idx="3">
+            <a:schemeClr val="accent1"/>
+          </a:fillRef>
+          <a:effectRef idx="2">
+            <a:schemeClr val="accent1"/>
+          </a:effectRef>
+          <a:fontRef idx="minor">
+            <a:schemeClr val="lt1"/>
+          </a:fontRef>
+        </p:style>
+        <p:txBody>
+          <a:bodyPr rtlCol="0" anchor="ctr"/>
+          <a:lstStyle/>
+          <a:p>
+            <a:pPr algn="ctr"/>
+          </a:p>
+        </p:txBody>
+      </p:sp>
+      <p:sp>
+        <p:nvSpPr>
+          <p:cNvPr id="8" name="TextBox 7"/>
           <p:cNvSpPr txBox="1"/>
           <p:nvPr/>
         </p:nvSpPr>
         <p:spPr>
           <a:xfrm>
-            <a:off x="822960" y="1920240"/>
+            <a:off x="822960" y="1965960"/>
             <a:ext cx="4983480" cy="4206240"/>
           </a:xfrm>
           <a:prstGeom prst="rect">
@@ -11575,17 +12925,17 @@
           <a:p>
             <a:pPr>
               <a:spcAft>
-                <a:spcPts val="1000"/>
+                <a:spcPts val="1100"/>
               </a:spcAft>
             </a:pPr>
             <a:r>
               <a:rPr sz="1600" b="1" i="0">
                 <a:solidFill>
-                  <a:srgbClr val="2E3A80"/>
-                </a:solidFill>
-                <a:latin typeface="Montserrat"/>
-              </a:rPr>
-              <a:t>•  </a:t>
+                  <a:srgbClr val="E8801A"/>
+                </a:solidFill>
+                <a:latin typeface="Montserrat"/>
+              </a:rPr>
+              <a:t>▸  </a:t>
             </a:r>
             <a:r>
               <a:rPr sz="1600" b="0" i="0">
@@ -11594,23 +12944,23 @@
                 </a:solidFill>
                 <a:latin typeface="Montserrat"/>
               </a:rPr>
-              <a:t>Grado 3: entre el 60 % y el 85 %</a:t>
+              <a:t>Paredes deformables (membrana)</a:t>
             </a:r>
           </a:p>
           <a:p>
             <a:pPr>
               <a:spcAft>
-                <a:spcPts val="1000"/>
+                <a:spcPts val="1100"/>
               </a:spcAft>
             </a:pPr>
             <a:r>
               <a:rPr sz="1600" b="1" i="0">
                 <a:solidFill>
-                  <a:srgbClr val="2E3A80"/>
-                </a:solidFill>
-                <a:latin typeface="Montserrat"/>
-              </a:rPr>
-              <a:t>•  </a:t>
+                  <a:srgbClr val="E8801A"/>
+                </a:solidFill>
+                <a:latin typeface="Montserrat"/>
+              </a:rPr>
+              <a:t>▸  </a:t>
             </a:r>
             <a:r>
               <a:rPr sz="1600" b="0" i="0">
@@ -11619,23 +12969,23 @@
                 </a:solidFill>
                 <a:latin typeface="Montserrat"/>
               </a:rPr>
-              <a:t>Grados 1 y 2: entre el 40 % y el 85 %</a:t>
+              <a:t>Pistones rotativos (volumétricos)</a:t>
             </a:r>
           </a:p>
           <a:p>
             <a:pPr>
               <a:spcAft>
-                <a:spcPts val="1000"/>
+                <a:spcPts val="1100"/>
               </a:spcAft>
             </a:pPr>
             <a:r>
               <a:rPr sz="1600" b="1" i="0">
                 <a:solidFill>
-                  <a:srgbClr val="2E3A80"/>
-                </a:solidFill>
-                <a:latin typeface="Montserrat"/>
-              </a:rPr>
-              <a:t>•  </a:t>
+                  <a:srgbClr val="E8801A"/>
+                </a:solidFill>
+                <a:latin typeface="Montserrat"/>
+              </a:rPr>
+              <a:t>▸  </a:t>
             </a:r>
             <a:r>
               <a:rPr sz="1600" b="0" i="0">
@@ -11644,14 +12994,14 @@
                 </a:solidFill>
                 <a:latin typeface="Montserrat"/>
               </a:rPr>
-              <a:t>Siempre por encima del caudal Qt</a:t>
-            </a:r>
-          </a:p>
-        </p:txBody>
-      </p:sp>
-      <p:sp>
-        <p:nvSpPr>
-          <p:cNvPr id="8" name="imgph" descr="IMGQ:gas meter gauge dial reading"/>
+              <a:t>Turbina y ultrasónicos</a:t>
+            </a:r>
+          </a:p>
+        </p:txBody>
+      </p:sp>
+      <p:sp>
+        <p:nvSpPr>
+          <p:cNvPr id="9" name="imgph" descr="IMGQ:industrial gas turbine meter"/>
           <p:cNvSpPr/>
           <p:nvPr/>
         </p:nvSpPr>
@@ -11697,7 +13047,7 @@
       </p:sp>
       <p:sp>
         <p:nvSpPr>
-          <p:cNvPr id="9" name="TextBox 8"/>
+          <p:cNvPr id="10" name="TextBox 9"/>
           <p:cNvSpPr txBox="1"/>
           <p:nvPr/>
         </p:nvSpPr>
@@ -11737,7 +13087,7 @@
                 </a:solidFill>
                 <a:latin typeface="Montserrat"/>
               </a:rPr>
-              <a:t>gas meter gauge dial reading</a:t>
+              <a:t>industrial gas turbine meter</a:t>
             </a:r>
           </a:p>
         </p:txBody>
@@ -11834,7 +13184,7 @@
                 </a:solidFill>
                 <a:latin typeface="Montserrat"/>
               </a:rPr>
-              <a:t>009 / 019</a:t>
+              <a:t>009 / 020</a:t>
             </a:r>
           </a:p>
         </p:txBody>
@@ -11882,7 +13232,7 @@
         <p:spPr>
           <a:xfrm>
             <a:off x="822960" y="457200"/>
-            <a:ext cx="8229600" cy="365760"/>
+            <a:ext cx="10058400" cy="365760"/>
           </a:xfrm>
           <a:prstGeom prst="rect">
             <a:avLst/>
@@ -11896,13 +13246,13 @@
           <a:lstStyle/>
           <a:p>
             <a:r>
-              <a:rPr sz="1200" b="1" i="0">
-                <a:solidFill>
-                  <a:srgbClr val="64748B"/>
-                </a:solidFill>
-                <a:latin typeface="Montserrat"/>
-              </a:rPr>
-              <a:t>CONTADORES · EMISORES</a:t>
+              <a:rPr sz="1300" b="1" i="0">
+                <a:solidFill>
+                  <a:srgbClr val="E8801A"/>
+                </a:solidFill>
+                <a:latin typeface="Montserrat"/>
+              </a:rPr>
+              <a:t>CONTADORES · DIMENSIONAMIENTO</a:t>
             </a:r>
           </a:p>
         </p:txBody>
@@ -11930,26 +13280,70 @@
           <a:lstStyle/>
           <a:p>
             <a:r>
-              <a:rPr sz="2700" b="1" i="0">
+              <a:rPr sz="2800" b="1" i="0">
                 <a:solidFill>
                   <a:srgbClr val="1E2761"/>
                 </a:solidFill>
                 <a:latin typeface="Montserrat"/>
               </a:rPr>
-              <a:t>El doble emisor de impulsos</a:t>
-            </a:r>
-          </a:p>
-        </p:txBody>
-      </p:sp>
-      <p:sp>
-        <p:nvSpPr>
-          <p:cNvPr id="7" name="TextBox 6"/>
+              <a:t>Ni sobrado ni pillado</a:t>
+            </a:r>
+          </a:p>
+        </p:txBody>
+      </p:sp>
+      <p:sp>
+        <p:nvSpPr>
+          <p:cNvPr id="7" name="Rounded Rectangle 6"/>
+          <p:cNvSpPr/>
+          <p:nvPr/>
+        </p:nvSpPr>
+        <p:spPr>
+          <a:xfrm>
+            <a:off x="868680" y="1627632"/>
+            <a:ext cx="2011680" cy="73152"/>
+          </a:xfrm>
+          <a:prstGeom prst="roundRect">
+            <a:avLst/>
+          </a:prstGeom>
+          <a:solidFill>
+            <a:srgbClr val="E8801A"/>
+          </a:solidFill>
+          <a:ln>
+            <a:noFill/>
+          </a:ln>
+          <a:effectLst/>
+        </p:spPr>
+        <p:style>
+          <a:lnRef idx="1">
+            <a:schemeClr val="accent1"/>
+          </a:lnRef>
+          <a:fillRef idx="3">
+            <a:schemeClr val="accent1"/>
+          </a:fillRef>
+          <a:effectRef idx="2">
+            <a:schemeClr val="accent1"/>
+          </a:effectRef>
+          <a:fontRef idx="minor">
+            <a:schemeClr val="lt1"/>
+          </a:fontRef>
+        </p:style>
+        <p:txBody>
+          <a:bodyPr rtlCol="0" anchor="ctr"/>
+          <a:lstStyle/>
+          <a:p>
+            <a:pPr algn="ctr"/>
+          </a:p>
+        </p:txBody>
+      </p:sp>
+      <p:sp>
+        <p:nvSpPr>
+          <p:cNvPr id="8" name="TextBox 7"/>
           <p:cNvSpPr txBox="1"/>
           <p:nvPr/>
         </p:nvSpPr>
         <p:spPr>
           <a:xfrm>
-            <a:off x="822960" y="1920240"/>
+            <a:off x="822960" y="1965960"/>
             <a:ext cx="4983480" cy="4206240"/>
           </a:xfrm>
           <a:prstGeom prst="rect">
@@ -11965,17 +13359,17 @@
           <a:p>
             <a:pPr>
               <a:spcAft>
-                <a:spcPts val="1000"/>
+                <a:spcPts val="1100"/>
               </a:spcAft>
             </a:pPr>
             <a:r>
               <a:rPr sz="1600" b="1" i="0">
                 <a:solidFill>
-                  <a:srgbClr val="2E3A80"/>
-                </a:solidFill>
-                <a:latin typeface="Montserrat"/>
-              </a:rPr>
-              <a:t>•  </a:t>
+                  <a:srgbClr val="E8801A"/>
+                </a:solidFill>
+                <a:latin typeface="Montserrat"/>
+              </a:rPr>
+              <a:t>▸  </a:t>
             </a:r>
             <a:r>
               <a:rPr sz="1600" b="0" i="0">
@@ -11984,23 +13378,23 @@
                 </a:solidFill>
                 <a:latin typeface="Montserrat"/>
               </a:rPr>
-              <a:t>Todos con emisor de impulsos</a:t>
+              <a:t>Grado 3: entre el 60 % y el 85 %</a:t>
             </a:r>
           </a:p>
           <a:p>
             <a:pPr>
               <a:spcAft>
-                <a:spcPts val="1000"/>
+                <a:spcPts val="1100"/>
               </a:spcAft>
             </a:pPr>
             <a:r>
               <a:rPr sz="1600" b="1" i="0">
                 <a:solidFill>
-                  <a:srgbClr val="2E3A80"/>
-                </a:solidFill>
-                <a:latin typeface="Montserrat"/>
-              </a:rPr>
-              <a:t>•  </a:t>
+                  <a:srgbClr val="E8801A"/>
+                </a:solidFill>
+                <a:latin typeface="Montserrat"/>
+              </a:rPr>
+              <a:t>▸  </a:t>
             </a:r>
             <a:r>
               <a:rPr sz="1600" b="0" i="0">
@@ -12009,23 +13403,23 @@
                 </a:solidFill>
                 <a:latin typeface="Montserrat"/>
               </a:rPr>
-              <a:t>Turbina y pistones: doble emisor</a:t>
+              <a:t>Grados 1 y 2: entre el 40 % y el 85 %</a:t>
             </a:r>
           </a:p>
           <a:p>
             <a:pPr>
               <a:spcAft>
-                <a:spcPts val="1000"/>
+                <a:spcPts val="1100"/>
               </a:spcAft>
             </a:pPr>
             <a:r>
               <a:rPr sz="1600" b="1" i="0">
                 <a:solidFill>
-                  <a:srgbClr val="2E3A80"/>
-                </a:solidFill>
-                <a:latin typeface="Montserrat"/>
-              </a:rPr>
-              <a:t>•  </a:t>
+                  <a:srgbClr val="E8801A"/>
+                </a:solidFill>
+                <a:latin typeface="Montserrat"/>
+              </a:rPr>
+              <a:t>▸  </a:t>
             </a:r>
             <a:r>
               <a:rPr sz="1600" b="0" i="0">
@@ -12034,14 +13428,14 @@
                 </a:solidFill>
                 <a:latin typeface="Montserrat"/>
               </a:rPr>
-              <a:t>Para cazar fallos y fraude</a:t>
-            </a:r>
-          </a:p>
-        </p:txBody>
-      </p:sp>
-      <p:sp>
-        <p:nvSpPr>
-          <p:cNvPr id="8" name="imgph" descr="IMGQ:gas meter pulse emitter connection"/>
+              <a:t>Siempre por encima del caudal Qt</a:t>
+            </a:r>
+          </a:p>
+        </p:txBody>
+      </p:sp>
+      <p:sp>
+        <p:nvSpPr>
+          <p:cNvPr id="9" name="imgph" descr="IMGQ:gas meter gauge dial reading"/>
           <p:cNvSpPr/>
           <p:nvPr/>
         </p:nvSpPr>
@@ -12087,7 +13481,7 @@
       </p:sp>
       <p:sp>
         <p:nvSpPr>
-          <p:cNvPr id="9" name="TextBox 8"/>
+          <p:cNvPr id="10" name="TextBox 9"/>
           <p:cNvSpPr txBox="1"/>
           <p:nvPr/>
         </p:nvSpPr>
@@ -12127,7 +13521,7 @@
                 </a:solidFill>
                 <a:latin typeface="Montserrat"/>
               </a:rPr>
-              <a:t>gas meter pulse emitter connection</a:t>
+              <a:t>gas meter gauge dial reading</a:t>
             </a:r>
           </a:p>
         </p:txBody>

--- a/Curso Gas B/12 - UNE 60670 - Recintos de contadores/12 - UNE 60670 - Recintos de contadores - Vídeo 2.pptx
+++ b/Curso Gas B/12 - UNE 60670 - Recintos de contadores/12 - UNE 60670 - Recintos de contadores - Vídeo 2.pptx
@@ -979,12 +979,12 @@
           <a:lstStyle/>
           <a:p>
             <a:r>
-              <a:t>N1: El conversor de volumen es el que traduce lo que ve el contador a lo que de verdad se consume. ¿Qué clase y qué error máximo le pide la norma?</a:t>
-            </a:r>
-          </a:p>
-          <a:p>
-            <a:r>
-              <a:t>N2: De su precisión depende la factura, así que la exigencia es alta. Acabamos de verlo hace un momento.</a:t>
+              <a:t>N1: El conversor de volumen es el que traduce lo que ve el contador a lo que de verdad se consume. La pregunta: ¿qué clase y qué error máximo admisible le exige la norma? Escucha las opciones. Opción A: clase C, más menos medio por ciento. Opción B: clase B, más menos uno por ciento. Opción C: clase C, más menos uno coma seis por ciento. Opción D: clase A, más menos dos décimas por ciento. Párala y decide.</a:t>
+            </a:r>
+          </a:p>
+          <a:p>
+            <a:r>
+              <a:t>N2: De su precisión depende la factura, así que la exigencia es alta. Lo acabamos de ver hace un momento.</a:t>
             </a:r>
           </a:p>
         </p:txBody>
@@ -1054,12 +1054,12 @@
           <a:lstStyle/>
           <a:p>
             <a:r>
-              <a:t>N1: ¿Por qué clase C con medio por ciento?</a:t>
-            </a:r>
-          </a:p>
-          <a:p>
-            <a:r>
-              <a:t>N2: Porque es la exactitud más fina que se le pide a estos equipos. Un error máximo de más menos medio por ciento deja muy poco margen, y eso protege al usuario y a la compañía a la hora de facturar. Las otras opciones mezclan clases y errores que suenan bien pero no son los de la norma. El truco: asocia el conversor a tres datos que van juntos, clase C, medio por ciento de error y treinta y cinco días de memoria.</a:t>
+              <a:t>N2: La respuesta correcta es la opción A: clase C, más menos medio por ciento. Es la exactitud más fina que se le pide a estos equipos, y ese margen tan estrecho protege al usuario y a la compañía a la hora de facturar. Las otras opciones mezclan clases y errores que suenan bien pero no son los de la norma: en la opción C la clase C es correcta pero el uno coma seis no, y las clases B y A con esos errores tampoco valen. El truco: asocia el conversor a tres datos que van juntos, clase C, medio por ciento de error y treinta y cinco días de memoria.</a:t>
+            </a:r>
+          </a:p>
+          <a:p>
+            <a:r>
+              <a:t>N1: Clase C y medio por ciento; si oyes otra combinación, desconfía.</a:t>
             </a:r>
           </a:p>
         </p:txBody>
@@ -1429,7 +1429,7 @@
           <a:lstStyle/>
           <a:p>
             <a:r>
-              <a:t>N1: Hay una presión bisagra que separa los dos grandes tipos de manómetro, la cápsula y el tubo Bourdon. ¿Cuál es esa cifra?</a:t>
+              <a:t>N1: Hay una presión bisagra que separa los dos grandes tipos de manómetro, la cápsula y el tubo Bourdon. La pregunta: ¿cuál es esa cifra? Opción A: seis décimas de bar. Opción B: ocho centésimas de bar. Opción C: cuatro décimas de bar. Opción D: cinco bar. Tómate un momento.</a:t>
             </a:r>
           </a:p>
           <a:p>
@@ -1504,12 +1504,12 @@
           <a:lstStyle/>
           <a:p>
             <a:r>
-              <a:t>N1: ¿Por qué seis décimas de bar?</a:t>
-            </a:r>
-          </a:p>
-          <a:p>
-            <a:r>
-              <a:t>N2: Porque hasta seis décimas de bar de fondo de escala el manómetro es de tipo cápsula, para presiones bajas; y de seis décimas en adelante es de tubo Bourdon, para presiones más altas. Las otras cifras son distractores: ocho centésimas y cuatro décimas son tramos de la tabla de esferas, y cinco bar es el tope de la norma. El truco: quédate con seis décimas de bar como la frontera cápsula o Bourdon, y recuerda que cada uno cumple su propia norma impresa en el aparato.</a:t>
+              <a:t>N2: La respuesta correcta es la opción A: seis décimas de bar. Porque hasta seis décimas de bar de fondo de escala el manómetro es de tipo cápsula, para presiones bajas; y de seis décimas en adelante es de tubo Bourdon, para presiones más altas. Las otras cifras son distractores: ocho centésimas y cuatro décimas, las opciones B y C, son tramos de la tabla de esferas, y cinco bar, la opción D, es el tope de la norma. El truco: quédate con seis décimas de bar como la frontera cápsula o Bourdon, y recuerda que cada uno cumple su propia norma impresa en el aparato.</a:t>
+            </a:r>
+          </a:p>
+          <a:p>
+            <a:r>
+              <a:t>N1: Seis décimas de bar: por debajo cápsula, por encima Bourdon.</a:t>
             </a:r>
           </a:p>
         </p:txBody>
@@ -2330,7 +2330,7 @@
           <a:lstStyle/>
           <a:p>
             <a:r>
-              <a:t>N1: Pregunta de brújula. La norma parte el mundo de la medición en dos según la potencia de diseño. ¿En qué cifra está esa frontera?</a:t>
+              <a:t>N1: Pregunta de brújula, la jugamos de oído. La norma parte el mundo de la medición en dos según la potencia de diseño. La pregunta: ¿en qué cifra está esa frontera entre el anexo A y el anexo B? Opción A: setenta kilovatios. Opción B: cien kilovatios. Opción C: treinta y cinco kilovatios. Opción D: ciento cincuenta kilovatios. Piénsalo un momento.</a:t>
             </a:r>
           </a:p>
           <a:p>
@@ -2405,12 +2405,12 @@
           <a:lstStyle/>
           <a:p>
             <a:r>
-              <a:t>N1: ¿Por qué setenta y no otro valor?</a:t>
-            </a:r>
-          </a:p>
-          <a:p>
-            <a:r>
-              <a:t>N2: Porque hasta setenta kilovatios el esquema de medición lo marca el anexo A, el sencillo. En cuanto pasas de setenta, cambias de liga: si el gas es de tercera familia, el GLP, aplicas el anexo B; y si es de segunda familia, el natural, te remites a la legislación vigente. El truco para no fallar: setenta kilovatios es la puerta; por debajo, anexo A para todos; por encima, depende de la familia de gas.</a:t>
+              <a:t>N2: La respuesta correcta es la opción A: setenta kilovatios. Porque hasta setenta kilovatios el esquema de medición lo marca el anexo A, el sencillo. En cuanto pasas de setenta cambias de liga: si el gas es de tercera familia, el GLP, aplicas el anexo B; y si es de segunda familia, el natural, te remites a la legislación vigente. Las otras cifras, cien, treinta y cinco o ciento cincuenta, suenan pero no son la frontera. El truco para no fallar: setenta kilovatios es la puerta; por debajo, anexo A para todos; por encima, depende de la familia de gas.</a:t>
+            </a:r>
+          </a:p>
+          <a:p>
+            <a:r>
+              <a:t>N1: Y ojo, treinta y cinco te suena porque son los días de memoria del conversor, no una potencia.</a:t>
             </a:r>
           </a:p>
         </p:txBody>
